--- a/presentacion/cypress/Cypress-Qolqe.pptx
+++ b/presentacion/cypress/Cypress-Qolqe.pptx
@@ -16,8 +16,6 @@
     <p:sldId id="264" r:id="rId16"/>
     <p:sldId id="265" r:id="rId17"/>
     <p:sldId id="266" r:id="rId18"/>
-    <p:sldId id="267" r:id="rId19"/>
-    <p:sldId id="268" r:id="rId20"/>
   </p:sldIdLst>
   <p:sldSz cx="12191695" cy="6858000" type="screen4x3"/>
   <p:notesSz cx="6858000" cy="9144000"/>
@@ -743,7 +741,7 @@
           <a:lstStyle/>
           <a:p>
             <a:r>
-              <a:t>Ejecutar scripts/cypress.ps1 failure. La salida 1 es esperada. No presentarlo como un defecto de Qolqe. Abrir el HTML con scripts/cypress.ps1 report.</a:t>
+              <a:t>Actualizar con hallazgos medidos en docs/cypress/hallazgos.md. Fuente para límites: https://docs.cypress.io/app/references/trade-offs . El auto-wait no elimina todos los fallos intermitentes.</a:t>
             </a:r>
           </a:p>
         </p:txBody>
@@ -813,146 +811,6 @@
           <a:lstStyle/>
           <a:p>
             <a:r>
-              <a:t>Fuente: docs/cypress/hallazgos.md y docs/cypress/verificacion-local.json. La IA se verificó en ejecución interactiva; no se afirma verificación headless. Las ejecuciones públicas del workflow Cypress en GitHub Actions (main y rama codex/cypress-contactos, 24/10) terminaron en éxito: confirmar en la pestaña Actions antes de mencionarlo.</a:t>
-            </a:r>
-          </a:p>
-        </p:txBody>
-      </p:sp>
-      <p:sp>
-        <p:nvSpPr>
-          <p:cNvPr id="4" name="Slide Number Placeholder 3"/>
-          <p:cNvSpPr>
-            <a:spLocks noGrp="1"/>
-          </p:cNvSpPr>
-          <p:nvPr>
-            <p:ph type="sldNum" idx="5" sz="quarter"/>
-          </p:nvPr>
-        </p:nvSpPr>
-        <p:spPr/>
-      </p:sp>
-    </p:spTree>
-  </p:cSld>
-  <p:clrMapOvr>
-    <a:masterClrMapping/>
-  </p:clrMapOvr>
-</p:notes>
-</file>
-
-<file path=ppt/notesSlides/notesSlide12.xml><?xml version="1.0" encoding="utf-8"?>
-<p:notes xmlns:a="http://schemas.openxmlformats.org/drawingml/2006/main" xmlns:p="http://schemas.openxmlformats.org/presentationml/2006/main" xmlns:r="http://schemas.openxmlformats.org/officeDocument/2006/relationships">
-  <p:cSld>
-    <p:spTree>
-      <p:nvGrpSpPr>
-        <p:cNvPr id="1" name=""/>
-        <p:cNvGrpSpPr/>
-        <p:nvPr/>
-      </p:nvGrpSpPr>
-      <p:grpSpPr>
-        <a:xfrm>
-          <a:off x="0" y="0"/>
-          <a:ext cx="0" cy="0"/>
-          <a:chOff x="0" y="0"/>
-          <a:chExt cx="0" cy="0"/>
-        </a:xfrm>
-      </p:grpSpPr>
-      <p:sp>
-        <p:nvSpPr>
-          <p:cNvPr id="2" name="Slide Image Placeholder 1"/>
-          <p:cNvSpPr>
-            <a:spLocks noGrp="1"/>
-          </p:cNvSpPr>
-          <p:nvPr>
-            <p:ph type="sldImg" idx="2"/>
-          </p:nvPr>
-        </p:nvSpPr>
-        <p:spPr/>
-      </p:sp>
-      <p:sp>
-        <p:nvSpPr>
-          <p:cNvPr id="3" name="Notes Placeholder 2"/>
-          <p:cNvSpPr>
-            <a:spLocks noGrp="1"/>
-          </p:cNvSpPr>
-          <p:nvPr>
-            <p:ph type="body" idx="3" sz="quarter"/>
-          </p:nvPr>
-        </p:nvSpPr>
-        <p:spPr/>
-        <p:txBody>
-          <a:bodyPr/>
-          <a:lstStyle/>
-          <a:p>
-            <a:r>
-              <a:t>Actualizar con hallazgos medidos en docs/cypress/hallazgos.md. Fuente para límites: https://docs.cypress.io/app/references/trade-offs . El auto-wait no elimina todos los fallos intermitentes.</a:t>
-            </a:r>
-          </a:p>
-        </p:txBody>
-      </p:sp>
-      <p:sp>
-        <p:nvSpPr>
-          <p:cNvPr id="4" name="Slide Number Placeholder 3"/>
-          <p:cNvSpPr>
-            <a:spLocks noGrp="1"/>
-          </p:cNvSpPr>
-          <p:nvPr>
-            <p:ph type="sldNum" idx="5" sz="quarter"/>
-          </p:nvPr>
-        </p:nvSpPr>
-        <p:spPr/>
-      </p:sp>
-    </p:spTree>
-  </p:cSld>
-  <p:clrMapOvr>
-    <a:masterClrMapping/>
-  </p:clrMapOvr>
-</p:notes>
-</file>
-
-<file path=ppt/notesSlides/notesSlide13.xml><?xml version="1.0" encoding="utf-8"?>
-<p:notes xmlns:a="http://schemas.openxmlformats.org/drawingml/2006/main" xmlns:p="http://schemas.openxmlformats.org/presentationml/2006/main" xmlns:r="http://schemas.openxmlformats.org/officeDocument/2006/relationships">
-  <p:cSld>
-    <p:spTree>
-      <p:nvGrpSpPr>
-        <p:cNvPr id="1" name=""/>
-        <p:cNvGrpSpPr/>
-        <p:nvPr/>
-      </p:nvGrpSpPr>
-      <p:grpSpPr>
-        <a:xfrm>
-          <a:off x="0" y="0"/>
-          <a:ext cx="0" cy="0"/>
-          <a:chOff x="0" y="0"/>
-          <a:chExt cx="0" cy="0"/>
-        </a:xfrm>
-      </p:grpSpPr>
-      <p:sp>
-        <p:nvSpPr>
-          <p:cNvPr id="2" name="Slide Image Placeholder 1"/>
-          <p:cNvSpPr>
-            <a:spLocks noGrp="1"/>
-          </p:cNvSpPr>
-          <p:nvPr>
-            <p:ph type="sldImg" idx="2"/>
-          </p:nvPr>
-        </p:nvSpPr>
-        <p:spPr/>
-      </p:sp>
-      <p:sp>
-        <p:nvSpPr>
-          <p:cNvPr id="3" name="Notes Placeholder 2"/>
-          <p:cNvSpPr>
-            <a:spLocks noGrp="1"/>
-          </p:cNvSpPr>
-          <p:nvPr>
-            <p:ph type="body" idx="3" sz="quarter"/>
-          </p:nvPr>
-        </p:nvSpPr>
-        <p:spPr/>
-        <p:txBody>
-          <a:bodyPr/>
-          <a:lstStyle/>
-          <a:p>
-            <a:r>
               <a:t>Abrir el repositorio y docs/cypress/README.md. La regresión corrió en GitHub Actions en éxito (confirmar en Actions). Cerrar explicando el alcance demostrado y sus límites: 3 escenarios de HU-G4-01 CA1, no toda Qolqe.</a:t>
             </a:r>
           </a:p>
@@ -1023,7 +881,7 @@
           <a:lstStyle/>
           <a:p>
             <a:r>
-              <a:t>Relacionar con el ejemplo del botón que no responde del material de clase. Alcance: interfaz, API y base real.</a:t>
+              <a:t>Fuente: https://www.cypress.io/how-it-works . El proceso Node de apoyo no es el DOM. No usamos Selenium. La demo IA incorpora una conexión a Cypress Cloud. Mocha organiza describe/it; Chai aporta las aserciones.</a:t>
             </a:r>
           </a:p>
         </p:txBody>
@@ -1093,7 +951,7 @@
           <a:lstStyle/>
           <a:p>
             <a:r>
-              <a:t>Fuentes: https://www.cypress.io/blog/cypress-is-now-public-beta ; https://www.cypress.io/blog/cypress-10-release ; https://docs.cypress.io/api/commands/prompt#History</a:t>
+              <a:t>Fuente local: referencias/qolqe-wallet/docs/requisitos.md, revisión 8c7d2f0c939ede7765b7b80b98c10c3905693fda. Ver docs/cypress/trazabilidad.md. El E2E-G4-001 complementa G4-001 de Karate: añade botones, formulario, mensajes y persistencia visibles.</a:t>
             </a:r>
           </a:p>
         </p:txBody>
@@ -1163,7 +1021,7 @@
           <a:lstStyle/>
           <a:p>
             <a:r>
-              <a:t>Fuente: https://www.cypress.io/how-it-works . El proceso Node de apoyo no es el DOM. No usamos Selenium. La demo IA incorpora una conexión a Cypress Cloud. Mocha organiza describe/it; Chai aporta las aserciones.</a:t>
+              <a:t>Mostrar LoginPage.ts, ContactosPage.ts y el test. No guardamos estado mutable compartido. Fuente: https://docs.cypress.io/app/core-concepts/best-practices . POM es una decisión didáctica, no una recomendación universal de Cypress.</a:t>
             </a:r>
           </a:p>
         </p:txBody>
@@ -1233,7 +1091,7 @@
           <a:lstStyle/>
           <a:p>
             <a:r>
-              <a:t>Fuente local: referencias/qolqe-wallet/docs/requisitos.md, revisión 8c7d2f0c939ede7765b7b80b98c10c3905693fda. Ver docs/cypress/trazabilidad.md. El E2E-G4-001 complementa G4-001 de Karate: añade botones, formulario, mensajes y persistencia visibles.</a:t>
+              <a:t>Ejecutar scripts/cypress.ps1 open y seleccionar contactos-happy-path.cy.ts. cy.intercept observa la petición real, no sustituye la respuesta. Mostrar las aserciones y el registro de comandos.</a:t>
             </a:r>
           </a:p>
         </p:txBody>
@@ -1303,7 +1161,7 @@
           <a:lstStyle/>
           <a:p>
             <a:r>
-              <a:t>Mostrar LoginPage.ts, ContactosPage.ts y el test. No guardamos estado mutable compartido. Fuente: https://docs.cypress.io/app/core-concepts/best-practices . POM es una decisión didáctica, no una recomendación universal de Cypress.</a:t>
+              <a:t>Ejecutar scripts/cypress.ps1 ai-open (no el modo headless). Revisar el código generado antes de confiar en él. La caché puede reutilizar comandos. cy.prompt incluye self-healing según la documentación, pero nuestra demo solo muestra generación y ejecución: no afirmar que lo probamos. Fuente: https://docs.cypress.io/app/guides/ai-test-generation . Autenticación y ejecución Cloud deben ensayarse antes de exponer.</a:t>
             </a:r>
           </a:p>
         </p:txBody>
@@ -1373,7 +1231,7 @@
           <a:lstStyle/>
           <a:p>
             <a:r>
-              <a:t>Ejecutar scripts/cypress.ps1 open y seleccionar contactos-happy-path.cy.ts. cy.intercept observa la petición real, no sustituye la respuesta. Mostrar las aserciones y el registro de comandos.</a:t>
+              <a:t>Fuente: https://docs.cypress.io/app/guides/screenshots-and-videos . video:true graba durante run; el hook after:spec elimina los videos de los specs sin intentos fallidos. No equivale a grabar únicamente en el instante del fallo. Capturas automáticas y video aplican a run, no a open. Dato real: una ejecución verde avisó «Insufficient frames captured to create video».</a:t>
             </a:r>
           </a:p>
         </p:txBody>
@@ -1443,7 +1301,7 @@
           <a:lstStyle/>
           <a:p>
             <a:r>
-              <a:t>Ejecutar scripts/cypress.ps1 ai-open (no el modo headless). Revisar el código generado antes de confiar en él. La caché puede reutilizar comandos. No afirmar self-healing: solo demostramos generación y ejecución. Fuente: https://docs.cypress.io/app/guides/ai-test-generation . Autenticación y ejecución Cloud deben ensayarse antes de exponer.</a:t>
+              <a:t>Ejecutar scripts/cypress.ps1 failure. La salida 1 es esperada. No presentarlo como un defecto de Qolqe. Abrir el HTML con scripts/cypress.ps1 report.</a:t>
             </a:r>
           </a:p>
         </p:txBody>
@@ -1513,7 +1371,7 @@
           <a:lstStyle/>
           <a:p>
             <a:r>
-              <a:t>Fuente: https://docs.cypress.io/app/guides/screenshots-and-videos . video:true graba durante run; el hook after:spec elimina los videos de los specs sin intentos fallidos. No equivale a grabar únicamente en el instante del fallo. Capturas automáticas y video aplican a run, no a open. Dato real: una ejecución verde avisó «Insufficient frames captured to create video».</a:t>
+              <a:t>Fuente: docs/cypress/hallazgos.md y docs/cypress/verificacion-local.json. La IA se verificó en ejecución interactiva; no se afirma verificación headless. Las ejecuciones públicas del workflow Cypress en GitHub Actions (main y rama codex/cypress-contactos, 24/10) terminaron en éxito: confirmar en la pestaña Actions antes de mencionarlo.</a:t>
             </a:r>
           </a:p>
         </p:txBody>
@@ -5073,7 +4931,7 @@
                 </a:solidFill>
                 <a:latin typeface="Calibri"/>
               </a:rPr>
-              <a:t>Fallo didáctico</a:t>
+              <a:t>Dificultades y límites en Qolqe</a:t>
             </a:r>
           </a:p>
         </p:txBody>
@@ -5112,7 +4970,7 @@
                 </a:solidFill>
                 <a:latin typeface="Calibri"/>
               </a:rPr>
-              <a:t>Una expectativa incorrecta produce una prueba roja, y Cypress conserva la evidencia</a:t>
+              <a:t>Lo que costó y lo que esta suite no cubre</a:t>
             </a:r>
           </a:p>
         </p:txBody>
@@ -5156,30 +5014,45 @@
           </a:p>
         </p:txBody>
       </p:sp>
-      <p:pic>
-        <p:nvPicPr>
-          <p:cNvPr id="5" name="Picture 4" descr="fail.png"/>
-          <p:cNvPicPr>
-            <a:picLocks noChangeAspect="1"/>
-          </p:cNvPicPr>
-          <p:nvPr/>
-        </p:nvPicPr>
-        <p:blipFill>
-          <a:blip r:embed="rId3"/>
-          <a:stretch>
-            <a:fillRect/>
-          </a:stretch>
-        </p:blipFill>
-        <p:spPr>
-          <a:xfrm>
-            <a:off x="548640" y="1645920"/>
-            <a:ext cx="6766560" cy="1477529"/>
+      <p:sp>
+        <p:nvSpPr>
+          <p:cNvPr id="5" name="TextBox 4"/>
+          <p:cNvSpPr txBox="1"/>
+          <p:nvPr/>
+        </p:nvSpPr>
+        <p:spPr>
+          <a:xfrm>
+            <a:off x="548640" y="1600200"/>
+            <a:ext cx="11064240" cy="365760"/>
           </a:xfrm>
           <a:prstGeom prst="rect">
             <a:avLst/>
           </a:prstGeom>
-        </p:spPr>
-      </p:pic>
+          <a:noFill/>
+        </p:spPr>
+        <p:txBody>
+          <a:bodyPr wrap="square" lIns="0" rIns="0" tIns="0" bIns="0" anchor="t">
+            <a:spAutoFit/>
+          </a:bodyPr>
+          <a:lstStyle/>
+          <a:p>
+            <a:pPr algn="l">
+              <a:spcAft>
+                <a:spcPts val="0"/>
+              </a:spcAft>
+            </a:pPr>
+            <a:r>
+              <a:rPr sz="1800" b="1" i="0">
+                <a:solidFill>
+                  <a:srgbClr val="0F1B2D"/>
+                </a:solidFill>
+                <a:latin typeface="Calibri"/>
+              </a:rPr>
+              <a:t>Dificultades reales</a:t>
+            </a:r>
+          </a:p>
+        </p:txBody>
+      </p:sp>
       <p:sp>
         <p:nvSpPr>
           <p:cNvPr id="6" name="Rounded Rectangle 5"/>
@@ -5188,8 +5061,319 @@
         </p:nvSpPr>
         <p:spPr>
           <a:xfrm>
-            <a:off x="7680960" y="1645920"/>
-            <a:ext cx="3931920" cy="896112"/>
+            <a:off x="548640" y="2011680"/>
+            <a:ext cx="2697480" cy="2011680"/>
+          </a:xfrm>
+          <a:prstGeom prst="roundRect">
+            <a:avLst>
+              <a:gd name="adj" fmla="val 8000"/>
+            </a:avLst>
+          </a:prstGeom>
+          <a:solidFill>
+            <a:srgbClr val="FFFFFF"/>
+          </a:solidFill>
+          <a:ln w="19050">
+            <a:solidFill>
+              <a:srgbClr val="E8923A"/>
+            </a:solidFill>
+          </a:ln>
+        </p:spPr>
+        <p:style>
+          <a:lnRef idx="1">
+            <a:schemeClr val="accent1"/>
+          </a:lnRef>
+          <a:fillRef idx="3">
+            <a:schemeClr val="accent1"/>
+          </a:fillRef>
+          <a:effectRef idx="2">
+            <a:schemeClr val="accent1"/>
+          </a:effectRef>
+          <a:fontRef idx="minor">
+            <a:schemeClr val="lt1"/>
+          </a:fontRef>
+        </p:style>
+        <p:txBody>
+          <a:bodyPr rtlCol="0" anchor="ctr" wrap="square" lIns="109728" rIns="109728" tIns="54864" bIns="54864"/>
+          <a:lstStyle/>
+          <a:p>
+            <a:pPr algn="l"/>
+            <a:r>
+              <a:rPr sz="1500" b="1">
+                <a:solidFill>
+                  <a:srgbClr val="1B2733"/>
+                </a:solidFill>
+                <a:latin typeface="Calibri"/>
+              </a:rPr>
+              <a:t>Node 20 incompatible</a:t>
+            </a:r>
+          </a:p>
+          <a:p>
+            <a:pPr algn="l"/>
+            <a:r>
+              <a:rPr sz="1300" b="0">
+                <a:solidFill>
+                  <a:srgbClr val="5B6B7A"/>
+                </a:solidFill>
+                <a:latin typeface="Calibri"/>
+              </a:rPr>
+              <a:t>El equipo tenía Node 20; Cypress 16 exige 22, 24 o 26 o superior. El lanzador elige uno compatible</a:t>
+            </a:r>
+          </a:p>
+        </p:txBody>
+      </p:sp>
+      <p:sp>
+        <p:nvSpPr>
+          <p:cNvPr id="7" name="Rounded Rectangle 6"/>
+          <p:cNvSpPr/>
+          <p:nvPr/>
+        </p:nvSpPr>
+        <p:spPr>
+          <a:xfrm>
+            <a:off x="3383280" y="2011680"/>
+            <a:ext cx="2697480" cy="2011680"/>
+          </a:xfrm>
+          <a:prstGeom prst="roundRect">
+            <a:avLst>
+              <a:gd name="adj" fmla="val 8000"/>
+            </a:avLst>
+          </a:prstGeom>
+          <a:solidFill>
+            <a:srgbClr val="FFFFFF"/>
+          </a:solidFill>
+          <a:ln w="19050">
+            <a:solidFill>
+              <a:srgbClr val="E8923A"/>
+            </a:solidFill>
+          </a:ln>
+        </p:spPr>
+        <p:style>
+          <a:lnRef idx="1">
+            <a:schemeClr val="accent1"/>
+          </a:lnRef>
+          <a:fillRef idx="3">
+            <a:schemeClr val="accent1"/>
+          </a:fillRef>
+          <a:effectRef idx="2">
+            <a:schemeClr val="accent1"/>
+          </a:effectRef>
+          <a:fontRef idx="minor">
+            <a:schemeClr val="lt1"/>
+          </a:fontRef>
+        </p:style>
+        <p:txBody>
+          <a:bodyPr rtlCol="0" anchor="ctr" wrap="square" lIns="109728" rIns="109728" tIns="54864" bIns="54864"/>
+          <a:lstStyle/>
+          <a:p>
+            <a:pPr algn="l"/>
+            <a:r>
+              <a:rPr sz="1500" b="1">
+                <a:solidFill>
+                  <a:srgbClr val="1B2733"/>
+                </a:solidFill>
+                <a:latin typeface="Calibri"/>
+              </a:rPr>
+              <a:t>Comillas de PowerShell 5</a:t>
+            </a:r>
+          </a:p>
+          <a:p>
+            <a:pPr algn="l"/>
+            <a:r>
+              <a:rPr sz="1300" b="0">
+                <a:solidFill>
+                  <a:srgbClr val="5B6B7A"/>
+                </a:solidFill>
+                <a:latin typeface="Calibri"/>
+              </a:rPr>
+              <a:t>Eliminaban comillas al pasar expresiones a Node; se simplificó la detección de versión</a:t>
+            </a:r>
+          </a:p>
+        </p:txBody>
+      </p:sp>
+      <p:sp>
+        <p:nvSpPr>
+          <p:cNvPr id="8" name="Rounded Rectangle 7"/>
+          <p:cNvSpPr/>
+          <p:nvPr/>
+        </p:nvSpPr>
+        <p:spPr>
+          <a:xfrm>
+            <a:off x="6217920" y="2011680"/>
+            <a:ext cx="2697480" cy="2011680"/>
+          </a:xfrm>
+          <a:prstGeom prst="roundRect">
+            <a:avLst>
+              <a:gd name="adj" fmla="val 8000"/>
+            </a:avLst>
+          </a:prstGeom>
+          <a:solidFill>
+            <a:srgbClr val="FFFFFF"/>
+          </a:solidFill>
+          <a:ln w="19050">
+            <a:solidFill>
+              <a:srgbClr val="E8923A"/>
+            </a:solidFill>
+          </a:ln>
+        </p:spPr>
+        <p:style>
+          <a:lnRef idx="1">
+            <a:schemeClr val="accent1"/>
+          </a:lnRef>
+          <a:fillRef idx="3">
+            <a:schemeClr val="accent1"/>
+          </a:fillRef>
+          <a:effectRef idx="2">
+            <a:schemeClr val="accent1"/>
+          </a:effectRef>
+          <a:fontRef idx="minor">
+            <a:schemeClr val="lt1"/>
+          </a:fontRef>
+        </p:style>
+        <p:txBody>
+          <a:bodyPr rtlCol="0" anchor="ctr" wrap="square" lIns="109728" rIns="109728" tIns="54864" bIns="54864"/>
+          <a:lstStyle/>
+          <a:p>
+            <a:pPr algn="l"/>
+            <a:r>
+              <a:rPr sz="1500" b="1">
+                <a:solidFill>
+                  <a:srgbClr val="1B2733"/>
+                </a:solidFill>
+                <a:latin typeface="Calibri"/>
+              </a:rPr>
+              <a:t>cy.prompt y Cloud</a:t>
+            </a:r>
+          </a:p>
+          <a:p>
+            <a:pPr algn="l"/>
+            <a:r>
+              <a:rPr sz="1300" b="0">
+                <a:solidFill>
+                  <a:srgbClr val="5B6B7A"/>
+                </a:solidFill>
+                <a:latin typeface="Calibri"/>
+              </a:rPr>
+              <a:t>El primer intento falló al descargar su módulo Cloud; luego se completó el acceso y el projectId</a:t>
+            </a:r>
+          </a:p>
+        </p:txBody>
+      </p:sp>
+      <p:sp>
+        <p:nvSpPr>
+          <p:cNvPr id="9" name="Rounded Rectangle 8"/>
+          <p:cNvSpPr/>
+          <p:nvPr/>
+        </p:nvSpPr>
+        <p:spPr>
+          <a:xfrm>
+            <a:off x="9052560" y="2011680"/>
+            <a:ext cx="2697480" cy="2011680"/>
+          </a:xfrm>
+          <a:prstGeom prst="roundRect">
+            <a:avLst>
+              <a:gd name="adj" fmla="val 8000"/>
+            </a:avLst>
+          </a:prstGeom>
+          <a:solidFill>
+            <a:srgbClr val="FFFFFF"/>
+          </a:solidFill>
+          <a:ln w="19050">
+            <a:solidFill>
+              <a:srgbClr val="E8923A"/>
+            </a:solidFill>
+          </a:ln>
+        </p:spPr>
+        <p:style>
+          <a:lnRef idx="1">
+            <a:schemeClr val="accent1"/>
+          </a:lnRef>
+          <a:fillRef idx="3">
+            <a:schemeClr val="accent1"/>
+          </a:fillRef>
+          <a:effectRef idx="2">
+            <a:schemeClr val="accent1"/>
+          </a:effectRef>
+          <a:fontRef idx="minor">
+            <a:schemeClr val="lt1"/>
+          </a:fontRef>
+        </p:style>
+        <p:txBody>
+          <a:bodyPr rtlCol="0" anchor="ctr" wrap="square" lIns="109728" rIns="109728" tIns="54864" bIns="54864"/>
+          <a:lstStyle/>
+          <a:p>
+            <a:pPr algn="l"/>
+            <a:r>
+              <a:rPr sz="1500" b="1">
+                <a:solidFill>
+                  <a:srgbClr val="1B2733"/>
+                </a:solidFill>
+                <a:latin typeface="Calibri"/>
+              </a:rPr>
+              <a:t>Placeholder {{alias}}</a:t>
+            </a:r>
+          </a:p>
+          <a:p>
+            <a:pPr algn="l"/>
+            <a:r>
+              <a:rPr sz="1300" b="0">
+                <a:solidFill>
+                  <a:srgbClr val="5B6B7A"/>
+                </a:solidFill>
+                <a:latin typeface="Calibri"/>
+              </a:rPr>
+              <a:t>La verificación con {{alias}} requirió escribir el texto explícito «Contacto IA»</a:t>
+            </a:r>
+          </a:p>
+        </p:txBody>
+      </p:sp>
+      <p:sp>
+        <p:nvSpPr>
+          <p:cNvPr id="10" name="TextBox 9"/>
+          <p:cNvSpPr txBox="1"/>
+          <p:nvPr/>
+        </p:nvSpPr>
+        <p:spPr>
+          <a:xfrm>
+            <a:off x="548640" y="4343400"/>
+            <a:ext cx="11064240" cy="365760"/>
+          </a:xfrm>
+          <a:prstGeom prst="rect">
+            <a:avLst/>
+          </a:prstGeom>
+          <a:noFill/>
+        </p:spPr>
+        <p:txBody>
+          <a:bodyPr wrap="square" lIns="0" rIns="0" tIns="0" bIns="0" anchor="t">
+            <a:spAutoFit/>
+          </a:bodyPr>
+          <a:lstStyle/>
+          <a:p>
+            <a:pPr algn="l">
+              <a:spcAft>
+                <a:spcPts val="0"/>
+              </a:spcAft>
+            </a:pPr>
+            <a:r>
+              <a:rPr sz="1800" b="1" i="0">
+                <a:solidFill>
+                  <a:srgbClr val="0F1B2D"/>
+                </a:solidFill>
+                <a:latin typeface="Calibri"/>
+              </a:rPr>
+              <a:t>Límites de nuestra suite</a:t>
+            </a:r>
+          </a:p>
+        </p:txBody>
+      </p:sp>
+      <p:sp>
+        <p:nvSpPr>
+          <p:cNvPr id="11" name="Rounded Rectangle 10"/>
+          <p:cNvSpPr/>
+          <p:nvPr/>
+        </p:nvSpPr>
+        <p:spPr>
+          <a:xfrm>
+            <a:off x="548640" y="4800600"/>
+            <a:ext cx="3611880" cy="1097280"/>
           </a:xfrm>
           <a:prstGeom prst="roundRect">
             <a:avLst>
@@ -5223,41 +5407,29 @@
           <a:bodyPr rtlCol="0" anchor="ctr" wrap="square" lIns="109728" rIns="109728" tIns="54864" bIns="54864"/>
           <a:lstStyle/>
           <a:p>
-            <a:pPr algn="l"/>
-            <a:r>
-              <a:rPr sz="1600" b="1">
+            <a:pPr algn="ctr"/>
+            <a:r>
+              <a:rPr sz="1400" b="0">
                 <a:solidFill>
                   <a:srgbClr val="1B2733"/>
                 </a:solidFill>
                 <a:latin typeface="Calibri"/>
               </a:rPr>
-              <a:t>Captura PNG</a:t>
-            </a:r>
-          </a:p>
-          <a:p>
-            <a:pPr algn="l"/>
-            <a:r>
-              <a:rPr sz="1300" b="0">
-                <a:solidFill>
-                  <a:srgbClr val="5B6B7A"/>
-                </a:solidFill>
-                <a:latin typeface="Calibri"/>
-              </a:rPr>
-              <a:t>del momento del fallo</a:t>
-            </a:r>
-          </a:p>
-        </p:txBody>
-      </p:sp>
-      <p:sp>
-        <p:nvSpPr>
-          <p:cNvPr id="7" name="Rounded Rectangle 6"/>
+              <a:t>3 escenarios de un flujo: no toda Qolqe</a:t>
+            </a:r>
+          </a:p>
+        </p:txBody>
+      </p:sp>
+      <p:sp>
+        <p:nvSpPr>
+          <p:cNvPr id="12" name="Rounded Rectangle 11"/>
           <p:cNvSpPr/>
           <p:nvPr/>
         </p:nvSpPr>
         <p:spPr>
           <a:xfrm>
-            <a:off x="7680960" y="2697480"/>
-            <a:ext cx="3931920" cy="896112"/>
+            <a:off x="4297679" y="4800600"/>
+            <a:ext cx="3611880" cy="1097280"/>
           </a:xfrm>
           <a:prstGeom prst="roundRect">
             <a:avLst>
@@ -5291,41 +5463,29 @@
           <a:bodyPr rtlCol="0" anchor="ctr" wrap="square" lIns="109728" rIns="109728" tIns="54864" bIns="54864"/>
           <a:lstStyle/>
           <a:p>
-            <a:pPr algn="l"/>
-            <a:r>
-              <a:rPr sz="1600" b="1">
+            <a:pPr algn="ctr"/>
+            <a:r>
+              <a:rPr sz="1400" b="0">
                 <a:solidFill>
                   <a:srgbClr val="1B2733"/>
                 </a:solidFill>
                 <a:latin typeface="Calibri"/>
               </a:rPr>
-              <a:t>Video MP4</a:t>
-            </a:r>
-          </a:p>
-          <a:p>
-            <a:pPr algn="l"/>
-            <a:r>
-              <a:rPr sz="1300" b="0">
-                <a:solidFill>
-                  <a:srgbClr val="5B6B7A"/>
-                </a:solidFill>
-                <a:latin typeface="Calibri"/>
-              </a:rPr>
-              <a:t>del spec fallido</a:t>
-            </a:r>
-          </a:p>
-        </p:txBody>
-      </p:sp>
-      <p:sp>
-        <p:nvSpPr>
-          <p:cNvPr id="8" name="Rounded Rectangle 7"/>
+              <a:t>Regresión sin Cypress Cloud; solo la demo IA lo necesita</a:t>
+            </a:r>
+          </a:p>
+        </p:txBody>
+      </p:sp>
+      <p:sp>
+        <p:nvSpPr>
+          <p:cNvPr id="13" name="Rounded Rectangle 12"/>
           <p:cNvSpPr/>
           <p:nvPr/>
         </p:nvSpPr>
         <p:spPr>
           <a:xfrm>
-            <a:off x="7680960" y="3749039"/>
-            <a:ext cx="3931920" cy="896112"/>
+            <a:off x="8046719" y="4800600"/>
+            <a:ext cx="3611880" cy="1097280"/>
           </a:xfrm>
           <a:prstGeom prst="roundRect">
             <a:avLst>
@@ -5359,161 +5519,15 @@
           <a:bodyPr rtlCol="0" anchor="ctr" wrap="square" lIns="109728" rIns="109728" tIns="54864" bIns="54864"/>
           <a:lstStyle/>
           <a:p>
-            <a:pPr algn="l"/>
-            <a:r>
-              <a:rPr sz="1600" b="1">
+            <a:pPr algn="ctr"/>
+            <a:r>
+              <a:rPr sz="1400" b="0">
                 <a:solidFill>
                   <a:srgbClr val="1B2733"/>
                 </a:solidFill>
                 <a:latin typeface="Calibri"/>
               </a:rPr>
-              <a:t>Reporte HTML</a:t>
-            </a:r>
-          </a:p>
-          <a:p>
-            <a:pPr algn="l"/>
-            <a:r>
-              <a:rPr sz="1300" b="0">
-                <a:solidFill>
-                  <a:srgbClr val="5B6B7A"/>
-                </a:solidFill>
-                <a:latin typeface="Calibri"/>
-              </a:rPr>
-              <a:t>con el error y la diferencia</a:t>
-            </a:r>
-          </a:p>
-        </p:txBody>
-      </p:sp>
-      <p:sp>
-        <p:nvSpPr>
-          <p:cNvPr id="9" name="Rounded Rectangle 8"/>
-          <p:cNvSpPr/>
-          <p:nvPr/>
-        </p:nvSpPr>
-        <p:spPr>
-          <a:xfrm>
-            <a:off x="548640" y="4206240"/>
-            <a:ext cx="6766560" cy="1737360"/>
-          </a:xfrm>
-          <a:prstGeom prst="roundRect">
-            <a:avLst>
-              <a:gd name="adj" fmla="val 8000"/>
-            </a:avLst>
-          </a:prstGeom>
-          <a:solidFill>
-            <a:srgbClr val="0F1B2D"/>
-          </a:solidFill>
-          <a:ln>
-            <a:noFill/>
-          </a:ln>
-        </p:spPr>
-        <p:style>
-          <a:lnRef idx="1">
-            <a:schemeClr val="accent1"/>
-          </a:lnRef>
-          <a:fillRef idx="3">
-            <a:schemeClr val="accent1"/>
-          </a:fillRef>
-          <a:effectRef idx="2">
-            <a:schemeClr val="accent1"/>
-          </a:effectRef>
-          <a:fontRef idx="minor">
-            <a:schemeClr val="lt1"/>
-          </a:fontRef>
-        </p:style>
-        <p:txBody>
-          <a:bodyPr rtlCol="0" anchor="ctr" wrap="square" lIns="109728" rIns="109728" tIns="54864" bIns="54864"/>
-          <a:lstStyle/>
-          <a:p>
-            <a:pPr algn="l"/>
-            <a:r>
-              <a:rPr sz="1600" b="1">
-                <a:solidFill>
-                  <a:srgbClr val="2BD18F"/>
-                </a:solidFill>
-                <a:latin typeface="Calibri"/>
-              </a:rPr>
-              <a:t>Qué esperar</a:t>
-            </a:r>
-          </a:p>
-          <a:p>
-            <a:pPr algn="l"/>
-            <a:r>
-              <a:rPr sz="1500" b="0">
-                <a:solidFill>
-                  <a:srgbClr val="FFFFFF"/>
-                </a:solidFill>
-                <a:latin typeface="Calibri"/>
-              </a:rPr>
-              <a:t>Creamos un contacto y la demo exige deliberadamente dos. Cypress informa que encontró 1 y esperaba 2.</a:t>
-            </a:r>
-          </a:p>
-          <a:p>
-            <a:pPr algn="l"/>
-            <a:r>
-              <a:rPr sz="1500" b="0">
-                <a:solidFill>
-                  <a:srgbClr val="FFFFFF"/>
-                </a:solidFill>
-                <a:latin typeface="Calibri"/>
-              </a:rPr>
-              <a:t>Salida 1 esperada. Fuera de regresión y de CI.</a:t>
-            </a:r>
-          </a:p>
-        </p:txBody>
-      </p:sp>
-      <p:sp>
-        <p:nvSpPr>
-          <p:cNvPr id="10" name="Rounded Rectangle 9"/>
-          <p:cNvSpPr/>
-          <p:nvPr/>
-        </p:nvSpPr>
-        <p:spPr>
-          <a:xfrm>
-            <a:off x="7680960" y="4892040"/>
-            <a:ext cx="3931920" cy="1051560"/>
-          </a:xfrm>
-          <a:prstGeom prst="roundRect">
-            <a:avLst>
-              <a:gd name="adj" fmla="val 8000"/>
-            </a:avLst>
-          </a:prstGeom>
-          <a:solidFill>
-            <a:srgbClr val="FFF4E5"/>
-          </a:solidFill>
-          <a:ln w="19050">
-            <a:solidFill>
-              <a:srgbClr val="E8923A"/>
-            </a:solidFill>
-          </a:ln>
-        </p:spPr>
-        <p:style>
-          <a:lnRef idx="1">
-            <a:schemeClr val="accent1"/>
-          </a:lnRef>
-          <a:fillRef idx="3">
-            <a:schemeClr val="accent1"/>
-          </a:fillRef>
-          <a:effectRef idx="2">
-            <a:schemeClr val="accent1"/>
-          </a:effectRef>
-          <a:fontRef idx="minor">
-            <a:schemeClr val="lt1"/>
-          </a:fontRef>
-        </p:style>
-        <p:txBody>
-          <a:bodyPr rtlCol="0" anchor="ctr" wrap="square" lIns="109728" rIns="109728" tIns="54864" bIns="54864"/>
-          <a:lstStyle/>
-          <a:p>
-            <a:pPr algn="ctr"/>
-            <a:r>
-              <a:rPr sz="1400" b="0">
-                <a:solidFill>
-                  <a:srgbClr val="1B2733"/>
-                </a:solidFill>
-                <a:latin typeface="Calibri"/>
-              </a:rPr>
-              <a:t>No es un defecto de Qolqe: es una expectativa falsa a propósito</a:t>
+              <a:t>Los reintentos de Cypress no garantizan ausencia de fallos intermitentes</a:t>
             </a:r>
           </a:p>
         </p:txBody>
@@ -5578,7 +5592,7 @@
                 </a:solidFill>
                 <a:latin typeface="Calibri"/>
               </a:rPr>
-              <a:t>Resultados verificados</a:t>
+              <a:t>Entrega y reproducción</a:t>
             </a:r>
           </a:p>
         </p:txBody>
@@ -5617,7 +5631,7 @@
                 </a:solidFill>
                 <a:latin typeface="Calibri"/>
               </a:rPr>
-              <a:t>Comprobación del 24 de octubre: Cypress 16.2.0, Chrome 156, Node 24, Qolqe fijado en 8c7d2f0</a:t>
+              <a:t>Código, presentación y ejecución documentada</a:t>
             </a:r>
           </a:p>
         </p:txBody>
@@ -5657,1587 +5671,6 @@
                 <a:latin typeface="Calibri"/>
               </a:rPr>
               <a:t>11</a:t>
-            </a:r>
-          </a:p>
-        </p:txBody>
-      </p:sp>
-      <p:sp>
-        <p:nvSpPr>
-          <p:cNvPr id="5" name="Rounded Rectangle 4"/>
-          <p:cNvSpPr/>
-          <p:nvPr/>
-        </p:nvSpPr>
-        <p:spPr>
-          <a:xfrm>
-            <a:off x="548640" y="1645920"/>
-            <a:ext cx="2651760" cy="1554480"/>
-          </a:xfrm>
-          <a:prstGeom prst="roundRect">
-            <a:avLst>
-              <a:gd name="adj" fmla="val 8000"/>
-            </a:avLst>
-          </a:prstGeom>
-          <a:solidFill>
-            <a:srgbClr val="FFFFFF"/>
-          </a:solidFill>
-          <a:ln w="19050">
-            <a:solidFill>
-              <a:srgbClr val="D5DEE8"/>
-            </a:solidFill>
-          </a:ln>
-        </p:spPr>
-        <p:style>
-          <a:lnRef idx="1">
-            <a:schemeClr val="accent1"/>
-          </a:lnRef>
-          <a:fillRef idx="3">
-            <a:schemeClr val="accent1"/>
-          </a:fillRef>
-          <a:effectRef idx="2">
-            <a:schemeClr val="accent1"/>
-          </a:effectRef>
-          <a:fontRef idx="minor">
-            <a:schemeClr val="lt1"/>
-          </a:fontRef>
-        </p:style>
-        <p:txBody>
-          <a:bodyPr rtlCol="0" anchor="ctr"/>
-          <a:lstStyle/>
-          <a:p>
-            <a:pPr algn="ctr"/>
-          </a:p>
-        </p:txBody>
-      </p:sp>
-      <p:sp>
-        <p:nvSpPr>
-          <p:cNvPr id="6" name="TextBox 5"/>
-          <p:cNvSpPr txBox="1"/>
-          <p:nvPr/>
-        </p:nvSpPr>
-        <p:spPr>
-          <a:xfrm>
-            <a:off x="548640" y="1783080"/>
-            <a:ext cx="2651760" cy="822960"/>
-          </a:xfrm>
-          <a:prstGeom prst="rect">
-            <a:avLst/>
-          </a:prstGeom>
-          <a:noFill/>
-        </p:spPr>
-        <p:txBody>
-          <a:bodyPr wrap="square" lIns="0" rIns="0" tIns="0" bIns="0" anchor="t">
-            <a:spAutoFit/>
-          </a:bodyPr>
-          <a:lstStyle/>
-          <a:p>
-            <a:pPr algn="ctr">
-              <a:spcAft>
-                <a:spcPts val="0"/>
-              </a:spcAft>
-            </a:pPr>
-            <a:r>
-              <a:rPr sz="4800" b="1" i="0">
-                <a:solidFill>
-                  <a:srgbClr val="2BD18F"/>
-                </a:solidFill>
-                <a:latin typeface="Cambria"/>
-              </a:rPr>
-              <a:t>1</a:t>
-            </a:r>
-          </a:p>
-        </p:txBody>
-      </p:sp>
-      <p:sp>
-        <p:nvSpPr>
-          <p:cNvPr id="7" name="TextBox 6"/>
-          <p:cNvSpPr txBox="1"/>
-          <p:nvPr/>
-        </p:nvSpPr>
-        <p:spPr>
-          <a:xfrm>
-            <a:off x="685800" y="2697480"/>
-            <a:ext cx="2377440" cy="457200"/>
-          </a:xfrm>
-          <a:prstGeom prst="rect">
-            <a:avLst/>
-          </a:prstGeom>
-          <a:noFill/>
-        </p:spPr>
-        <p:txBody>
-          <a:bodyPr wrap="square" lIns="0" rIns="0" tIns="0" bIns="0" anchor="t">
-            <a:spAutoFit/>
-          </a:bodyPr>
-          <a:lstStyle/>
-          <a:p>
-            <a:pPr algn="ctr">
-              <a:spcAft>
-                <a:spcPts val="0"/>
-              </a:spcAft>
-            </a:pPr>
-            <a:r>
-              <a:rPr sz="1400" b="0" i="0">
-                <a:solidFill>
-                  <a:srgbClr val="1B2733"/>
-                </a:solidFill>
-                <a:latin typeface="Calibri"/>
-              </a:rPr>
-              <a:t>smoke aprobado</a:t>
-            </a:r>
-          </a:p>
-        </p:txBody>
-      </p:sp>
-      <p:sp>
-        <p:nvSpPr>
-          <p:cNvPr id="8" name="Rounded Rectangle 7"/>
-          <p:cNvSpPr/>
-          <p:nvPr/>
-        </p:nvSpPr>
-        <p:spPr>
-          <a:xfrm>
-            <a:off x="3383280" y="1645920"/>
-            <a:ext cx="2651760" cy="1554480"/>
-          </a:xfrm>
-          <a:prstGeom prst="roundRect">
-            <a:avLst>
-              <a:gd name="adj" fmla="val 8000"/>
-            </a:avLst>
-          </a:prstGeom>
-          <a:solidFill>
-            <a:srgbClr val="FFFFFF"/>
-          </a:solidFill>
-          <a:ln w="19050">
-            <a:solidFill>
-              <a:srgbClr val="D5DEE8"/>
-            </a:solidFill>
-          </a:ln>
-        </p:spPr>
-        <p:style>
-          <a:lnRef idx="1">
-            <a:schemeClr val="accent1"/>
-          </a:lnRef>
-          <a:fillRef idx="3">
-            <a:schemeClr val="accent1"/>
-          </a:fillRef>
-          <a:effectRef idx="2">
-            <a:schemeClr val="accent1"/>
-          </a:effectRef>
-          <a:fontRef idx="minor">
-            <a:schemeClr val="lt1"/>
-          </a:fontRef>
-        </p:style>
-        <p:txBody>
-          <a:bodyPr rtlCol="0" anchor="ctr"/>
-          <a:lstStyle/>
-          <a:p>
-            <a:pPr algn="ctr"/>
-          </a:p>
-        </p:txBody>
-      </p:sp>
-      <p:sp>
-        <p:nvSpPr>
-          <p:cNvPr id="9" name="TextBox 8"/>
-          <p:cNvSpPr txBox="1"/>
-          <p:nvPr/>
-        </p:nvSpPr>
-        <p:spPr>
-          <a:xfrm>
-            <a:off x="3383280" y="1783080"/>
-            <a:ext cx="2651760" cy="822960"/>
-          </a:xfrm>
-          <a:prstGeom prst="rect">
-            <a:avLst/>
-          </a:prstGeom>
-          <a:noFill/>
-        </p:spPr>
-        <p:txBody>
-          <a:bodyPr wrap="square" lIns="0" rIns="0" tIns="0" bIns="0" anchor="t">
-            <a:spAutoFit/>
-          </a:bodyPr>
-          <a:lstStyle/>
-          <a:p>
-            <a:pPr algn="ctr">
-              <a:spcAft>
-                <a:spcPts val="0"/>
-              </a:spcAft>
-            </a:pPr>
-            <a:r>
-              <a:rPr sz="4800" b="1" i="0">
-                <a:solidFill>
-                  <a:srgbClr val="2BD18F"/>
-                </a:solidFill>
-                <a:latin typeface="Cambria"/>
-              </a:rPr>
-              <a:t>3</a:t>
-            </a:r>
-          </a:p>
-        </p:txBody>
-      </p:sp>
-      <p:sp>
-        <p:nvSpPr>
-          <p:cNvPr id="10" name="TextBox 9"/>
-          <p:cNvSpPr txBox="1"/>
-          <p:nvPr/>
-        </p:nvSpPr>
-        <p:spPr>
-          <a:xfrm>
-            <a:off x="3520440" y="2697480"/>
-            <a:ext cx="2377440" cy="457200"/>
-          </a:xfrm>
-          <a:prstGeom prst="rect">
-            <a:avLst/>
-          </a:prstGeom>
-          <a:noFill/>
-        </p:spPr>
-        <p:txBody>
-          <a:bodyPr wrap="square" lIns="0" rIns="0" tIns="0" bIns="0" anchor="t">
-            <a:spAutoFit/>
-          </a:bodyPr>
-          <a:lstStyle/>
-          <a:p>
-            <a:pPr algn="ctr">
-              <a:spcAft>
-                <a:spcPts val="0"/>
-              </a:spcAft>
-            </a:pPr>
-            <a:r>
-              <a:rPr sz="1400" b="0" i="0">
-                <a:solidFill>
-                  <a:srgbClr val="1B2733"/>
-                </a:solidFill>
-                <a:latin typeface="Calibri"/>
-              </a:rPr>
-              <a:t>regresión aprobados</a:t>
-            </a:r>
-          </a:p>
-        </p:txBody>
-      </p:sp>
-      <p:sp>
-        <p:nvSpPr>
-          <p:cNvPr id="11" name="Rounded Rectangle 10"/>
-          <p:cNvSpPr/>
-          <p:nvPr/>
-        </p:nvSpPr>
-        <p:spPr>
-          <a:xfrm>
-            <a:off x="6217920" y="1645920"/>
-            <a:ext cx="2651760" cy="1554480"/>
-          </a:xfrm>
-          <a:prstGeom prst="roundRect">
-            <a:avLst>
-              <a:gd name="adj" fmla="val 8000"/>
-            </a:avLst>
-          </a:prstGeom>
-          <a:solidFill>
-            <a:srgbClr val="FFFFFF"/>
-          </a:solidFill>
-          <a:ln w="19050">
-            <a:solidFill>
-              <a:srgbClr val="D5DEE8"/>
-            </a:solidFill>
-          </a:ln>
-        </p:spPr>
-        <p:style>
-          <a:lnRef idx="1">
-            <a:schemeClr val="accent1"/>
-          </a:lnRef>
-          <a:fillRef idx="3">
-            <a:schemeClr val="accent1"/>
-          </a:fillRef>
-          <a:effectRef idx="2">
-            <a:schemeClr val="accent1"/>
-          </a:effectRef>
-          <a:fontRef idx="minor">
-            <a:schemeClr val="lt1"/>
-          </a:fontRef>
-        </p:style>
-        <p:txBody>
-          <a:bodyPr rtlCol="0" anchor="ctr"/>
-          <a:lstStyle/>
-          <a:p>
-            <a:pPr algn="ctr"/>
-          </a:p>
-        </p:txBody>
-      </p:sp>
-      <p:sp>
-        <p:nvSpPr>
-          <p:cNvPr id="12" name="TextBox 11"/>
-          <p:cNvSpPr txBox="1"/>
-          <p:nvPr/>
-        </p:nvSpPr>
-        <p:spPr>
-          <a:xfrm>
-            <a:off x="6217920" y="1783080"/>
-            <a:ext cx="2651760" cy="822960"/>
-          </a:xfrm>
-          <a:prstGeom prst="rect">
-            <a:avLst/>
-          </a:prstGeom>
-          <a:noFill/>
-        </p:spPr>
-        <p:txBody>
-          <a:bodyPr wrap="square" lIns="0" rIns="0" tIns="0" bIns="0" anchor="t">
-            <a:spAutoFit/>
-          </a:bodyPr>
-          <a:lstStyle/>
-          <a:p>
-            <a:pPr algn="ctr">
-              <a:spcAft>
-                <a:spcPts val="0"/>
-              </a:spcAft>
-            </a:pPr>
-            <a:r>
-              <a:rPr sz="4800" b="1" i="0">
-                <a:solidFill>
-                  <a:srgbClr val="E8923A"/>
-                </a:solidFill>
-                <a:latin typeface="Cambria"/>
-              </a:rPr>
-              <a:t>1</a:t>
-            </a:r>
-          </a:p>
-        </p:txBody>
-      </p:sp>
-      <p:sp>
-        <p:nvSpPr>
-          <p:cNvPr id="13" name="TextBox 12"/>
-          <p:cNvSpPr txBox="1"/>
-          <p:nvPr/>
-        </p:nvSpPr>
-        <p:spPr>
-          <a:xfrm>
-            <a:off x="6355080" y="2697480"/>
-            <a:ext cx="2377440" cy="457200"/>
-          </a:xfrm>
-          <a:prstGeom prst="rect">
-            <a:avLst/>
-          </a:prstGeom>
-          <a:noFill/>
-        </p:spPr>
-        <p:txBody>
-          <a:bodyPr wrap="square" lIns="0" rIns="0" tIns="0" bIns="0" anchor="t">
-            <a:spAutoFit/>
-          </a:bodyPr>
-          <a:lstStyle/>
-          <a:p>
-            <a:pPr algn="ctr">
-              <a:spcAft>
-                <a:spcPts val="0"/>
-              </a:spcAft>
-            </a:pPr>
-            <a:r>
-              <a:rPr sz="1400" b="0" i="0">
-                <a:solidFill>
-                  <a:srgbClr val="1B2733"/>
-                </a:solidFill>
-                <a:latin typeface="Calibri"/>
-              </a:rPr>
-              <a:t>fallo esperado de la demo</a:t>
-            </a:r>
-          </a:p>
-        </p:txBody>
-      </p:sp>
-      <p:sp>
-        <p:nvSpPr>
-          <p:cNvPr id="14" name="Rounded Rectangle 13"/>
-          <p:cNvSpPr/>
-          <p:nvPr/>
-        </p:nvSpPr>
-        <p:spPr>
-          <a:xfrm>
-            <a:off x="9052560" y="1645920"/>
-            <a:ext cx="2651760" cy="1554480"/>
-          </a:xfrm>
-          <a:prstGeom prst="roundRect">
-            <a:avLst>
-              <a:gd name="adj" fmla="val 8000"/>
-            </a:avLst>
-          </a:prstGeom>
-          <a:solidFill>
-            <a:srgbClr val="FFFFFF"/>
-          </a:solidFill>
-          <a:ln w="19050">
-            <a:solidFill>
-              <a:srgbClr val="D5DEE8"/>
-            </a:solidFill>
-          </a:ln>
-        </p:spPr>
-        <p:style>
-          <a:lnRef idx="1">
-            <a:schemeClr val="accent1"/>
-          </a:lnRef>
-          <a:fillRef idx="3">
-            <a:schemeClr val="accent1"/>
-          </a:fillRef>
-          <a:effectRef idx="2">
-            <a:schemeClr val="accent1"/>
-          </a:effectRef>
-          <a:fontRef idx="minor">
-            <a:schemeClr val="lt1"/>
-          </a:fontRef>
-        </p:style>
-        <p:txBody>
-          <a:bodyPr rtlCol="0" anchor="ctr"/>
-          <a:lstStyle/>
-          <a:p>
-            <a:pPr algn="ctr"/>
-          </a:p>
-        </p:txBody>
-      </p:sp>
-      <p:sp>
-        <p:nvSpPr>
-          <p:cNvPr id="15" name="TextBox 14"/>
-          <p:cNvSpPr txBox="1"/>
-          <p:nvPr/>
-        </p:nvSpPr>
-        <p:spPr>
-          <a:xfrm>
-            <a:off x="9052560" y="1783080"/>
-            <a:ext cx="2651760" cy="822960"/>
-          </a:xfrm>
-          <a:prstGeom prst="rect">
-            <a:avLst/>
-          </a:prstGeom>
-          <a:noFill/>
-        </p:spPr>
-        <p:txBody>
-          <a:bodyPr wrap="square" lIns="0" rIns="0" tIns="0" bIns="0" anchor="t">
-            <a:spAutoFit/>
-          </a:bodyPr>
-          <a:lstStyle/>
-          <a:p>
-            <a:pPr algn="ctr">
-              <a:spcAft>
-                <a:spcPts val="0"/>
-              </a:spcAft>
-            </a:pPr>
-            <a:r>
-              <a:rPr sz="4800" b="1" i="0">
-                <a:solidFill>
-                  <a:srgbClr val="2BD18F"/>
-                </a:solidFill>
-                <a:latin typeface="Cambria"/>
-              </a:rPr>
-              <a:t>OK</a:t>
-            </a:r>
-          </a:p>
-        </p:txBody>
-      </p:sp>
-      <p:sp>
-        <p:nvSpPr>
-          <p:cNvPr id="16" name="TextBox 15"/>
-          <p:cNvSpPr txBox="1"/>
-          <p:nvPr/>
-        </p:nvSpPr>
-        <p:spPr>
-          <a:xfrm>
-            <a:off x="9189720" y="2697480"/>
-            <a:ext cx="2377440" cy="457200"/>
-          </a:xfrm>
-          <a:prstGeom prst="rect">
-            <a:avLst/>
-          </a:prstGeom>
-          <a:noFill/>
-        </p:spPr>
-        <p:txBody>
-          <a:bodyPr wrap="square" lIns="0" rIns="0" tIns="0" bIns="0" anchor="t">
-            <a:spAutoFit/>
-          </a:bodyPr>
-          <a:lstStyle/>
-          <a:p>
-            <a:pPr algn="ctr">
-              <a:spcAft>
-                <a:spcPts val="0"/>
-              </a:spcAft>
-            </a:pPr>
-            <a:r>
-              <a:rPr sz="1400" b="0" i="0">
-                <a:solidFill>
-                  <a:srgbClr val="1B2733"/>
-                </a:solidFill>
-                <a:latin typeface="Calibri"/>
-              </a:rPr>
-              <a:t>CI en GitHub Actions</a:t>
-            </a:r>
-          </a:p>
-        </p:txBody>
-      </p:sp>
-      <p:graphicFrame>
-        <p:nvGraphicFramePr>
-          <p:cNvPr id="17" name="Chart 16"/>
-          <p:cNvGraphicFramePr>
-            <a:graphicFrameLocks noGrp="1"/>
-          </p:cNvGraphicFramePr>
-          <p:nvPr/>
-        </p:nvGraphicFramePr>
-        <p:xfrm>
-          <a:off x="548640" y="3520440"/>
-          <a:ext cx="6675120" cy="2468880"/>
-        </p:xfrm>
-        <a:graphic>
-          <a:graphicData uri="http://schemas.openxmlformats.org/drawingml/2006/chart">
-            <c:chart xmlns:c="http://schemas.openxmlformats.org/drawingml/2006/chart" r:id="rId3"/>
-          </a:graphicData>
-        </a:graphic>
-      </p:graphicFrame>
-      <p:sp>
-        <p:nvSpPr>
-          <p:cNvPr id="18" name="Oval 17"/>
-          <p:cNvSpPr/>
-          <p:nvPr/>
-        </p:nvSpPr>
-        <p:spPr>
-          <a:xfrm>
-            <a:off x="7680960" y="3694176"/>
-            <a:ext cx="128016" cy="128016"/>
-          </a:xfrm>
-          <a:prstGeom prst="ellipse">
-            <a:avLst/>
-          </a:prstGeom>
-          <a:solidFill>
-            <a:srgbClr val="2BD18F"/>
-          </a:solidFill>
-          <a:ln>
-            <a:noFill/>
-          </a:ln>
-        </p:spPr>
-        <p:style>
-          <a:lnRef idx="1">
-            <a:schemeClr val="accent1"/>
-          </a:lnRef>
-          <a:fillRef idx="3">
-            <a:schemeClr val="accent1"/>
-          </a:fillRef>
-          <a:effectRef idx="2">
-            <a:schemeClr val="accent1"/>
-          </a:effectRef>
-          <a:fontRef idx="minor">
-            <a:schemeClr val="lt1"/>
-          </a:fontRef>
-        </p:style>
-        <p:txBody>
-          <a:bodyPr rtlCol="0" anchor="ctr"/>
-          <a:lstStyle/>
-          <a:p>
-            <a:pPr algn="ctr"/>
-          </a:p>
-        </p:txBody>
-      </p:sp>
-      <p:sp>
-        <p:nvSpPr>
-          <p:cNvPr id="19" name="TextBox 18"/>
-          <p:cNvSpPr txBox="1"/>
-          <p:nvPr/>
-        </p:nvSpPr>
-        <p:spPr>
-          <a:xfrm>
-            <a:off x="7955280" y="3611880"/>
-            <a:ext cx="3749040" cy="685800"/>
-          </a:xfrm>
-          <a:prstGeom prst="rect">
-            <a:avLst/>
-          </a:prstGeom>
-          <a:noFill/>
-        </p:spPr>
-        <p:txBody>
-          <a:bodyPr wrap="square" lIns="0" rIns="0" tIns="0" bIns="0" anchor="t">
-            <a:spAutoFit/>
-          </a:bodyPr>
-          <a:lstStyle/>
-          <a:p>
-            <a:pPr algn="l">
-              <a:spcAft>
-                <a:spcPts val="0"/>
-              </a:spcAft>
-            </a:pPr>
-            <a:r>
-              <a:rPr sz="1400" b="0" i="0">
-                <a:solidFill>
-                  <a:srgbClr val="1B2733"/>
-                </a:solidFill>
-                <a:latin typeface="Calibri"/>
-              </a:rPr>
-              <a:t>El happy path corrió dos veces, con datos independientes</a:t>
-            </a:r>
-          </a:p>
-        </p:txBody>
-      </p:sp>
-      <p:sp>
-        <p:nvSpPr>
-          <p:cNvPr id="20" name="Oval 19"/>
-          <p:cNvSpPr/>
-          <p:nvPr/>
-        </p:nvSpPr>
-        <p:spPr>
-          <a:xfrm>
-            <a:off x="7680960" y="4379976"/>
-            <a:ext cx="128016" cy="128016"/>
-          </a:xfrm>
-          <a:prstGeom prst="ellipse">
-            <a:avLst/>
-          </a:prstGeom>
-          <a:solidFill>
-            <a:srgbClr val="2BD18F"/>
-          </a:solidFill>
-          <a:ln>
-            <a:noFill/>
-          </a:ln>
-        </p:spPr>
-        <p:style>
-          <a:lnRef idx="1">
-            <a:schemeClr val="accent1"/>
-          </a:lnRef>
-          <a:fillRef idx="3">
-            <a:schemeClr val="accent1"/>
-          </a:fillRef>
-          <a:effectRef idx="2">
-            <a:schemeClr val="accent1"/>
-          </a:effectRef>
-          <a:fontRef idx="minor">
-            <a:schemeClr val="lt1"/>
-          </a:fontRef>
-        </p:style>
-        <p:txBody>
-          <a:bodyPr rtlCol="0" anchor="ctr"/>
-          <a:lstStyle/>
-          <a:p>
-            <a:pPr algn="ctr"/>
-          </a:p>
-        </p:txBody>
-      </p:sp>
-      <p:sp>
-        <p:nvSpPr>
-          <p:cNvPr id="21" name="TextBox 20"/>
-          <p:cNvSpPr txBox="1"/>
-          <p:nvPr/>
-        </p:nvSpPr>
-        <p:spPr>
-          <a:xfrm>
-            <a:off x="7955280" y="4297680"/>
-            <a:ext cx="3749040" cy="685800"/>
-          </a:xfrm>
-          <a:prstGeom prst="rect">
-            <a:avLst/>
-          </a:prstGeom>
-          <a:noFill/>
-        </p:spPr>
-        <p:txBody>
-          <a:bodyPr wrap="square" lIns="0" rIns="0" tIns="0" bIns="0" anchor="t">
-            <a:spAutoFit/>
-          </a:bodyPr>
-          <a:lstStyle/>
-          <a:p>
-            <a:pPr algn="l">
-              <a:spcAft>
-                <a:spcPts val="0"/>
-              </a:spcAft>
-            </a:pPr>
-            <a:r>
-              <a:rPr sz="1400" b="0" i="0">
-                <a:solidFill>
-                  <a:srgbClr val="1B2733"/>
-                </a:solidFill>
-                <a:latin typeface="Calibri"/>
-              </a:rPr>
-              <a:t>TypeScript sin errores</a:t>
-            </a:r>
-          </a:p>
-        </p:txBody>
-      </p:sp>
-      <p:sp>
-        <p:nvSpPr>
-          <p:cNvPr id="22" name="Oval 21"/>
-          <p:cNvSpPr/>
-          <p:nvPr/>
-        </p:nvSpPr>
-        <p:spPr>
-          <a:xfrm>
-            <a:off x="7680960" y="5065776"/>
-            <a:ext cx="128016" cy="128016"/>
-          </a:xfrm>
-          <a:prstGeom prst="ellipse">
-            <a:avLst/>
-          </a:prstGeom>
-          <a:solidFill>
-            <a:srgbClr val="2BD18F"/>
-          </a:solidFill>
-          <a:ln>
-            <a:noFill/>
-          </a:ln>
-        </p:spPr>
-        <p:style>
-          <a:lnRef idx="1">
-            <a:schemeClr val="accent1"/>
-          </a:lnRef>
-          <a:fillRef idx="3">
-            <a:schemeClr val="accent1"/>
-          </a:fillRef>
-          <a:effectRef idx="2">
-            <a:schemeClr val="accent1"/>
-          </a:effectRef>
-          <a:fontRef idx="minor">
-            <a:schemeClr val="lt1"/>
-          </a:fontRef>
-        </p:style>
-        <p:txBody>
-          <a:bodyPr rtlCol="0" anchor="ctr"/>
-          <a:lstStyle/>
-          <a:p>
-            <a:pPr algn="ctr"/>
-          </a:p>
-        </p:txBody>
-      </p:sp>
-      <p:sp>
-        <p:nvSpPr>
-          <p:cNvPr id="23" name="TextBox 22"/>
-          <p:cNvSpPr txBox="1"/>
-          <p:nvPr/>
-        </p:nvSpPr>
-        <p:spPr>
-          <a:xfrm>
-            <a:off x="7955280" y="4983480"/>
-            <a:ext cx="3749040" cy="685800"/>
-          </a:xfrm>
-          <a:prstGeom prst="rect">
-            <a:avLst/>
-          </a:prstGeom>
-          <a:noFill/>
-        </p:spPr>
-        <p:txBody>
-          <a:bodyPr wrap="square" lIns="0" rIns="0" tIns="0" bIns="0" anchor="t">
-            <a:spAutoFit/>
-          </a:bodyPr>
-          <a:lstStyle/>
-          <a:p>
-            <a:pPr algn="l">
-              <a:spcAft>
-                <a:spcPts val="0"/>
-              </a:spcAft>
-            </a:pPr>
-            <a:r>
-              <a:rPr sz="1400" b="0" i="0">
-                <a:solidFill>
-                  <a:srgbClr val="1B2733"/>
-                </a:solidFill>
-                <a:latin typeface="Calibri"/>
-              </a:rPr>
-              <a:t>Videos solo en el spec fallido</a:t>
-            </a:r>
-          </a:p>
-        </p:txBody>
-      </p:sp>
-    </p:spTree>
-  </p:cSld>
-  <p:clrMapOvr>
-    <a:masterClrMapping/>
-  </p:clrMapOvr>
-</p:sld>
-</file>
-
-<file path=ppt/slides/slide12.xml><?xml version="1.0" encoding="utf-8"?>
-<p:sld xmlns:a="http://schemas.openxmlformats.org/drawingml/2006/main" xmlns:p="http://schemas.openxmlformats.org/presentationml/2006/main" xmlns:r="http://schemas.openxmlformats.org/officeDocument/2006/relationships">
-  <p:cSld>
-    <p:bg>
-      <p:bgPr>
-        <a:solidFill>
-          <a:srgbClr val="F4F7FA"/>
-        </a:solidFill>
-        <a:effectLst/>
-      </p:bgPr>
-    </p:bg>
-    <p:spTree>
-      <p:nvGrpSpPr>
-        <p:cNvPr id="1" name=""/>
-        <p:cNvGrpSpPr/>
-        <p:nvPr/>
-      </p:nvGrpSpPr>
-      <p:grpSpPr/>
-      <p:sp>
-        <p:nvSpPr>
-          <p:cNvPr id="2" name="TextBox 1"/>
-          <p:cNvSpPr txBox="1"/>
-          <p:nvPr/>
-        </p:nvSpPr>
-        <p:spPr>
-          <a:xfrm>
-            <a:off x="548640" y="347472"/>
-            <a:ext cx="11064240" cy="731520"/>
-          </a:xfrm>
-          <a:prstGeom prst="rect">
-            <a:avLst/>
-          </a:prstGeom>
-          <a:noFill/>
-        </p:spPr>
-        <p:txBody>
-          <a:bodyPr wrap="square" lIns="0" rIns="0" tIns="0" bIns="0" anchor="t">
-            <a:spAutoFit/>
-          </a:bodyPr>
-          <a:lstStyle/>
-          <a:p>
-            <a:pPr algn="l">
-              <a:spcAft>
-                <a:spcPts val="0"/>
-              </a:spcAft>
-            </a:pPr>
-            <a:r>
-              <a:rPr sz="3200" b="1" i="0">
-                <a:solidFill>
-                  <a:srgbClr val="0F1B2D"/>
-                </a:solidFill>
-                <a:latin typeface="Calibri"/>
-              </a:rPr>
-              <a:t>Dificultades y criterios de decisión</a:t>
-            </a:r>
-          </a:p>
-        </p:txBody>
-      </p:sp>
-      <p:sp>
-        <p:nvSpPr>
-          <p:cNvPr id="3" name="TextBox 2"/>
-          <p:cNvSpPr txBox="1"/>
-          <p:nvPr/>
-        </p:nvSpPr>
-        <p:spPr>
-          <a:xfrm>
-            <a:off x="548640" y="1024128"/>
-            <a:ext cx="11064240" cy="365760"/>
-          </a:xfrm>
-          <a:prstGeom prst="rect">
-            <a:avLst/>
-          </a:prstGeom>
-          <a:noFill/>
-        </p:spPr>
-        <p:txBody>
-          <a:bodyPr wrap="square" lIns="0" rIns="0" tIns="0" bIns="0" anchor="t">
-            <a:spAutoFit/>
-          </a:bodyPr>
-          <a:lstStyle/>
-          <a:p>
-            <a:pPr algn="l">
-              <a:spcAft>
-                <a:spcPts val="0"/>
-              </a:spcAft>
-            </a:pPr>
-            <a:r>
-              <a:rPr sz="1600" b="0" i="0">
-                <a:solidFill>
-                  <a:srgbClr val="5B6B7A"/>
-                </a:solidFill>
-                <a:latin typeface="Calibri"/>
-              </a:rPr>
-              <a:t>La automatización también requiere mantenimiento</a:t>
-            </a:r>
-          </a:p>
-        </p:txBody>
-      </p:sp>
-      <p:sp>
-        <p:nvSpPr>
-          <p:cNvPr id="4" name="TextBox 3"/>
-          <p:cNvSpPr txBox="1"/>
-          <p:nvPr/>
-        </p:nvSpPr>
-        <p:spPr>
-          <a:xfrm>
-            <a:off x="11155680" y="6400800"/>
-            <a:ext cx="548640" cy="274320"/>
-          </a:xfrm>
-          <a:prstGeom prst="rect">
-            <a:avLst/>
-          </a:prstGeom>
-          <a:noFill/>
-        </p:spPr>
-        <p:txBody>
-          <a:bodyPr wrap="square" lIns="0" rIns="0" tIns="0" bIns="0" anchor="t">
-            <a:spAutoFit/>
-          </a:bodyPr>
-          <a:lstStyle/>
-          <a:p>
-            <a:pPr algn="r">
-              <a:spcAft>
-                <a:spcPts val="0"/>
-              </a:spcAft>
-            </a:pPr>
-            <a:r>
-              <a:rPr sz="1100" b="0" i="0">
-                <a:solidFill>
-                  <a:srgbClr val="5B6B7A"/>
-                </a:solidFill>
-                <a:latin typeface="Calibri"/>
-              </a:rPr>
-              <a:t>12</a:t>
-            </a:r>
-          </a:p>
-        </p:txBody>
-      </p:sp>
-      <p:sp>
-        <p:nvSpPr>
-          <p:cNvPr id="5" name="Rounded Rectangle 4"/>
-          <p:cNvSpPr/>
-          <p:nvPr/>
-        </p:nvSpPr>
-        <p:spPr>
-          <a:xfrm>
-            <a:off x="548640" y="1600200"/>
-            <a:ext cx="5394960" cy="502920"/>
-          </a:xfrm>
-          <a:prstGeom prst="roundRect">
-            <a:avLst>
-              <a:gd name="adj" fmla="val 8000"/>
-            </a:avLst>
-          </a:prstGeom>
-          <a:solidFill>
-            <a:srgbClr val="2BD18F"/>
-          </a:solidFill>
-          <a:ln>
-            <a:noFill/>
-          </a:ln>
-        </p:spPr>
-        <p:style>
-          <a:lnRef idx="1">
-            <a:schemeClr val="accent1"/>
-          </a:lnRef>
-          <a:fillRef idx="3">
-            <a:schemeClr val="accent1"/>
-          </a:fillRef>
-          <a:effectRef idx="2">
-            <a:schemeClr val="accent1"/>
-          </a:effectRef>
-          <a:fontRef idx="minor">
-            <a:schemeClr val="lt1"/>
-          </a:fontRef>
-        </p:style>
-        <p:txBody>
-          <a:bodyPr rtlCol="0" anchor="ctr" wrap="square" lIns="109728" rIns="109728" tIns="54864" bIns="54864"/>
-          <a:lstStyle/>
-          <a:p>
-            <a:pPr algn="ctr"/>
-            <a:r>
-              <a:rPr sz="1800" b="1">
-                <a:solidFill>
-                  <a:srgbClr val="0F1B2D"/>
-                </a:solidFill>
-                <a:latin typeface="Calibri"/>
-              </a:rPr>
-              <a:t>Cuándo sí</a:t>
-            </a:r>
-          </a:p>
-        </p:txBody>
-      </p:sp>
-      <p:sp>
-        <p:nvSpPr>
-          <p:cNvPr id="6" name="Rounded Rectangle 5"/>
-          <p:cNvSpPr/>
-          <p:nvPr/>
-        </p:nvSpPr>
-        <p:spPr>
-          <a:xfrm>
-            <a:off x="548640" y="2103120"/>
-            <a:ext cx="5394960" cy="2286000"/>
-          </a:xfrm>
-          <a:prstGeom prst="roundRect">
-            <a:avLst>
-              <a:gd name="adj" fmla="val 8000"/>
-            </a:avLst>
-          </a:prstGeom>
-          <a:solidFill>
-            <a:srgbClr val="FFFFFF"/>
-          </a:solidFill>
-          <a:ln w="19050">
-            <a:solidFill>
-              <a:srgbClr val="D5DEE8"/>
-            </a:solidFill>
-          </a:ln>
-        </p:spPr>
-        <p:style>
-          <a:lnRef idx="1">
-            <a:schemeClr val="accent1"/>
-          </a:lnRef>
-          <a:fillRef idx="3">
-            <a:schemeClr val="accent1"/>
-          </a:fillRef>
-          <a:effectRef idx="2">
-            <a:schemeClr val="accent1"/>
-          </a:effectRef>
-          <a:fontRef idx="minor">
-            <a:schemeClr val="lt1"/>
-          </a:fontRef>
-        </p:style>
-        <p:txBody>
-          <a:bodyPr rtlCol="0" anchor="ctr" wrap="square" lIns="109728" rIns="109728" tIns="54864" bIns="54864"/>
-          <a:lstStyle/>
-          <a:p>
-            <a:pPr algn="l"/>
-            <a:r>
-              <a:rPr sz="1500" b="0">
-                <a:solidFill>
-                  <a:srgbClr val="1B2733"/>
-                </a:solidFill>
-                <a:latin typeface="Calibri"/>
-              </a:rPr>
-              <a:t>Aplicación web moderna con flujos continuos en un dominio</a:t>
-            </a:r>
-          </a:p>
-          <a:p>
-            <a:pPr algn="l"/>
-            <a:r>
-              <a:rPr sz="1500" b="0">
-                <a:solidFill>
-                  <a:srgbClr val="1B2733"/>
-                </a:solidFill>
-                <a:latin typeface="Calibri"/>
-              </a:rPr>
-              <a:t>Equipo con JavaScript o TypeScript</a:t>
-            </a:r>
-          </a:p>
-          <a:p>
-            <a:pPr algn="l"/>
-            <a:r>
-              <a:rPr sz="1500" b="0">
-                <a:solidFill>
-                  <a:srgbClr val="1B2733"/>
-                </a:solidFill>
-                <a:latin typeface="Calibri"/>
-              </a:rPr>
-              <a:t>Depurar con snapshots del DOM y observar o simular red con cy.intercept</a:t>
-            </a:r>
-          </a:p>
-        </p:txBody>
-      </p:sp>
-      <p:sp>
-        <p:nvSpPr>
-          <p:cNvPr id="7" name="Rounded Rectangle 6"/>
-          <p:cNvSpPr/>
-          <p:nvPr/>
-        </p:nvSpPr>
-        <p:spPr>
-          <a:xfrm>
-            <a:off x="6217920" y="1600200"/>
-            <a:ext cx="5394960" cy="502920"/>
-          </a:xfrm>
-          <a:prstGeom prst="roundRect">
-            <a:avLst>
-              <a:gd name="adj" fmla="val 8000"/>
-            </a:avLst>
-          </a:prstGeom>
-          <a:solidFill>
-            <a:srgbClr val="DC4A4F"/>
-          </a:solidFill>
-          <a:ln>
-            <a:noFill/>
-          </a:ln>
-        </p:spPr>
-        <p:style>
-          <a:lnRef idx="1">
-            <a:schemeClr val="accent1"/>
-          </a:lnRef>
-          <a:fillRef idx="3">
-            <a:schemeClr val="accent1"/>
-          </a:fillRef>
-          <a:effectRef idx="2">
-            <a:schemeClr val="accent1"/>
-          </a:effectRef>
-          <a:fontRef idx="minor">
-            <a:schemeClr val="lt1"/>
-          </a:fontRef>
-        </p:style>
-        <p:txBody>
-          <a:bodyPr rtlCol="0" anchor="ctr" wrap="square" lIns="109728" rIns="109728" tIns="54864" bIns="54864"/>
-          <a:lstStyle/>
-          <a:p>
-            <a:pPr algn="ctr"/>
-            <a:r>
-              <a:rPr sz="1800" b="1">
-                <a:solidFill>
-                  <a:srgbClr val="FFFFFF"/>
-                </a:solidFill>
-                <a:latin typeface="Calibri"/>
-              </a:rPr>
-              <a:t>Cuándo no</a:t>
-            </a:r>
-          </a:p>
-        </p:txBody>
-      </p:sp>
-      <p:sp>
-        <p:nvSpPr>
-          <p:cNvPr id="8" name="Rounded Rectangle 7"/>
-          <p:cNvSpPr/>
-          <p:nvPr/>
-        </p:nvSpPr>
-        <p:spPr>
-          <a:xfrm>
-            <a:off x="6217920" y="2103120"/>
-            <a:ext cx="5394960" cy="2286000"/>
-          </a:xfrm>
-          <a:prstGeom prst="roundRect">
-            <a:avLst>
-              <a:gd name="adj" fmla="val 8000"/>
-            </a:avLst>
-          </a:prstGeom>
-          <a:solidFill>
-            <a:srgbClr val="FFFFFF"/>
-          </a:solidFill>
-          <a:ln w="19050">
-            <a:solidFill>
-              <a:srgbClr val="D5DEE8"/>
-            </a:solidFill>
-          </a:ln>
-        </p:spPr>
-        <p:style>
-          <a:lnRef idx="1">
-            <a:schemeClr val="accent1"/>
-          </a:lnRef>
-          <a:fillRef idx="3">
-            <a:schemeClr val="accent1"/>
-          </a:fillRef>
-          <a:effectRef idx="2">
-            <a:schemeClr val="accent1"/>
-          </a:effectRef>
-          <a:fontRef idx="minor">
-            <a:schemeClr val="lt1"/>
-          </a:fontRef>
-        </p:style>
-        <p:txBody>
-          <a:bodyPr rtlCol="0" anchor="ctr" wrap="square" lIns="109728" rIns="109728" tIns="54864" bIns="54864"/>
-          <a:lstStyle/>
-          <a:p>
-            <a:pPr algn="l"/>
-            <a:r>
-              <a:rPr sz="1500" b="0">
-                <a:solidFill>
-                  <a:srgbClr val="1B2733"/>
-                </a:solidFill>
-                <a:latin typeface="Calibri"/>
-              </a:rPr>
-              <a:t>Apps móviles nativas o de escritorio</a:t>
-            </a:r>
-          </a:p>
-          <a:p>
-            <a:pPr algn="l"/>
-            <a:r>
-              <a:rPr sz="1500" b="0">
-                <a:solidFill>
-                  <a:srgbClr val="1B2733"/>
-                </a:solidFill>
-                <a:latin typeface="Calibri"/>
-              </a:rPr>
-              <a:t>Pruebas de carga</a:t>
-            </a:r>
-          </a:p>
-          <a:p>
-            <a:pPr algn="l"/>
-            <a:r>
-              <a:rPr sz="1500" b="0">
-                <a:solidFill>
-                  <a:srgbClr val="1B2733"/>
-                </a:solidFill>
-                <a:latin typeface="Calibri"/>
-              </a:rPr>
-              <a:t>Un test con varias pestañas o navegadores a la vez; equipos que exigen Java, Python o C#</a:t>
-            </a:r>
-          </a:p>
-        </p:txBody>
-      </p:sp>
-      <p:sp>
-        <p:nvSpPr>
-          <p:cNvPr id="9" name="TextBox 8"/>
-          <p:cNvSpPr txBox="1"/>
-          <p:nvPr/>
-        </p:nvSpPr>
-        <p:spPr>
-          <a:xfrm>
-            <a:off x="548640" y="4572000"/>
-            <a:ext cx="11064240" cy="365760"/>
-          </a:xfrm>
-          <a:prstGeom prst="rect">
-            <a:avLst/>
-          </a:prstGeom>
-          <a:noFill/>
-        </p:spPr>
-        <p:txBody>
-          <a:bodyPr wrap="square" lIns="0" rIns="0" tIns="0" bIns="0" anchor="t">
-            <a:spAutoFit/>
-          </a:bodyPr>
-          <a:lstStyle/>
-          <a:p>
-            <a:pPr algn="l">
-              <a:spcAft>
-                <a:spcPts val="0"/>
-              </a:spcAft>
-            </a:pPr>
-            <a:r>
-              <a:rPr sz="1600" b="1" i="0">
-                <a:solidFill>
-                  <a:srgbClr val="0F1B2D"/>
-                </a:solidFill>
-                <a:latin typeface="Calibri"/>
-              </a:rPr>
-              <a:t>Dificultades reales de este proyecto</a:t>
-            </a:r>
-          </a:p>
-        </p:txBody>
-      </p:sp>
-      <p:sp>
-        <p:nvSpPr>
-          <p:cNvPr id="10" name="Rounded Rectangle 9"/>
-          <p:cNvSpPr/>
-          <p:nvPr/>
-        </p:nvSpPr>
-        <p:spPr>
-          <a:xfrm>
-            <a:off x="548640" y="5029200"/>
-            <a:ext cx="2697480" cy="1051560"/>
-          </a:xfrm>
-          <a:prstGeom prst="roundRect">
-            <a:avLst>
-              <a:gd name="adj" fmla="val 8000"/>
-            </a:avLst>
-          </a:prstGeom>
-          <a:solidFill>
-            <a:srgbClr val="FFFFFF"/>
-          </a:solidFill>
-          <a:ln w="19050">
-            <a:solidFill>
-              <a:srgbClr val="E8923A"/>
-            </a:solidFill>
-          </a:ln>
-        </p:spPr>
-        <p:style>
-          <a:lnRef idx="1">
-            <a:schemeClr val="accent1"/>
-          </a:lnRef>
-          <a:fillRef idx="3">
-            <a:schemeClr val="accent1"/>
-          </a:fillRef>
-          <a:effectRef idx="2">
-            <a:schemeClr val="accent1"/>
-          </a:effectRef>
-          <a:fontRef idx="minor">
-            <a:schemeClr val="lt1"/>
-          </a:fontRef>
-        </p:style>
-        <p:txBody>
-          <a:bodyPr rtlCol="0" anchor="ctr" wrap="square" lIns="109728" rIns="109728" tIns="54864" bIns="54864"/>
-          <a:lstStyle/>
-          <a:p>
-            <a:pPr algn="ctr"/>
-            <a:r>
-              <a:rPr sz="1300" b="0">
-                <a:solidFill>
-                  <a:srgbClr val="1B2733"/>
-                </a:solidFill>
-                <a:latin typeface="Calibri"/>
-              </a:rPr>
-              <a:t>Node 20 del equipo incompatible con Cypress 16</a:t>
-            </a:r>
-          </a:p>
-        </p:txBody>
-      </p:sp>
-      <p:sp>
-        <p:nvSpPr>
-          <p:cNvPr id="11" name="Rounded Rectangle 10"/>
-          <p:cNvSpPr/>
-          <p:nvPr/>
-        </p:nvSpPr>
-        <p:spPr>
-          <a:xfrm>
-            <a:off x="3383280" y="5029200"/>
-            <a:ext cx="2697480" cy="1051560"/>
-          </a:xfrm>
-          <a:prstGeom prst="roundRect">
-            <a:avLst>
-              <a:gd name="adj" fmla="val 8000"/>
-            </a:avLst>
-          </a:prstGeom>
-          <a:solidFill>
-            <a:srgbClr val="FFFFFF"/>
-          </a:solidFill>
-          <a:ln w="19050">
-            <a:solidFill>
-              <a:srgbClr val="E8923A"/>
-            </a:solidFill>
-          </a:ln>
-        </p:spPr>
-        <p:style>
-          <a:lnRef idx="1">
-            <a:schemeClr val="accent1"/>
-          </a:lnRef>
-          <a:fillRef idx="3">
-            <a:schemeClr val="accent1"/>
-          </a:fillRef>
-          <a:effectRef idx="2">
-            <a:schemeClr val="accent1"/>
-          </a:effectRef>
-          <a:fontRef idx="minor">
-            <a:schemeClr val="lt1"/>
-          </a:fontRef>
-        </p:style>
-        <p:txBody>
-          <a:bodyPr rtlCol="0" anchor="ctr" wrap="square" lIns="109728" rIns="109728" tIns="54864" bIns="54864"/>
-          <a:lstStyle/>
-          <a:p>
-            <a:pPr algn="ctr"/>
-            <a:r>
-              <a:rPr sz="1300" b="0">
-                <a:solidFill>
-                  <a:srgbClr val="1B2733"/>
-                </a:solidFill>
-                <a:latin typeface="Calibri"/>
-              </a:rPr>
-              <a:t>Comillas de PowerShell 5 al pasar expresiones a Node</a:t>
-            </a:r>
-          </a:p>
-        </p:txBody>
-      </p:sp>
-      <p:sp>
-        <p:nvSpPr>
-          <p:cNvPr id="12" name="Rounded Rectangle 11"/>
-          <p:cNvSpPr/>
-          <p:nvPr/>
-        </p:nvSpPr>
-        <p:spPr>
-          <a:xfrm>
-            <a:off x="6217920" y="5029200"/>
-            <a:ext cx="2697480" cy="1051560"/>
-          </a:xfrm>
-          <a:prstGeom prst="roundRect">
-            <a:avLst>
-              <a:gd name="adj" fmla="val 8000"/>
-            </a:avLst>
-          </a:prstGeom>
-          <a:solidFill>
-            <a:srgbClr val="FFFFFF"/>
-          </a:solidFill>
-          <a:ln w="19050">
-            <a:solidFill>
-              <a:srgbClr val="E8923A"/>
-            </a:solidFill>
-          </a:ln>
-        </p:spPr>
-        <p:style>
-          <a:lnRef idx="1">
-            <a:schemeClr val="accent1"/>
-          </a:lnRef>
-          <a:fillRef idx="3">
-            <a:schemeClr val="accent1"/>
-          </a:fillRef>
-          <a:effectRef idx="2">
-            <a:schemeClr val="accent1"/>
-          </a:effectRef>
-          <a:fontRef idx="minor">
-            <a:schemeClr val="lt1"/>
-          </a:fontRef>
-        </p:style>
-        <p:txBody>
-          <a:bodyPr rtlCol="0" anchor="ctr" wrap="square" lIns="109728" rIns="109728" tIns="54864" bIns="54864"/>
-          <a:lstStyle/>
-          <a:p>
-            <a:pPr algn="ctr"/>
-            <a:r>
-              <a:rPr sz="1300" b="0">
-                <a:solidFill>
-                  <a:srgbClr val="1B2733"/>
-                </a:solidFill>
-                <a:latin typeface="Calibri"/>
-              </a:rPr>
-              <a:t>cy.prompt falló al descargar su módulo Cloud</a:t>
-            </a:r>
-          </a:p>
-        </p:txBody>
-      </p:sp>
-      <p:sp>
-        <p:nvSpPr>
-          <p:cNvPr id="13" name="Rounded Rectangle 12"/>
-          <p:cNvSpPr/>
-          <p:nvPr/>
-        </p:nvSpPr>
-        <p:spPr>
-          <a:xfrm>
-            <a:off x="9052560" y="5029200"/>
-            <a:ext cx="2697480" cy="1051560"/>
-          </a:xfrm>
-          <a:prstGeom prst="roundRect">
-            <a:avLst>
-              <a:gd name="adj" fmla="val 8000"/>
-            </a:avLst>
-          </a:prstGeom>
-          <a:solidFill>
-            <a:srgbClr val="FFFFFF"/>
-          </a:solidFill>
-          <a:ln w="19050">
-            <a:solidFill>
-              <a:srgbClr val="E8923A"/>
-            </a:solidFill>
-          </a:ln>
-        </p:spPr>
-        <p:style>
-          <a:lnRef idx="1">
-            <a:schemeClr val="accent1"/>
-          </a:lnRef>
-          <a:fillRef idx="3">
-            <a:schemeClr val="accent1"/>
-          </a:fillRef>
-          <a:effectRef idx="2">
-            <a:schemeClr val="accent1"/>
-          </a:effectRef>
-          <a:fontRef idx="minor">
-            <a:schemeClr val="lt1"/>
-          </a:fontRef>
-        </p:style>
-        <p:txBody>
-          <a:bodyPr rtlCol="0" anchor="ctr" wrap="square" lIns="109728" rIns="109728" tIns="54864" bIns="54864"/>
-          <a:lstStyle/>
-          <a:p>
-            <a:pPr algn="ctr"/>
-            <a:r>
-              <a:rPr sz="1300" b="0">
-                <a:solidFill>
-                  <a:srgbClr val="1B2733"/>
-                </a:solidFill>
-                <a:latin typeface="Calibri"/>
-              </a:rPr>
-              <a:t>La instrucción con {{alias}} hubo que escribirla explícita</a:t>
-            </a:r>
-          </a:p>
-        </p:txBody>
-      </p:sp>
-    </p:spTree>
-  </p:cSld>
-  <p:clrMapOvr>
-    <a:masterClrMapping/>
-  </p:clrMapOvr>
-</p:sld>
-</file>
-
-<file path=ppt/slides/slide13.xml><?xml version="1.0" encoding="utf-8"?>
-<p:sld xmlns:a="http://schemas.openxmlformats.org/drawingml/2006/main" xmlns:p="http://schemas.openxmlformats.org/presentationml/2006/main" xmlns:r="http://schemas.openxmlformats.org/officeDocument/2006/relationships">
-  <p:cSld>
-    <p:bg>
-      <p:bgPr>
-        <a:solidFill>
-          <a:srgbClr val="F4F7FA"/>
-        </a:solidFill>
-        <a:effectLst/>
-      </p:bgPr>
-    </p:bg>
-    <p:spTree>
-      <p:nvGrpSpPr>
-        <p:cNvPr id="1" name=""/>
-        <p:cNvGrpSpPr/>
-        <p:nvPr/>
-      </p:nvGrpSpPr>
-      <p:grpSpPr/>
-      <p:sp>
-        <p:nvSpPr>
-          <p:cNvPr id="2" name="TextBox 1"/>
-          <p:cNvSpPr txBox="1"/>
-          <p:nvPr/>
-        </p:nvSpPr>
-        <p:spPr>
-          <a:xfrm>
-            <a:off x="548640" y="347472"/>
-            <a:ext cx="11064240" cy="731520"/>
-          </a:xfrm>
-          <a:prstGeom prst="rect">
-            <a:avLst/>
-          </a:prstGeom>
-          <a:noFill/>
-        </p:spPr>
-        <p:txBody>
-          <a:bodyPr wrap="square" lIns="0" rIns="0" tIns="0" bIns="0" anchor="t">
-            <a:spAutoFit/>
-          </a:bodyPr>
-          <a:lstStyle/>
-          <a:p>
-            <a:pPr algn="l">
-              <a:spcAft>
-                <a:spcPts val="0"/>
-              </a:spcAft>
-            </a:pPr>
-            <a:r>
-              <a:rPr sz="3200" b="1" i="0">
-                <a:solidFill>
-                  <a:srgbClr val="0F1B2D"/>
-                </a:solidFill>
-                <a:latin typeface="Calibri"/>
-              </a:rPr>
-              <a:t>Entrega y reproducción</a:t>
-            </a:r>
-          </a:p>
-        </p:txBody>
-      </p:sp>
-      <p:sp>
-        <p:nvSpPr>
-          <p:cNvPr id="3" name="TextBox 2"/>
-          <p:cNvSpPr txBox="1"/>
-          <p:nvPr/>
-        </p:nvSpPr>
-        <p:spPr>
-          <a:xfrm>
-            <a:off x="548640" y="1024128"/>
-            <a:ext cx="11064240" cy="365760"/>
-          </a:xfrm>
-          <a:prstGeom prst="rect">
-            <a:avLst/>
-          </a:prstGeom>
-          <a:noFill/>
-        </p:spPr>
-        <p:txBody>
-          <a:bodyPr wrap="square" lIns="0" rIns="0" tIns="0" bIns="0" anchor="t">
-            <a:spAutoFit/>
-          </a:bodyPr>
-          <a:lstStyle/>
-          <a:p>
-            <a:pPr algn="l">
-              <a:spcAft>
-                <a:spcPts val="0"/>
-              </a:spcAft>
-            </a:pPr>
-            <a:r>
-              <a:rPr sz="1600" b="0" i="0">
-                <a:solidFill>
-                  <a:srgbClr val="5B6B7A"/>
-                </a:solidFill>
-                <a:latin typeface="Calibri"/>
-              </a:rPr>
-              <a:t>Código, presentación y ejecución documentada</a:t>
-            </a:r>
-          </a:p>
-        </p:txBody>
-      </p:sp>
-      <p:sp>
-        <p:nvSpPr>
-          <p:cNvPr id="4" name="TextBox 3"/>
-          <p:cNvSpPr txBox="1"/>
-          <p:nvPr/>
-        </p:nvSpPr>
-        <p:spPr>
-          <a:xfrm>
-            <a:off x="11155680" y="6400800"/>
-            <a:ext cx="548640" cy="274320"/>
-          </a:xfrm>
-          <a:prstGeom prst="rect">
-            <a:avLst/>
-          </a:prstGeom>
-          <a:noFill/>
-        </p:spPr>
-        <p:txBody>
-          <a:bodyPr wrap="square" lIns="0" rIns="0" tIns="0" bIns="0" anchor="t">
-            <a:spAutoFit/>
-          </a:bodyPr>
-          <a:lstStyle/>
-          <a:p>
-            <a:pPr algn="r">
-              <a:spcAft>
-                <a:spcPts val="0"/>
-              </a:spcAft>
-            </a:pPr>
-            <a:r>
-              <a:rPr sz="1100" b="0" i="0">
-                <a:solidFill>
-                  <a:srgbClr val="5B6B7A"/>
-                </a:solidFill>
-                <a:latin typeface="Calibri"/>
-              </a:rPr>
-              <a:t>13</a:t>
             </a:r>
           </a:p>
         </p:txBody>
@@ -8336,7 +6769,7 @@
                 </a:solidFill>
                 <a:latin typeface="Calibri"/>
               </a:rPr>
-              <a:t>Una API correcta no garantiza que el formulario funcione</a:t>
+              <a:t>Arquitectura de ejecución</a:t>
             </a:r>
           </a:p>
         </p:txBody>
@@ -8375,7 +6808,7 @@
                 </a:solidFill>
                 <a:latin typeface="Calibri"/>
               </a:rPr>
-              <a:t>Cypress comprueba el recorrido completo, como lo hace una persona usuaria</a:t>
+              <a:t>Así se ejecuta en nuestro proyecto: un solo proceso Node.js y la API original de Qolqe</a:t>
             </a:r>
           </a:p>
         </p:txBody>
@@ -8428,7 +6861,7 @@
         <p:spPr>
           <a:xfrm>
             <a:off x="548640" y="1737360"/>
-            <a:ext cx="2560320" cy="1188720"/>
+            <a:ext cx="1965960" cy="1234440"/>
           </a:xfrm>
           <a:prstGeom prst="roundRect">
             <a:avLst>
@@ -8464,25 +6897,25 @@
           <a:p>
             <a:pPr algn="ctr"/>
             <a:r>
-              <a:rPr sz="1700" b="1">
+              <a:rPr sz="1600" b="1">
                 <a:solidFill>
                   <a:srgbClr val="1B2733"/>
                 </a:solidFill>
                 <a:latin typeface="Calibri"/>
               </a:rPr>
-              <a:t>Persona usuaria</a:t>
+              <a:t>Test TypeScript</a:t>
             </a:r>
           </a:p>
           <a:p>
             <a:pPr algn="ctr"/>
             <a:r>
-              <a:rPr sz="1400" b="0">
+              <a:rPr sz="1300" b="0">
                 <a:solidFill>
                   <a:srgbClr val="5B6B7A"/>
                 </a:solidFill>
                 <a:latin typeface="Calibri"/>
               </a:rPr>
-              <a:t>escribe celular y alias</a:t>
+              <a:t>y Page Objects</a:t>
             </a:r>
           </a:p>
         </p:txBody>
@@ -8495,11 +6928,56 @@
         </p:nvSpPr>
         <p:spPr>
           <a:xfrm>
-            <a:off x="3154680" y="2194560"/>
-            <a:ext cx="228600" cy="274320"/>
+            <a:off x="2542032" y="2194560"/>
+            <a:ext cx="256032" cy="274320"/>
           </a:xfrm>
           <a:prstGeom prst="rightArrow">
             <a:avLst/>
+          </a:prstGeom>
+          <a:solidFill>
+            <a:srgbClr val="0F1B2D"/>
+          </a:solidFill>
+          <a:ln>
+            <a:noFill/>
+          </a:ln>
+        </p:spPr>
+        <p:style>
+          <a:lnRef idx="1">
+            <a:schemeClr val="accent1"/>
+          </a:lnRef>
+          <a:fillRef idx="3">
+            <a:schemeClr val="accent1"/>
+          </a:fillRef>
+          <a:effectRef idx="2">
+            <a:schemeClr val="accent1"/>
+          </a:effectRef>
+          <a:fontRef idx="minor">
+            <a:schemeClr val="lt1"/>
+          </a:fontRef>
+        </p:style>
+        <p:txBody>
+          <a:bodyPr rtlCol="0" anchor="ctr"/>
+          <a:lstStyle/>
+          <a:p>
+            <a:pPr algn="ctr"/>
+          </a:p>
+        </p:txBody>
+      </p:sp>
+      <p:sp>
+        <p:nvSpPr>
+          <p:cNvPr id="7" name="Rounded Rectangle 6"/>
+          <p:cNvSpPr/>
+          <p:nvPr/>
+        </p:nvSpPr>
+        <p:spPr>
+          <a:xfrm>
+            <a:off x="2825496" y="1737360"/>
+            <a:ext cx="1965960" cy="1234440"/>
+          </a:xfrm>
+          <a:prstGeom prst="roundRect">
+            <a:avLst>
+              <a:gd name="adj" fmla="val 8000"/>
+            </a:avLst>
           </a:prstGeom>
           <a:solidFill>
             <a:srgbClr val="2BD18F"/>
@@ -8523,6 +7001,70 @@
           </a:fontRef>
         </p:style>
         <p:txBody>
+          <a:bodyPr rtlCol="0" anchor="ctr" wrap="square" lIns="109728" rIns="109728" tIns="54864" bIns="54864"/>
+          <a:lstStyle/>
+          <a:p>
+            <a:pPr algn="ctr"/>
+            <a:r>
+              <a:rPr sz="1600" b="1">
+                <a:solidFill>
+                  <a:srgbClr val="1B2733"/>
+                </a:solidFill>
+                <a:latin typeface="Calibri"/>
+              </a:rPr>
+              <a:t>Cypress</a:t>
+            </a:r>
+          </a:p>
+          <a:p>
+            <a:pPr algn="ctr"/>
+            <a:r>
+              <a:rPr sz="1300" b="0">
+                <a:solidFill>
+                  <a:srgbClr val="0F1B2D"/>
+                </a:solidFill>
+                <a:latin typeface="Calibri"/>
+              </a:rPr>
+              <a:t>en el navegador</a:t>
+            </a:r>
+          </a:p>
+        </p:txBody>
+      </p:sp>
+      <p:sp>
+        <p:nvSpPr>
+          <p:cNvPr id="8" name="Right Arrow 7"/>
+          <p:cNvSpPr/>
+          <p:nvPr/>
+        </p:nvSpPr>
+        <p:spPr>
+          <a:xfrm>
+            <a:off x="4818888" y="2194560"/>
+            <a:ext cx="256032" cy="274320"/>
+          </a:xfrm>
+          <a:prstGeom prst="rightArrow">
+            <a:avLst/>
+          </a:prstGeom>
+          <a:solidFill>
+            <a:srgbClr val="0F1B2D"/>
+          </a:solidFill>
+          <a:ln>
+            <a:noFill/>
+          </a:ln>
+        </p:spPr>
+        <p:style>
+          <a:lnRef idx="1">
+            <a:schemeClr val="accent1"/>
+          </a:lnRef>
+          <a:fillRef idx="3">
+            <a:schemeClr val="accent1"/>
+          </a:fillRef>
+          <a:effectRef idx="2">
+            <a:schemeClr val="accent1"/>
+          </a:effectRef>
+          <a:fontRef idx="minor">
+            <a:schemeClr val="lt1"/>
+          </a:fontRef>
+        </p:style>
+        <p:txBody>
           <a:bodyPr rtlCol="0" anchor="ctr"/>
           <a:lstStyle/>
           <a:p>
@@ -8532,14 +7074,14 @@
       </p:sp>
       <p:sp>
         <p:nvSpPr>
-          <p:cNvPr id="7" name="Rounded Rectangle 6"/>
+          <p:cNvPr id="9" name="Rounded Rectangle 8"/>
           <p:cNvSpPr/>
           <p:nvPr/>
         </p:nvSpPr>
         <p:spPr>
           <a:xfrm>
-            <a:off x="3429000" y="1737360"/>
-            <a:ext cx="2560320" cy="1188720"/>
+            <a:off x="5102352" y="1737360"/>
+            <a:ext cx="1965960" cy="1234440"/>
           </a:xfrm>
           <a:prstGeom prst="roundRect">
             <a:avLst>
@@ -8575,45 +7117,45 @@
           <a:p>
             <a:pPr algn="ctr"/>
             <a:r>
-              <a:rPr sz="1700" b="1">
+              <a:rPr sz="1600" b="1">
                 <a:solidFill>
                   <a:srgbClr val="1B2733"/>
                 </a:solidFill>
                 <a:latin typeface="Calibri"/>
               </a:rPr>
-              <a:t>Formulario</a:t>
+              <a:t>UI real de Qolqe</a:t>
             </a:r>
           </a:p>
           <a:p>
             <a:pPr algn="ctr"/>
             <a:r>
-              <a:rPr sz="1400" b="0">
+              <a:rPr sz="1300" b="0">
                 <a:solidFill>
                   <a:srgbClr val="5B6B7A"/>
                 </a:solidFill>
                 <a:latin typeface="Calibri"/>
               </a:rPr>
-              <a:t>botón Agregar</a:t>
-            </a:r>
-          </a:p>
-        </p:txBody>
-      </p:sp>
-      <p:sp>
-        <p:nvSpPr>
-          <p:cNvPr id="8" name="Right Arrow 7"/>
+              <a:t>interfaz y DOM</a:t>
+            </a:r>
+          </a:p>
+        </p:txBody>
+      </p:sp>
+      <p:sp>
+        <p:nvSpPr>
+          <p:cNvPr id="10" name="Right Arrow 9"/>
           <p:cNvSpPr/>
           <p:nvPr/>
         </p:nvSpPr>
         <p:spPr>
           <a:xfrm>
-            <a:off x="6035040" y="2194560"/>
-            <a:ext cx="228600" cy="274320"/>
+            <a:off x="7095744" y="2194560"/>
+            <a:ext cx="256032" cy="274320"/>
           </a:xfrm>
           <a:prstGeom prst="rightArrow">
             <a:avLst/>
           </a:prstGeom>
           <a:solidFill>
-            <a:srgbClr val="2BD18F"/>
+            <a:srgbClr val="0F1B2D"/>
           </a:solidFill>
           <a:ln>
             <a:noFill/>
@@ -8643,14 +7185,14 @@
       </p:sp>
       <p:sp>
         <p:nvSpPr>
-          <p:cNvPr id="9" name="Rounded Rectangle 8"/>
+          <p:cNvPr id="11" name="Rounded Rectangle 10"/>
           <p:cNvSpPr/>
           <p:nvPr/>
         </p:nvSpPr>
         <p:spPr>
           <a:xfrm>
-            <a:off x="6309360" y="1737360"/>
-            <a:ext cx="2560320" cy="1188720"/>
+            <a:off x="7379208" y="1737360"/>
+            <a:ext cx="1965960" cy="1234440"/>
           </a:xfrm>
           <a:prstGeom prst="roundRect">
             <a:avLst>
@@ -8686,7 +7228,7 @@
           <a:p>
             <a:pPr algn="ctr"/>
             <a:r>
-              <a:rPr sz="1700" b="1">
+              <a:rPr sz="1600" b="1">
                 <a:solidFill>
                   <a:srgbClr val="1B2733"/>
                 </a:solidFill>
@@ -8698,33 +7240,33 @@
           <a:p>
             <a:pPr algn="ctr"/>
             <a:r>
-              <a:rPr sz="1400" b="0">
+              <a:rPr sz="1300" b="0">
                 <a:solidFill>
                   <a:srgbClr val="5B6B7A"/>
                 </a:solidFill>
                 <a:latin typeface="Calibri"/>
               </a:rPr>
-              <a:t>POST /api/contactos</a:t>
-            </a:r>
-          </a:p>
-        </p:txBody>
-      </p:sp>
-      <p:sp>
-        <p:nvSpPr>
-          <p:cNvPr id="10" name="Right Arrow 9"/>
+              <a:t>127.0.0.1:8011</a:t>
+            </a:r>
+          </a:p>
+        </p:txBody>
+      </p:sp>
+      <p:sp>
+        <p:nvSpPr>
+          <p:cNvPr id="12" name="Right Arrow 11"/>
           <p:cNvSpPr/>
           <p:nvPr/>
         </p:nvSpPr>
         <p:spPr>
           <a:xfrm>
-            <a:off x="8915400" y="2194560"/>
-            <a:ext cx="228600" cy="274320"/>
+            <a:off x="9372600" y="2194560"/>
+            <a:ext cx="256032" cy="274320"/>
           </a:xfrm>
           <a:prstGeom prst="rightArrow">
             <a:avLst/>
           </a:prstGeom>
           <a:solidFill>
-            <a:srgbClr val="2BD18F"/>
+            <a:srgbClr val="0F1B2D"/>
           </a:solidFill>
           <a:ln>
             <a:noFill/>
@@ -8754,14 +7296,14 @@
       </p:sp>
       <p:sp>
         <p:nvSpPr>
-          <p:cNvPr id="11" name="Rounded Rectangle 10"/>
+          <p:cNvPr id="13" name="Rounded Rectangle 12"/>
           <p:cNvSpPr/>
           <p:nvPr/>
         </p:nvSpPr>
         <p:spPr>
           <a:xfrm>
-            <a:off x="9189720" y="1737360"/>
-            <a:ext cx="2560320" cy="1188720"/>
+            <a:off x="9656064" y="1737360"/>
+            <a:ext cx="1965960" cy="1234440"/>
           </a:xfrm>
           <a:prstGeom prst="roundRect">
             <a:avLst>
@@ -8797,39 +7339,39 @@
           <a:p>
             <a:pPr algn="ctr"/>
             <a:r>
-              <a:rPr sz="1700" b="1">
+              <a:rPr sz="1600" b="1">
                 <a:solidFill>
                   <a:srgbClr val="1B2733"/>
                 </a:solidFill>
                 <a:latin typeface="Calibri"/>
               </a:rPr>
-              <a:t>Base SQLite</a:t>
+              <a:t>SQLite</a:t>
             </a:r>
           </a:p>
           <a:p>
             <a:pPr algn="ctr"/>
             <a:r>
-              <a:rPr sz="1400" b="0">
+              <a:rPr sz="1300" b="0">
                 <a:solidFill>
                   <a:srgbClr val="5B6B7A"/>
                 </a:solidFill>
                 <a:latin typeface="Calibri"/>
               </a:rPr>
-              <a:t>contacto guardado</a:t>
-            </a:r>
-          </a:p>
-        </p:txBody>
-      </p:sp>
-      <p:sp>
-        <p:nvSpPr>
-          <p:cNvPr id="12" name="Rounded Rectangle 11"/>
+              <a:t>base exclusiva de Cypress</a:t>
+            </a:r>
+          </a:p>
+        </p:txBody>
+      </p:sp>
+      <p:sp>
+        <p:nvSpPr>
+          <p:cNvPr id="14" name="Rounded Rectangle 13"/>
           <p:cNvSpPr/>
           <p:nvPr/>
         </p:nvSpPr>
         <p:spPr>
           <a:xfrm>
-            <a:off x="3429000" y="3154680"/>
-            <a:ext cx="2560320" cy="822960"/>
+            <a:off x="2505456" y="3749039"/>
+            <a:ext cx="2606040" cy="1005840"/>
           </a:xfrm>
           <a:prstGeom prst="roundRect">
             <a:avLst>
@@ -8837,12 +7379,10 @@
             </a:avLst>
           </a:prstGeom>
           <a:solidFill>
-            <a:srgbClr val="FDECEC"/>
+            <a:srgbClr val="1B2B44"/>
           </a:solidFill>
-          <a:ln w="19050">
-            <a:solidFill>
-              <a:srgbClr val="DC4A4F"/>
-            </a:solidFill>
+          <a:ln>
+            <a:noFill/>
           </a:ln>
         </p:spPr>
         <p:style>
@@ -8865,27 +7405,39 @@
           <a:p>
             <a:pPr algn="ctr"/>
             <a:r>
-              <a:rPr sz="1400" b="0">
-                <a:solidFill>
-                  <a:srgbClr val="8A1F24"/>
-                </a:solidFill>
-                <a:latin typeface="Calibri"/>
-              </a:rPr>
-              <a:t>Si el botón no responde, la API sigue «correcta»</a:t>
-            </a:r>
-          </a:p>
-        </p:txBody>
-      </p:sp>
-      <p:sp>
-        <p:nvSpPr>
-          <p:cNvPr id="13" name="Rounded Rectangle 12"/>
+              <a:rPr sz="1600" b="1">
+                <a:solidFill>
+                  <a:srgbClr val="FFFFFF"/>
+                </a:solidFill>
+                <a:latin typeface="Calibri"/>
+              </a:rPr>
+              <a:t>Proceso Node.js</a:t>
+            </a:r>
+          </a:p>
+          <a:p>
+            <a:pPr algn="ctr"/>
+            <a:r>
+              <a:rPr sz="1300" b="0">
+                <a:solidFill>
+                  <a:srgbClr val="C7D2E0"/>
+                </a:solidFill>
+                <a:latin typeface="Calibri"/>
+              </a:rPr>
+              <a:t>configuración, eventos, reportes y videos</a:t>
+            </a:r>
+          </a:p>
+        </p:txBody>
+      </p:sp>
+      <p:sp>
+        <p:nvSpPr>
+          <p:cNvPr id="15" name="Rounded Rectangle 14"/>
           <p:cNvSpPr/>
           <p:nvPr/>
         </p:nvSpPr>
         <p:spPr>
           <a:xfrm>
-            <a:off x="548640" y="4343400"/>
-            <a:ext cx="11201400" cy="1554480"/>
+            <a:off x="7013448" y="3749039"/>
+            <a:ext cx="2834640" cy="1005840"/>
           </a:xfrm>
           <a:prstGeom prst="roundRect">
             <a:avLst>
@@ -8893,10 +7445,13 @@
             </a:avLst>
           </a:prstGeom>
           <a:solidFill>
-            <a:srgbClr val="0F1B2D"/>
+            <a:srgbClr val="FFFFFF"/>
           </a:solidFill>
-          <a:ln>
-            <a:noFill/>
+          <a:ln w="19050">
+            <a:solidFill>
+              <a:srgbClr val="3B82F6"/>
+            </a:solidFill>
+            <a:prstDash val="dash"/>
           </a:ln>
         </p:spPr>
         <p:style>
@@ -8917,51 +7472,83 @@
           <a:bodyPr rtlCol="0" anchor="ctr" wrap="square" lIns="109728" rIns="109728" tIns="54864" bIns="54864"/>
           <a:lstStyle/>
           <a:p>
-            <a:pPr algn="l"/>
-            <a:r>
-              <a:rPr sz="1800" b="1">
-                <a:solidFill>
-                  <a:srgbClr val="2BD18F"/>
-                </a:solidFill>
-                <a:latin typeface="Calibri"/>
-              </a:rPr>
-              <a:t>Qué comprueba la prueba E2E</a:t>
-            </a:r>
-          </a:p>
-          <a:p>
-            <a:pPr algn="l"/>
-            <a:r>
-              <a:rPr sz="1600" b="0">
-                <a:solidFill>
-                  <a:srgbClr val="FFFFFF"/>
-                </a:solidFill>
-                <a:latin typeface="Calibri"/>
-              </a:rPr>
-              <a:t>1  El envío: la petición real recibe 201</a:t>
-            </a:r>
-          </a:p>
-          <a:p>
-            <a:pPr algn="l"/>
-            <a:r>
-              <a:rPr sz="1600" b="0">
-                <a:solidFill>
-                  <a:srgbClr val="FFFFFF"/>
-                </a:solidFill>
-                <a:latin typeface="Calibri"/>
-              </a:rPr>
-              <a:t>2  Los datos visibles: alias, celular y favorito en la fila</a:t>
-            </a:r>
-          </a:p>
-          <a:p>
-            <a:pPr algn="l"/>
-            <a:r>
-              <a:rPr sz="1600" b="0">
-                <a:solidFill>
-                  <a:srgbClr val="FFFFFF"/>
-                </a:solidFill>
-                <a:latin typeface="Calibri"/>
-              </a:rPr>
-              <a:t>3  La persistencia: tras recargar, el contacto sigue allí</a:t>
+            <a:pPr algn="ctr"/>
+            <a:r>
+              <a:rPr sz="1600" b="1">
+                <a:solidFill>
+                  <a:srgbClr val="1B2733"/>
+                </a:solidFill>
+                <a:latin typeface="Calibri"/>
+              </a:rPr>
+              <a:t>Cypress Cloud</a:t>
+            </a:r>
+          </a:p>
+          <a:p>
+            <a:pPr algn="ctr"/>
+            <a:r>
+              <a:rPr sz="1300" b="0">
+                <a:solidFill>
+                  <a:srgbClr val="5B6B7A"/>
+                </a:solidFill>
+                <a:latin typeface="Calibri"/>
+              </a:rPr>
+              <a:t>cy.prompt, solo en la demo IA</a:t>
+            </a:r>
+          </a:p>
+        </p:txBody>
+      </p:sp>
+      <p:sp>
+        <p:nvSpPr>
+          <p:cNvPr id="16" name="Rounded Rectangle 15"/>
+          <p:cNvSpPr/>
+          <p:nvPr/>
+        </p:nvSpPr>
+        <p:spPr>
+          <a:xfrm>
+            <a:off x="548640" y="5166360"/>
+            <a:ext cx="11064240" cy="731520"/>
+          </a:xfrm>
+          <a:prstGeom prst="roundRect">
+            <a:avLst>
+              <a:gd name="adj" fmla="val 8000"/>
+            </a:avLst>
+          </a:prstGeom>
+          <a:solidFill>
+            <a:srgbClr val="FFFFFF"/>
+          </a:solidFill>
+          <a:ln w="19050">
+            <a:solidFill>
+              <a:srgbClr val="D5DEE8"/>
+            </a:solidFill>
+          </a:ln>
+        </p:spPr>
+        <p:style>
+          <a:lnRef idx="1">
+            <a:schemeClr val="accent1"/>
+          </a:lnRef>
+          <a:fillRef idx="3">
+            <a:schemeClr val="accent1"/>
+          </a:fillRef>
+          <a:effectRef idx="2">
+            <a:schemeClr val="accent1"/>
+          </a:effectRef>
+          <a:fontRef idx="minor">
+            <a:schemeClr val="lt1"/>
+          </a:fontRef>
+        </p:style>
+        <p:txBody>
+          <a:bodyPr rtlCol="0" anchor="ctr" wrap="square" lIns="109728" rIns="109728" tIns="54864" bIns="54864"/>
+          <a:lstStyle/>
+          <a:p>
+            <a:pPr algn="ctr"/>
+            <a:r>
+              <a:rPr sz="1500" b="0">
+                <a:solidFill>
+                  <a:srgbClr val="1B2733"/>
+                </a:solidFill>
+                <a:latin typeface="Calibri"/>
+              </a:rPr>
+              <a:t>Las consultas y aserciones reintentan hasta su límite de tiempo. Eso ayuda, pero no elimina todos los fallos intermitentes.</a:t>
             </a:r>
           </a:p>
         </p:txBody>
@@ -9026,7 +7613,7 @@
                 </a:solidFill>
                 <a:latin typeface="Calibri"/>
               </a:rPr>
-              <a:t>Cypress y su evolución</a:t>
+              <a:t>Del criterio de aceptación a la prueba</a:t>
             </a:r>
           </a:p>
         </p:txBody>
@@ -9065,7 +7652,7 @@
                 </a:solidFill>
                 <a:latin typeface="Calibri"/>
               </a:rPr>
-              <a:t>Automatización web en JavaScript y TypeScript; también prueba componentes y hace solicitudes API</a:t>
+              <a:t>HU-G4-01 · Agregar un contacto · CA1 · reglas R-G4-01/02/03</a:t>
             </a:r>
           </a:p>
         </p:txBody>
@@ -9105,1697 +7692,6 @@
                 <a:latin typeface="Calibri"/>
               </a:rPr>
               <a:t>03</a:t>
-            </a:r>
-          </a:p>
-        </p:txBody>
-      </p:sp>
-      <p:sp>
-        <p:nvSpPr>
-          <p:cNvPr id="5" name="Rectangle 4"/>
-          <p:cNvSpPr/>
-          <p:nvPr/>
-        </p:nvSpPr>
-        <p:spPr>
-          <a:xfrm>
-            <a:off x="1463040" y="3246120"/>
-            <a:ext cx="9144000" cy="54864"/>
-          </a:xfrm>
-          <a:prstGeom prst="rect">
-            <a:avLst/>
-          </a:prstGeom>
-          <a:solidFill>
-            <a:srgbClr val="B9C6D4"/>
-          </a:solidFill>
-          <a:ln>
-            <a:noFill/>
-          </a:ln>
-        </p:spPr>
-        <p:style>
-          <a:lnRef idx="1">
-            <a:schemeClr val="accent1"/>
-          </a:lnRef>
-          <a:fillRef idx="3">
-            <a:schemeClr val="accent1"/>
-          </a:fillRef>
-          <a:effectRef idx="2">
-            <a:schemeClr val="accent1"/>
-          </a:effectRef>
-          <a:fontRef idx="minor">
-            <a:schemeClr val="lt1"/>
-          </a:fontRef>
-        </p:style>
-        <p:txBody>
-          <a:bodyPr rtlCol="0" anchor="ctr"/>
-          <a:lstStyle/>
-          <a:p>
-            <a:pPr algn="ctr"/>
-          </a:p>
-        </p:txBody>
-      </p:sp>
-      <p:sp>
-        <p:nvSpPr>
-          <p:cNvPr id="6" name="Oval 5"/>
-          <p:cNvSpPr/>
-          <p:nvPr/>
-        </p:nvSpPr>
-        <p:spPr>
-          <a:xfrm>
-            <a:off x="1280160" y="3136392"/>
-            <a:ext cx="274320" cy="274320"/>
-          </a:xfrm>
-          <a:prstGeom prst="ellipse">
-            <a:avLst/>
-          </a:prstGeom>
-          <a:solidFill>
-            <a:srgbClr val="0F1B2D"/>
-          </a:solidFill>
-          <a:ln>
-            <a:noFill/>
-          </a:ln>
-        </p:spPr>
-        <p:style>
-          <a:lnRef idx="1">
-            <a:schemeClr val="accent1"/>
-          </a:lnRef>
-          <a:fillRef idx="3">
-            <a:schemeClr val="accent1"/>
-          </a:fillRef>
-          <a:effectRef idx="2">
-            <a:schemeClr val="accent1"/>
-          </a:effectRef>
-          <a:fontRef idx="minor">
-            <a:schemeClr val="lt1"/>
-          </a:fontRef>
-        </p:style>
-        <p:txBody>
-          <a:bodyPr rtlCol="0" anchor="ctr"/>
-          <a:lstStyle/>
-          <a:p>
-            <a:pPr algn="ctr"/>
-          </a:p>
-        </p:txBody>
-      </p:sp>
-      <p:sp>
-        <p:nvSpPr>
-          <p:cNvPr id="7" name="TextBox 6"/>
-          <p:cNvSpPr txBox="1"/>
-          <p:nvPr/>
-        </p:nvSpPr>
-        <p:spPr>
-          <a:xfrm>
-            <a:off x="640080" y="2286000"/>
-            <a:ext cx="1645920" cy="548640"/>
-          </a:xfrm>
-          <a:prstGeom prst="rect">
-            <a:avLst/>
-          </a:prstGeom>
-          <a:noFill/>
-        </p:spPr>
-        <p:txBody>
-          <a:bodyPr wrap="square" lIns="0" rIns="0" tIns="0" bIns="0" anchor="t">
-            <a:spAutoFit/>
-          </a:bodyPr>
-          <a:lstStyle/>
-          <a:p>
-            <a:pPr algn="ctr">
-              <a:spcAft>
-                <a:spcPts val="0"/>
-              </a:spcAft>
-            </a:pPr>
-            <a:r>
-              <a:rPr sz="2800" b="1" i="0">
-                <a:solidFill>
-                  <a:srgbClr val="0F1B2D"/>
-                </a:solidFill>
-                <a:latin typeface="Calibri"/>
-              </a:rPr>
-              <a:t>2017</a:t>
-            </a:r>
-          </a:p>
-        </p:txBody>
-      </p:sp>
-      <p:sp>
-        <p:nvSpPr>
-          <p:cNvPr id="8" name="TextBox 7"/>
-          <p:cNvSpPr txBox="1"/>
-          <p:nvPr/>
-        </p:nvSpPr>
-        <p:spPr>
-          <a:xfrm>
-            <a:off x="411480" y="3657600"/>
-            <a:ext cx="2103120" cy="914400"/>
-          </a:xfrm>
-          <a:prstGeom prst="rect">
-            <a:avLst/>
-          </a:prstGeom>
-          <a:noFill/>
-        </p:spPr>
-        <p:txBody>
-          <a:bodyPr wrap="square" lIns="0" rIns="0" tIns="0" bIns="0" anchor="t">
-            <a:spAutoFit/>
-          </a:bodyPr>
-          <a:lstStyle/>
-          <a:p>
-            <a:pPr algn="ctr">
-              <a:spcAft>
-                <a:spcPts val="0"/>
-              </a:spcAft>
-            </a:pPr>
-            <a:r>
-              <a:rPr sz="1500" b="0" i="0">
-                <a:solidFill>
-                  <a:srgbClr val="1B2733"/>
-                </a:solidFill>
-                <a:latin typeface="Calibri"/>
-              </a:rPr>
-              <a:t>Beta pública y código abierto</a:t>
-            </a:r>
-          </a:p>
-        </p:txBody>
-      </p:sp>
-      <p:sp>
-        <p:nvSpPr>
-          <p:cNvPr id="9" name="Oval 8"/>
-          <p:cNvSpPr/>
-          <p:nvPr/>
-        </p:nvSpPr>
-        <p:spPr>
-          <a:xfrm>
-            <a:off x="3566159" y="3136392"/>
-            <a:ext cx="274320" cy="274320"/>
-          </a:xfrm>
-          <a:prstGeom prst="ellipse">
-            <a:avLst/>
-          </a:prstGeom>
-          <a:solidFill>
-            <a:srgbClr val="0F1B2D"/>
-          </a:solidFill>
-          <a:ln>
-            <a:noFill/>
-          </a:ln>
-        </p:spPr>
-        <p:style>
-          <a:lnRef idx="1">
-            <a:schemeClr val="accent1"/>
-          </a:lnRef>
-          <a:fillRef idx="3">
-            <a:schemeClr val="accent1"/>
-          </a:fillRef>
-          <a:effectRef idx="2">
-            <a:schemeClr val="accent1"/>
-          </a:effectRef>
-          <a:fontRef idx="minor">
-            <a:schemeClr val="lt1"/>
-          </a:fontRef>
-        </p:style>
-        <p:txBody>
-          <a:bodyPr rtlCol="0" anchor="ctr"/>
-          <a:lstStyle/>
-          <a:p>
-            <a:pPr algn="ctr"/>
-          </a:p>
-        </p:txBody>
-      </p:sp>
-      <p:sp>
-        <p:nvSpPr>
-          <p:cNvPr id="10" name="TextBox 9"/>
-          <p:cNvSpPr txBox="1"/>
-          <p:nvPr/>
-        </p:nvSpPr>
-        <p:spPr>
-          <a:xfrm>
-            <a:off x="2926079" y="2286000"/>
-            <a:ext cx="1645920" cy="548640"/>
-          </a:xfrm>
-          <a:prstGeom prst="rect">
-            <a:avLst/>
-          </a:prstGeom>
-          <a:noFill/>
-        </p:spPr>
-        <p:txBody>
-          <a:bodyPr wrap="square" lIns="0" rIns="0" tIns="0" bIns="0" anchor="t">
-            <a:spAutoFit/>
-          </a:bodyPr>
-          <a:lstStyle/>
-          <a:p>
-            <a:pPr algn="ctr">
-              <a:spcAft>
-                <a:spcPts val="0"/>
-              </a:spcAft>
-            </a:pPr>
-            <a:r>
-              <a:rPr sz="2800" b="1" i="0">
-                <a:solidFill>
-                  <a:srgbClr val="0F1B2D"/>
-                </a:solidFill>
-                <a:latin typeface="Calibri"/>
-              </a:rPr>
-              <a:t>2022</a:t>
-            </a:r>
-          </a:p>
-        </p:txBody>
-      </p:sp>
-      <p:sp>
-        <p:nvSpPr>
-          <p:cNvPr id="11" name="TextBox 10"/>
-          <p:cNvSpPr txBox="1"/>
-          <p:nvPr/>
-        </p:nvSpPr>
-        <p:spPr>
-          <a:xfrm>
-            <a:off x="2697479" y="3657600"/>
-            <a:ext cx="2103120" cy="914400"/>
-          </a:xfrm>
-          <a:prstGeom prst="rect">
-            <a:avLst/>
-          </a:prstGeom>
-          <a:noFill/>
-        </p:spPr>
-        <p:txBody>
-          <a:bodyPr wrap="square" lIns="0" rIns="0" tIns="0" bIns="0" anchor="t">
-            <a:spAutoFit/>
-          </a:bodyPr>
-          <a:lstStyle/>
-          <a:p>
-            <a:pPr algn="ctr">
-              <a:spcAft>
-                <a:spcPts val="0"/>
-              </a:spcAft>
-            </a:pPr>
-            <a:r>
-              <a:rPr sz="1500" b="0" i="0">
-                <a:solidFill>
-                  <a:srgbClr val="1B2733"/>
-                </a:solidFill>
-                <a:latin typeface="Calibri"/>
-              </a:rPr>
-              <a:t>Cypress 10: Component Testing (beta)</a:t>
-            </a:r>
-          </a:p>
-        </p:txBody>
-      </p:sp>
-      <p:sp>
-        <p:nvSpPr>
-          <p:cNvPr id="12" name="Oval 11"/>
-          <p:cNvSpPr/>
-          <p:nvPr/>
-        </p:nvSpPr>
-        <p:spPr>
-          <a:xfrm>
-            <a:off x="5852159" y="3136392"/>
-            <a:ext cx="274320" cy="274320"/>
-          </a:xfrm>
-          <a:prstGeom prst="ellipse">
-            <a:avLst/>
-          </a:prstGeom>
-          <a:solidFill>
-            <a:srgbClr val="0F1B2D"/>
-          </a:solidFill>
-          <a:ln>
-            <a:noFill/>
-          </a:ln>
-        </p:spPr>
-        <p:style>
-          <a:lnRef idx="1">
-            <a:schemeClr val="accent1"/>
-          </a:lnRef>
-          <a:fillRef idx="3">
-            <a:schemeClr val="accent1"/>
-          </a:fillRef>
-          <a:effectRef idx="2">
-            <a:schemeClr val="accent1"/>
-          </a:effectRef>
-          <a:fontRef idx="minor">
-            <a:schemeClr val="lt1"/>
-          </a:fontRef>
-        </p:style>
-        <p:txBody>
-          <a:bodyPr rtlCol="0" anchor="ctr"/>
-          <a:lstStyle/>
-          <a:p>
-            <a:pPr algn="ctr"/>
-          </a:p>
-        </p:txBody>
-      </p:sp>
-      <p:sp>
-        <p:nvSpPr>
-          <p:cNvPr id="13" name="TextBox 12"/>
-          <p:cNvSpPr txBox="1"/>
-          <p:nvPr/>
-        </p:nvSpPr>
-        <p:spPr>
-          <a:xfrm>
-            <a:off x="5212079" y="2286000"/>
-            <a:ext cx="1645920" cy="548640"/>
-          </a:xfrm>
-          <a:prstGeom prst="rect">
-            <a:avLst/>
-          </a:prstGeom>
-          <a:noFill/>
-        </p:spPr>
-        <p:txBody>
-          <a:bodyPr wrap="square" lIns="0" rIns="0" tIns="0" bIns="0" anchor="t">
-            <a:spAutoFit/>
-          </a:bodyPr>
-          <a:lstStyle/>
-          <a:p>
-            <a:pPr algn="ctr">
-              <a:spcAft>
-                <a:spcPts val="0"/>
-              </a:spcAft>
-            </a:pPr>
-            <a:r>
-              <a:rPr sz="2800" b="1" i="0">
-                <a:solidFill>
-                  <a:srgbClr val="0F1B2D"/>
-                </a:solidFill>
-                <a:latin typeface="Calibri"/>
-              </a:rPr>
-              <a:t>15.4</a:t>
-            </a:r>
-          </a:p>
-        </p:txBody>
-      </p:sp>
-      <p:sp>
-        <p:nvSpPr>
-          <p:cNvPr id="14" name="TextBox 13"/>
-          <p:cNvSpPr txBox="1"/>
-          <p:nvPr/>
-        </p:nvSpPr>
-        <p:spPr>
-          <a:xfrm>
-            <a:off x="4983479" y="3657600"/>
-            <a:ext cx="2103120" cy="914400"/>
-          </a:xfrm>
-          <a:prstGeom prst="rect">
-            <a:avLst/>
-          </a:prstGeom>
-          <a:noFill/>
-        </p:spPr>
-        <p:txBody>
-          <a:bodyPr wrap="square" lIns="0" rIns="0" tIns="0" bIns="0" anchor="t">
-            <a:spAutoFit/>
-          </a:bodyPr>
-          <a:lstStyle/>
-          <a:p>
-            <a:pPr algn="ctr">
-              <a:spcAft>
-                <a:spcPts val="0"/>
-              </a:spcAft>
-            </a:pPr>
-            <a:r>
-              <a:rPr sz="1500" b="0" i="0">
-                <a:solidFill>
-                  <a:srgbClr val="1B2733"/>
-                </a:solidFill>
-                <a:latin typeface="Calibri"/>
-              </a:rPr>
-              <a:t>Aparece cy.prompt</a:t>
-            </a:r>
-          </a:p>
-        </p:txBody>
-      </p:sp>
-      <p:sp>
-        <p:nvSpPr>
-          <p:cNvPr id="15" name="Oval 14"/>
-          <p:cNvSpPr/>
-          <p:nvPr/>
-        </p:nvSpPr>
-        <p:spPr>
-          <a:xfrm>
-            <a:off x="8138160" y="3136392"/>
-            <a:ext cx="274320" cy="274320"/>
-          </a:xfrm>
-          <a:prstGeom prst="ellipse">
-            <a:avLst/>
-          </a:prstGeom>
-          <a:solidFill>
-            <a:srgbClr val="0F1B2D"/>
-          </a:solidFill>
-          <a:ln>
-            <a:noFill/>
-          </a:ln>
-        </p:spPr>
-        <p:style>
-          <a:lnRef idx="1">
-            <a:schemeClr val="accent1"/>
-          </a:lnRef>
-          <a:fillRef idx="3">
-            <a:schemeClr val="accent1"/>
-          </a:fillRef>
-          <a:effectRef idx="2">
-            <a:schemeClr val="accent1"/>
-          </a:effectRef>
-          <a:fontRef idx="minor">
-            <a:schemeClr val="lt1"/>
-          </a:fontRef>
-        </p:style>
-        <p:txBody>
-          <a:bodyPr rtlCol="0" anchor="ctr"/>
-          <a:lstStyle/>
-          <a:p>
-            <a:pPr algn="ctr"/>
-          </a:p>
-        </p:txBody>
-      </p:sp>
-      <p:sp>
-        <p:nvSpPr>
-          <p:cNvPr id="16" name="TextBox 15"/>
-          <p:cNvSpPr txBox="1"/>
-          <p:nvPr/>
-        </p:nvSpPr>
-        <p:spPr>
-          <a:xfrm>
-            <a:off x="7498079" y="2286000"/>
-            <a:ext cx="1645920" cy="548640"/>
-          </a:xfrm>
-          <a:prstGeom prst="rect">
-            <a:avLst/>
-          </a:prstGeom>
-          <a:noFill/>
-        </p:spPr>
-        <p:txBody>
-          <a:bodyPr wrap="square" lIns="0" rIns="0" tIns="0" bIns="0" anchor="t">
-            <a:spAutoFit/>
-          </a:bodyPr>
-          <a:lstStyle/>
-          <a:p>
-            <a:pPr algn="ctr">
-              <a:spcAft>
-                <a:spcPts val="0"/>
-              </a:spcAft>
-            </a:pPr>
-            <a:r>
-              <a:rPr sz="2800" b="1" i="0">
-                <a:solidFill>
-                  <a:srgbClr val="0F1B2D"/>
-                </a:solidFill>
-                <a:latin typeface="Calibri"/>
-              </a:rPr>
-              <a:t>15.13</a:t>
-            </a:r>
-          </a:p>
-        </p:txBody>
-      </p:sp>
-      <p:sp>
-        <p:nvSpPr>
-          <p:cNvPr id="17" name="TextBox 16"/>
-          <p:cNvSpPr txBox="1"/>
-          <p:nvPr/>
-        </p:nvSpPr>
-        <p:spPr>
-          <a:xfrm>
-            <a:off x="7269479" y="3657600"/>
-            <a:ext cx="2103120" cy="914400"/>
-          </a:xfrm>
-          <a:prstGeom prst="rect">
-            <a:avLst/>
-          </a:prstGeom>
-          <a:noFill/>
-        </p:spPr>
-        <p:txBody>
-          <a:bodyPr wrap="square" lIns="0" rIns="0" tIns="0" bIns="0" anchor="t">
-            <a:spAutoFit/>
-          </a:bodyPr>
-          <a:lstStyle/>
-          <a:p>
-            <a:pPr algn="ctr">
-              <a:spcAft>
-                <a:spcPts val="0"/>
-              </a:spcAft>
-            </a:pPr>
-            <a:r>
-              <a:rPr sz="1500" b="0" i="0">
-                <a:solidFill>
-                  <a:srgbClr val="1B2733"/>
-                </a:solidFill>
-                <a:latin typeface="Calibri"/>
-              </a:rPr>
-              <a:t>cy.prompt pasa a beta</a:t>
-            </a:r>
-          </a:p>
-        </p:txBody>
-      </p:sp>
-      <p:sp>
-        <p:nvSpPr>
-          <p:cNvPr id="18" name="Oval 17"/>
-          <p:cNvSpPr/>
-          <p:nvPr/>
-        </p:nvSpPr>
-        <p:spPr>
-          <a:xfrm>
-            <a:off x="10424160" y="3136392"/>
-            <a:ext cx="274320" cy="274320"/>
-          </a:xfrm>
-          <a:prstGeom prst="ellipse">
-            <a:avLst/>
-          </a:prstGeom>
-          <a:solidFill>
-            <a:srgbClr val="2BD18F"/>
-          </a:solidFill>
-          <a:ln>
-            <a:noFill/>
-          </a:ln>
-        </p:spPr>
-        <p:style>
-          <a:lnRef idx="1">
-            <a:schemeClr val="accent1"/>
-          </a:lnRef>
-          <a:fillRef idx="3">
-            <a:schemeClr val="accent1"/>
-          </a:fillRef>
-          <a:effectRef idx="2">
-            <a:schemeClr val="accent1"/>
-          </a:effectRef>
-          <a:fontRef idx="minor">
-            <a:schemeClr val="lt1"/>
-          </a:fontRef>
-        </p:style>
-        <p:txBody>
-          <a:bodyPr rtlCol="0" anchor="ctr"/>
-          <a:lstStyle/>
-          <a:p>
-            <a:pPr algn="ctr"/>
-          </a:p>
-        </p:txBody>
-      </p:sp>
-      <p:sp>
-        <p:nvSpPr>
-          <p:cNvPr id="19" name="TextBox 18"/>
-          <p:cNvSpPr txBox="1"/>
-          <p:nvPr/>
-        </p:nvSpPr>
-        <p:spPr>
-          <a:xfrm>
-            <a:off x="9784080" y="2286000"/>
-            <a:ext cx="1645920" cy="548640"/>
-          </a:xfrm>
-          <a:prstGeom prst="rect">
-            <a:avLst/>
-          </a:prstGeom>
-          <a:noFill/>
-        </p:spPr>
-        <p:txBody>
-          <a:bodyPr wrap="square" lIns="0" rIns="0" tIns="0" bIns="0" anchor="t">
-            <a:spAutoFit/>
-          </a:bodyPr>
-          <a:lstStyle/>
-          <a:p>
-            <a:pPr algn="ctr">
-              <a:spcAft>
-                <a:spcPts val="0"/>
-              </a:spcAft>
-            </a:pPr>
-            <a:r>
-              <a:rPr sz="2800" b="1" i="0">
-                <a:solidFill>
-                  <a:srgbClr val="0F1B2D"/>
-                </a:solidFill>
-                <a:latin typeface="Calibri"/>
-              </a:rPr>
-              <a:t>16.2.0</a:t>
-            </a:r>
-          </a:p>
-        </p:txBody>
-      </p:sp>
-      <p:sp>
-        <p:nvSpPr>
-          <p:cNvPr id="20" name="TextBox 19"/>
-          <p:cNvSpPr txBox="1"/>
-          <p:nvPr/>
-        </p:nvSpPr>
-        <p:spPr>
-          <a:xfrm>
-            <a:off x="9555480" y="3657600"/>
-            <a:ext cx="2103120" cy="914400"/>
-          </a:xfrm>
-          <a:prstGeom prst="rect">
-            <a:avLst/>
-          </a:prstGeom>
-          <a:noFill/>
-        </p:spPr>
-        <p:txBody>
-          <a:bodyPr wrap="square" lIns="0" rIns="0" tIns="0" bIns="0" anchor="t">
-            <a:spAutoFit/>
-          </a:bodyPr>
-          <a:lstStyle/>
-          <a:p>
-            <a:pPr algn="ctr">
-              <a:spcAft>
-                <a:spcPts val="0"/>
-              </a:spcAft>
-            </a:pPr>
-            <a:r>
-              <a:rPr sz="1500" b="1" i="0">
-                <a:solidFill>
-                  <a:srgbClr val="1B2733"/>
-                </a:solidFill>
-                <a:latin typeface="Calibri"/>
-              </a:rPr>
-              <a:t>Versión de este proyecto</a:t>
-            </a:r>
-          </a:p>
-        </p:txBody>
-      </p:sp>
-      <p:sp>
-        <p:nvSpPr>
-          <p:cNvPr id="21" name="Rounded Rectangle 20"/>
-          <p:cNvSpPr/>
-          <p:nvPr/>
-        </p:nvSpPr>
-        <p:spPr>
-          <a:xfrm>
-            <a:off x="548640" y="5120640"/>
-            <a:ext cx="11064240" cy="822960"/>
-          </a:xfrm>
-          <a:prstGeom prst="roundRect">
-            <a:avLst>
-              <a:gd name="adj" fmla="val 8000"/>
-            </a:avLst>
-          </a:prstGeom>
-          <a:solidFill>
-            <a:srgbClr val="FFFFFF"/>
-          </a:solidFill>
-          <a:ln w="19050">
-            <a:solidFill>
-              <a:srgbClr val="D5DEE8"/>
-            </a:solidFill>
-          </a:ln>
-        </p:spPr>
-        <p:style>
-          <a:lnRef idx="1">
-            <a:schemeClr val="accent1"/>
-          </a:lnRef>
-          <a:fillRef idx="3">
-            <a:schemeClr val="accent1"/>
-          </a:fillRef>
-          <a:effectRef idx="2">
-            <a:schemeClr val="accent1"/>
-          </a:effectRef>
-          <a:fontRef idx="minor">
-            <a:schemeClr val="lt1"/>
-          </a:fontRef>
-        </p:style>
-        <p:txBody>
-          <a:bodyPr rtlCol="0" anchor="ctr" wrap="square" lIns="109728" rIns="109728" tIns="54864" bIns="54864"/>
-          <a:lstStyle/>
-          <a:p>
-            <a:pPr algn="ctr"/>
-            <a:r>
-              <a:rPr sz="1600" b="0">
-                <a:solidFill>
-                  <a:srgbClr val="1B2733"/>
-                </a:solidFill>
-                <a:latin typeface="Calibri"/>
-              </a:rPr>
-              <a:t>Problema que resuelve: pruebas de navegador lentas y frágiles. Cypress espera solo a la interfaz y deja depurar cada paso.</a:t>
-            </a:r>
-          </a:p>
-        </p:txBody>
-      </p:sp>
-    </p:spTree>
-  </p:cSld>
-  <p:clrMapOvr>
-    <a:masterClrMapping/>
-  </p:clrMapOvr>
-</p:sld>
-</file>
-
-<file path=ppt/slides/slide4.xml><?xml version="1.0" encoding="utf-8"?>
-<p:sld xmlns:a="http://schemas.openxmlformats.org/drawingml/2006/main" xmlns:p="http://schemas.openxmlformats.org/presentationml/2006/main" xmlns:r="http://schemas.openxmlformats.org/officeDocument/2006/relationships">
-  <p:cSld>
-    <p:bg>
-      <p:bgPr>
-        <a:solidFill>
-          <a:srgbClr val="F4F7FA"/>
-        </a:solidFill>
-        <a:effectLst/>
-      </p:bgPr>
-    </p:bg>
-    <p:spTree>
-      <p:nvGrpSpPr>
-        <p:cNvPr id="1" name=""/>
-        <p:cNvGrpSpPr/>
-        <p:nvPr/>
-      </p:nvGrpSpPr>
-      <p:grpSpPr/>
-      <p:sp>
-        <p:nvSpPr>
-          <p:cNvPr id="2" name="TextBox 1"/>
-          <p:cNvSpPr txBox="1"/>
-          <p:nvPr/>
-        </p:nvSpPr>
-        <p:spPr>
-          <a:xfrm>
-            <a:off x="548640" y="347472"/>
-            <a:ext cx="11064240" cy="731520"/>
-          </a:xfrm>
-          <a:prstGeom prst="rect">
-            <a:avLst/>
-          </a:prstGeom>
-          <a:noFill/>
-        </p:spPr>
-        <p:txBody>
-          <a:bodyPr wrap="square" lIns="0" rIns="0" tIns="0" bIns="0" anchor="t">
-            <a:spAutoFit/>
-          </a:bodyPr>
-          <a:lstStyle/>
-          <a:p>
-            <a:pPr algn="l">
-              <a:spcAft>
-                <a:spcPts val="0"/>
-              </a:spcAft>
-            </a:pPr>
-            <a:r>
-              <a:rPr sz="3200" b="1" i="0">
-                <a:solidFill>
-                  <a:srgbClr val="0F1B2D"/>
-                </a:solidFill>
-                <a:latin typeface="Calibri"/>
-              </a:rPr>
-              <a:t>Arquitectura de ejecución</a:t>
-            </a:r>
-          </a:p>
-        </p:txBody>
-      </p:sp>
-      <p:sp>
-        <p:nvSpPr>
-          <p:cNvPr id="3" name="TextBox 2"/>
-          <p:cNvSpPr txBox="1"/>
-          <p:nvPr/>
-        </p:nvSpPr>
-        <p:spPr>
-          <a:xfrm>
-            <a:off x="548640" y="1024128"/>
-            <a:ext cx="11064240" cy="365760"/>
-          </a:xfrm>
-          <a:prstGeom prst="rect">
-            <a:avLst/>
-          </a:prstGeom>
-          <a:noFill/>
-        </p:spPr>
-        <p:txBody>
-          <a:bodyPr wrap="square" lIns="0" rIns="0" tIns="0" bIns="0" anchor="t">
-            <a:spAutoFit/>
-          </a:bodyPr>
-          <a:lstStyle/>
-          <a:p>
-            <a:pPr algn="l">
-              <a:spcAft>
-                <a:spcPts val="0"/>
-              </a:spcAft>
-            </a:pPr>
-            <a:r>
-              <a:rPr sz="1600" b="0" i="0">
-                <a:solidFill>
-                  <a:srgbClr val="5B6B7A"/>
-                </a:solidFill>
-                <a:latin typeface="Calibri"/>
-              </a:rPr>
-              <a:t>Cypress coordina el navegador con un proceso Node.js; no usa Selenium WebDriver</a:t>
-            </a:r>
-          </a:p>
-        </p:txBody>
-      </p:sp>
-      <p:sp>
-        <p:nvSpPr>
-          <p:cNvPr id="4" name="TextBox 3"/>
-          <p:cNvSpPr txBox="1"/>
-          <p:nvPr/>
-        </p:nvSpPr>
-        <p:spPr>
-          <a:xfrm>
-            <a:off x="11155680" y="6400800"/>
-            <a:ext cx="548640" cy="274320"/>
-          </a:xfrm>
-          <a:prstGeom prst="rect">
-            <a:avLst/>
-          </a:prstGeom>
-          <a:noFill/>
-        </p:spPr>
-        <p:txBody>
-          <a:bodyPr wrap="square" lIns="0" rIns="0" tIns="0" bIns="0" anchor="t">
-            <a:spAutoFit/>
-          </a:bodyPr>
-          <a:lstStyle/>
-          <a:p>
-            <a:pPr algn="r">
-              <a:spcAft>
-                <a:spcPts val="0"/>
-              </a:spcAft>
-            </a:pPr>
-            <a:r>
-              <a:rPr sz="1100" b="0" i="0">
-                <a:solidFill>
-                  <a:srgbClr val="5B6B7A"/>
-                </a:solidFill>
-                <a:latin typeface="Calibri"/>
-              </a:rPr>
-              <a:t>04</a:t>
-            </a:r>
-          </a:p>
-        </p:txBody>
-      </p:sp>
-      <p:sp>
-        <p:nvSpPr>
-          <p:cNvPr id="5" name="Rounded Rectangle 4"/>
-          <p:cNvSpPr/>
-          <p:nvPr/>
-        </p:nvSpPr>
-        <p:spPr>
-          <a:xfrm>
-            <a:off x="548640" y="1737360"/>
-            <a:ext cx="1965960" cy="1234440"/>
-          </a:xfrm>
-          <a:prstGeom prst="roundRect">
-            <a:avLst>
-              <a:gd name="adj" fmla="val 8000"/>
-            </a:avLst>
-          </a:prstGeom>
-          <a:solidFill>
-            <a:srgbClr val="FFFFFF"/>
-          </a:solidFill>
-          <a:ln w="19050">
-            <a:solidFill>
-              <a:srgbClr val="D5DEE8"/>
-            </a:solidFill>
-          </a:ln>
-        </p:spPr>
-        <p:style>
-          <a:lnRef idx="1">
-            <a:schemeClr val="accent1"/>
-          </a:lnRef>
-          <a:fillRef idx="3">
-            <a:schemeClr val="accent1"/>
-          </a:fillRef>
-          <a:effectRef idx="2">
-            <a:schemeClr val="accent1"/>
-          </a:effectRef>
-          <a:fontRef idx="minor">
-            <a:schemeClr val="lt1"/>
-          </a:fontRef>
-        </p:style>
-        <p:txBody>
-          <a:bodyPr rtlCol="0" anchor="ctr" wrap="square" lIns="109728" rIns="109728" tIns="54864" bIns="54864"/>
-          <a:lstStyle/>
-          <a:p>
-            <a:pPr algn="ctr"/>
-            <a:r>
-              <a:rPr sz="1600" b="1">
-                <a:solidFill>
-                  <a:srgbClr val="1B2733"/>
-                </a:solidFill>
-                <a:latin typeface="Calibri"/>
-              </a:rPr>
-              <a:t>Test TypeScript</a:t>
-            </a:r>
-          </a:p>
-          <a:p>
-            <a:pPr algn="ctr"/>
-            <a:r>
-              <a:rPr sz="1300" b="0">
-                <a:solidFill>
-                  <a:srgbClr val="5B6B7A"/>
-                </a:solidFill>
-                <a:latin typeface="Calibri"/>
-              </a:rPr>
-              <a:t>y Page Objects</a:t>
-            </a:r>
-          </a:p>
-        </p:txBody>
-      </p:sp>
-      <p:sp>
-        <p:nvSpPr>
-          <p:cNvPr id="6" name="Right Arrow 5"/>
-          <p:cNvSpPr/>
-          <p:nvPr/>
-        </p:nvSpPr>
-        <p:spPr>
-          <a:xfrm>
-            <a:off x="2542032" y="2194560"/>
-            <a:ext cx="256032" cy="274320"/>
-          </a:xfrm>
-          <a:prstGeom prst="rightArrow">
-            <a:avLst/>
-          </a:prstGeom>
-          <a:solidFill>
-            <a:srgbClr val="0F1B2D"/>
-          </a:solidFill>
-          <a:ln>
-            <a:noFill/>
-          </a:ln>
-        </p:spPr>
-        <p:style>
-          <a:lnRef idx="1">
-            <a:schemeClr val="accent1"/>
-          </a:lnRef>
-          <a:fillRef idx="3">
-            <a:schemeClr val="accent1"/>
-          </a:fillRef>
-          <a:effectRef idx="2">
-            <a:schemeClr val="accent1"/>
-          </a:effectRef>
-          <a:fontRef idx="minor">
-            <a:schemeClr val="lt1"/>
-          </a:fontRef>
-        </p:style>
-        <p:txBody>
-          <a:bodyPr rtlCol="0" anchor="ctr"/>
-          <a:lstStyle/>
-          <a:p>
-            <a:pPr algn="ctr"/>
-          </a:p>
-        </p:txBody>
-      </p:sp>
-      <p:sp>
-        <p:nvSpPr>
-          <p:cNvPr id="7" name="Rounded Rectangle 6"/>
-          <p:cNvSpPr/>
-          <p:nvPr/>
-        </p:nvSpPr>
-        <p:spPr>
-          <a:xfrm>
-            <a:off x="2825496" y="1737360"/>
-            <a:ext cx="1965960" cy="1234440"/>
-          </a:xfrm>
-          <a:prstGeom prst="roundRect">
-            <a:avLst>
-              <a:gd name="adj" fmla="val 8000"/>
-            </a:avLst>
-          </a:prstGeom>
-          <a:solidFill>
-            <a:srgbClr val="2BD18F"/>
-          </a:solidFill>
-          <a:ln>
-            <a:noFill/>
-          </a:ln>
-        </p:spPr>
-        <p:style>
-          <a:lnRef idx="1">
-            <a:schemeClr val="accent1"/>
-          </a:lnRef>
-          <a:fillRef idx="3">
-            <a:schemeClr val="accent1"/>
-          </a:fillRef>
-          <a:effectRef idx="2">
-            <a:schemeClr val="accent1"/>
-          </a:effectRef>
-          <a:fontRef idx="minor">
-            <a:schemeClr val="lt1"/>
-          </a:fontRef>
-        </p:style>
-        <p:txBody>
-          <a:bodyPr rtlCol="0" anchor="ctr" wrap="square" lIns="109728" rIns="109728" tIns="54864" bIns="54864"/>
-          <a:lstStyle/>
-          <a:p>
-            <a:pPr algn="ctr"/>
-            <a:r>
-              <a:rPr sz="1600" b="1">
-                <a:solidFill>
-                  <a:srgbClr val="1B2733"/>
-                </a:solidFill>
-                <a:latin typeface="Calibri"/>
-              </a:rPr>
-              <a:t>Cypress</a:t>
-            </a:r>
-          </a:p>
-          <a:p>
-            <a:pPr algn="ctr"/>
-            <a:r>
-              <a:rPr sz="1300" b="0">
-                <a:solidFill>
-                  <a:srgbClr val="0F1B2D"/>
-                </a:solidFill>
-                <a:latin typeface="Calibri"/>
-              </a:rPr>
-              <a:t>en el navegador</a:t>
-            </a:r>
-          </a:p>
-        </p:txBody>
-      </p:sp>
-      <p:sp>
-        <p:nvSpPr>
-          <p:cNvPr id="8" name="Right Arrow 7"/>
-          <p:cNvSpPr/>
-          <p:nvPr/>
-        </p:nvSpPr>
-        <p:spPr>
-          <a:xfrm>
-            <a:off x="4818888" y="2194560"/>
-            <a:ext cx="256032" cy="274320"/>
-          </a:xfrm>
-          <a:prstGeom prst="rightArrow">
-            <a:avLst/>
-          </a:prstGeom>
-          <a:solidFill>
-            <a:srgbClr val="0F1B2D"/>
-          </a:solidFill>
-          <a:ln>
-            <a:noFill/>
-          </a:ln>
-        </p:spPr>
-        <p:style>
-          <a:lnRef idx="1">
-            <a:schemeClr val="accent1"/>
-          </a:lnRef>
-          <a:fillRef idx="3">
-            <a:schemeClr val="accent1"/>
-          </a:fillRef>
-          <a:effectRef idx="2">
-            <a:schemeClr val="accent1"/>
-          </a:effectRef>
-          <a:fontRef idx="minor">
-            <a:schemeClr val="lt1"/>
-          </a:fontRef>
-        </p:style>
-        <p:txBody>
-          <a:bodyPr rtlCol="0" anchor="ctr"/>
-          <a:lstStyle/>
-          <a:p>
-            <a:pPr algn="ctr"/>
-          </a:p>
-        </p:txBody>
-      </p:sp>
-      <p:sp>
-        <p:nvSpPr>
-          <p:cNvPr id="9" name="Rounded Rectangle 8"/>
-          <p:cNvSpPr/>
-          <p:nvPr/>
-        </p:nvSpPr>
-        <p:spPr>
-          <a:xfrm>
-            <a:off x="5102352" y="1737360"/>
-            <a:ext cx="1965960" cy="1234440"/>
-          </a:xfrm>
-          <a:prstGeom prst="roundRect">
-            <a:avLst>
-              <a:gd name="adj" fmla="val 8000"/>
-            </a:avLst>
-          </a:prstGeom>
-          <a:solidFill>
-            <a:srgbClr val="FFFFFF"/>
-          </a:solidFill>
-          <a:ln w="19050">
-            <a:solidFill>
-              <a:srgbClr val="D5DEE8"/>
-            </a:solidFill>
-          </a:ln>
-        </p:spPr>
-        <p:style>
-          <a:lnRef idx="1">
-            <a:schemeClr val="accent1"/>
-          </a:lnRef>
-          <a:fillRef idx="3">
-            <a:schemeClr val="accent1"/>
-          </a:fillRef>
-          <a:effectRef idx="2">
-            <a:schemeClr val="accent1"/>
-          </a:effectRef>
-          <a:fontRef idx="minor">
-            <a:schemeClr val="lt1"/>
-          </a:fontRef>
-        </p:style>
-        <p:txBody>
-          <a:bodyPr rtlCol="0" anchor="ctr" wrap="square" lIns="109728" rIns="109728" tIns="54864" bIns="54864"/>
-          <a:lstStyle/>
-          <a:p>
-            <a:pPr algn="ctr"/>
-            <a:r>
-              <a:rPr sz="1600" b="1">
-                <a:solidFill>
-                  <a:srgbClr val="1B2733"/>
-                </a:solidFill>
-                <a:latin typeface="Calibri"/>
-              </a:rPr>
-              <a:t>UI real de Qolqe</a:t>
-            </a:r>
-          </a:p>
-          <a:p>
-            <a:pPr algn="ctr"/>
-            <a:r>
-              <a:rPr sz="1300" b="0">
-                <a:solidFill>
-                  <a:srgbClr val="5B6B7A"/>
-                </a:solidFill>
-                <a:latin typeface="Calibri"/>
-              </a:rPr>
-              <a:t>interfaz y DOM</a:t>
-            </a:r>
-          </a:p>
-        </p:txBody>
-      </p:sp>
-      <p:sp>
-        <p:nvSpPr>
-          <p:cNvPr id="10" name="Right Arrow 9"/>
-          <p:cNvSpPr/>
-          <p:nvPr/>
-        </p:nvSpPr>
-        <p:spPr>
-          <a:xfrm>
-            <a:off x="7095744" y="2194560"/>
-            <a:ext cx="256032" cy="274320"/>
-          </a:xfrm>
-          <a:prstGeom prst="rightArrow">
-            <a:avLst/>
-          </a:prstGeom>
-          <a:solidFill>
-            <a:srgbClr val="0F1B2D"/>
-          </a:solidFill>
-          <a:ln>
-            <a:noFill/>
-          </a:ln>
-        </p:spPr>
-        <p:style>
-          <a:lnRef idx="1">
-            <a:schemeClr val="accent1"/>
-          </a:lnRef>
-          <a:fillRef idx="3">
-            <a:schemeClr val="accent1"/>
-          </a:fillRef>
-          <a:effectRef idx="2">
-            <a:schemeClr val="accent1"/>
-          </a:effectRef>
-          <a:fontRef idx="minor">
-            <a:schemeClr val="lt1"/>
-          </a:fontRef>
-        </p:style>
-        <p:txBody>
-          <a:bodyPr rtlCol="0" anchor="ctr"/>
-          <a:lstStyle/>
-          <a:p>
-            <a:pPr algn="ctr"/>
-          </a:p>
-        </p:txBody>
-      </p:sp>
-      <p:sp>
-        <p:nvSpPr>
-          <p:cNvPr id="11" name="Rounded Rectangle 10"/>
-          <p:cNvSpPr/>
-          <p:nvPr/>
-        </p:nvSpPr>
-        <p:spPr>
-          <a:xfrm>
-            <a:off x="7379208" y="1737360"/>
-            <a:ext cx="1965960" cy="1234440"/>
-          </a:xfrm>
-          <a:prstGeom prst="roundRect">
-            <a:avLst>
-              <a:gd name="adj" fmla="val 8000"/>
-            </a:avLst>
-          </a:prstGeom>
-          <a:solidFill>
-            <a:srgbClr val="FFFFFF"/>
-          </a:solidFill>
-          <a:ln w="19050">
-            <a:solidFill>
-              <a:srgbClr val="D5DEE8"/>
-            </a:solidFill>
-          </a:ln>
-        </p:spPr>
-        <p:style>
-          <a:lnRef idx="1">
-            <a:schemeClr val="accent1"/>
-          </a:lnRef>
-          <a:fillRef idx="3">
-            <a:schemeClr val="accent1"/>
-          </a:fillRef>
-          <a:effectRef idx="2">
-            <a:schemeClr val="accent1"/>
-          </a:effectRef>
-          <a:fontRef idx="minor">
-            <a:schemeClr val="lt1"/>
-          </a:fontRef>
-        </p:style>
-        <p:txBody>
-          <a:bodyPr rtlCol="0" anchor="ctr" wrap="square" lIns="109728" rIns="109728" tIns="54864" bIns="54864"/>
-          <a:lstStyle/>
-          <a:p>
-            <a:pPr algn="ctr"/>
-            <a:r>
-              <a:rPr sz="1600" b="1">
-                <a:solidFill>
-                  <a:srgbClr val="1B2733"/>
-                </a:solidFill>
-                <a:latin typeface="Calibri"/>
-              </a:rPr>
-              <a:t>API FastAPI</a:t>
-            </a:r>
-          </a:p>
-          <a:p>
-            <a:pPr algn="ctr"/>
-            <a:r>
-              <a:rPr sz="1300" b="0">
-                <a:solidFill>
-                  <a:srgbClr val="5B6B7A"/>
-                </a:solidFill>
-                <a:latin typeface="Calibri"/>
-              </a:rPr>
-              <a:t>127.0.0.1:8011</a:t>
-            </a:r>
-          </a:p>
-        </p:txBody>
-      </p:sp>
-      <p:sp>
-        <p:nvSpPr>
-          <p:cNvPr id="12" name="Right Arrow 11"/>
-          <p:cNvSpPr/>
-          <p:nvPr/>
-        </p:nvSpPr>
-        <p:spPr>
-          <a:xfrm>
-            <a:off x="9372600" y="2194560"/>
-            <a:ext cx="256032" cy="274320"/>
-          </a:xfrm>
-          <a:prstGeom prst="rightArrow">
-            <a:avLst/>
-          </a:prstGeom>
-          <a:solidFill>
-            <a:srgbClr val="0F1B2D"/>
-          </a:solidFill>
-          <a:ln>
-            <a:noFill/>
-          </a:ln>
-        </p:spPr>
-        <p:style>
-          <a:lnRef idx="1">
-            <a:schemeClr val="accent1"/>
-          </a:lnRef>
-          <a:fillRef idx="3">
-            <a:schemeClr val="accent1"/>
-          </a:fillRef>
-          <a:effectRef idx="2">
-            <a:schemeClr val="accent1"/>
-          </a:effectRef>
-          <a:fontRef idx="minor">
-            <a:schemeClr val="lt1"/>
-          </a:fontRef>
-        </p:style>
-        <p:txBody>
-          <a:bodyPr rtlCol="0" anchor="ctr"/>
-          <a:lstStyle/>
-          <a:p>
-            <a:pPr algn="ctr"/>
-          </a:p>
-        </p:txBody>
-      </p:sp>
-      <p:sp>
-        <p:nvSpPr>
-          <p:cNvPr id="13" name="Rounded Rectangle 12"/>
-          <p:cNvSpPr/>
-          <p:nvPr/>
-        </p:nvSpPr>
-        <p:spPr>
-          <a:xfrm>
-            <a:off x="9656064" y="1737360"/>
-            <a:ext cx="1965960" cy="1234440"/>
-          </a:xfrm>
-          <a:prstGeom prst="roundRect">
-            <a:avLst>
-              <a:gd name="adj" fmla="val 8000"/>
-            </a:avLst>
-          </a:prstGeom>
-          <a:solidFill>
-            <a:srgbClr val="FFFFFF"/>
-          </a:solidFill>
-          <a:ln w="19050">
-            <a:solidFill>
-              <a:srgbClr val="D5DEE8"/>
-            </a:solidFill>
-          </a:ln>
-        </p:spPr>
-        <p:style>
-          <a:lnRef idx="1">
-            <a:schemeClr val="accent1"/>
-          </a:lnRef>
-          <a:fillRef idx="3">
-            <a:schemeClr val="accent1"/>
-          </a:fillRef>
-          <a:effectRef idx="2">
-            <a:schemeClr val="accent1"/>
-          </a:effectRef>
-          <a:fontRef idx="minor">
-            <a:schemeClr val="lt1"/>
-          </a:fontRef>
-        </p:style>
-        <p:txBody>
-          <a:bodyPr rtlCol="0" anchor="ctr" wrap="square" lIns="109728" rIns="109728" tIns="54864" bIns="54864"/>
-          <a:lstStyle/>
-          <a:p>
-            <a:pPr algn="ctr"/>
-            <a:r>
-              <a:rPr sz="1600" b="1">
-                <a:solidFill>
-                  <a:srgbClr val="1B2733"/>
-                </a:solidFill>
-                <a:latin typeface="Calibri"/>
-              </a:rPr>
-              <a:t>SQLite</a:t>
-            </a:r>
-          </a:p>
-          <a:p>
-            <a:pPr algn="ctr"/>
-            <a:r>
-              <a:rPr sz="1300" b="0">
-                <a:solidFill>
-                  <a:srgbClr val="5B6B7A"/>
-                </a:solidFill>
-                <a:latin typeface="Calibri"/>
-              </a:rPr>
-              <a:t>base exclusiva de Cypress</a:t>
-            </a:r>
-          </a:p>
-        </p:txBody>
-      </p:sp>
-      <p:sp>
-        <p:nvSpPr>
-          <p:cNvPr id="14" name="Rounded Rectangle 13"/>
-          <p:cNvSpPr/>
-          <p:nvPr/>
-        </p:nvSpPr>
-        <p:spPr>
-          <a:xfrm>
-            <a:off x="2505456" y="3749039"/>
-            <a:ext cx="2606040" cy="1005840"/>
-          </a:xfrm>
-          <a:prstGeom prst="roundRect">
-            <a:avLst>
-              <a:gd name="adj" fmla="val 8000"/>
-            </a:avLst>
-          </a:prstGeom>
-          <a:solidFill>
-            <a:srgbClr val="1B2B44"/>
-          </a:solidFill>
-          <a:ln>
-            <a:noFill/>
-          </a:ln>
-        </p:spPr>
-        <p:style>
-          <a:lnRef idx="1">
-            <a:schemeClr val="accent1"/>
-          </a:lnRef>
-          <a:fillRef idx="3">
-            <a:schemeClr val="accent1"/>
-          </a:fillRef>
-          <a:effectRef idx="2">
-            <a:schemeClr val="accent1"/>
-          </a:effectRef>
-          <a:fontRef idx="minor">
-            <a:schemeClr val="lt1"/>
-          </a:fontRef>
-        </p:style>
-        <p:txBody>
-          <a:bodyPr rtlCol="0" anchor="ctr" wrap="square" lIns="109728" rIns="109728" tIns="54864" bIns="54864"/>
-          <a:lstStyle/>
-          <a:p>
-            <a:pPr algn="ctr"/>
-            <a:r>
-              <a:rPr sz="1600" b="1">
-                <a:solidFill>
-                  <a:srgbClr val="FFFFFF"/>
-                </a:solidFill>
-                <a:latin typeface="Calibri"/>
-              </a:rPr>
-              <a:t>Proceso Node.js</a:t>
-            </a:r>
-          </a:p>
-          <a:p>
-            <a:pPr algn="ctr"/>
-            <a:r>
-              <a:rPr sz="1300" b="0">
-                <a:solidFill>
-                  <a:srgbClr val="C7D2E0"/>
-                </a:solidFill>
-                <a:latin typeface="Calibri"/>
-              </a:rPr>
-              <a:t>configuración, eventos, reportes y videos</a:t>
-            </a:r>
-          </a:p>
-        </p:txBody>
-      </p:sp>
-      <p:sp>
-        <p:nvSpPr>
-          <p:cNvPr id="15" name="Rounded Rectangle 14"/>
-          <p:cNvSpPr/>
-          <p:nvPr/>
-        </p:nvSpPr>
-        <p:spPr>
-          <a:xfrm>
-            <a:off x="7013448" y="3749039"/>
-            <a:ext cx="2834640" cy="1005840"/>
-          </a:xfrm>
-          <a:prstGeom prst="roundRect">
-            <a:avLst>
-              <a:gd name="adj" fmla="val 8000"/>
-            </a:avLst>
-          </a:prstGeom>
-          <a:solidFill>
-            <a:srgbClr val="FFFFFF"/>
-          </a:solidFill>
-          <a:ln w="19050">
-            <a:solidFill>
-              <a:srgbClr val="3B82F6"/>
-            </a:solidFill>
-            <a:prstDash val="dash"/>
-          </a:ln>
-        </p:spPr>
-        <p:style>
-          <a:lnRef idx="1">
-            <a:schemeClr val="accent1"/>
-          </a:lnRef>
-          <a:fillRef idx="3">
-            <a:schemeClr val="accent1"/>
-          </a:fillRef>
-          <a:effectRef idx="2">
-            <a:schemeClr val="accent1"/>
-          </a:effectRef>
-          <a:fontRef idx="minor">
-            <a:schemeClr val="lt1"/>
-          </a:fontRef>
-        </p:style>
-        <p:txBody>
-          <a:bodyPr rtlCol="0" anchor="ctr" wrap="square" lIns="109728" rIns="109728" tIns="54864" bIns="54864"/>
-          <a:lstStyle/>
-          <a:p>
-            <a:pPr algn="ctr"/>
-            <a:r>
-              <a:rPr sz="1600" b="1">
-                <a:solidFill>
-                  <a:srgbClr val="1B2733"/>
-                </a:solidFill>
-                <a:latin typeface="Calibri"/>
-              </a:rPr>
-              <a:t>Cypress Cloud</a:t>
-            </a:r>
-          </a:p>
-          <a:p>
-            <a:pPr algn="ctr"/>
-            <a:r>
-              <a:rPr sz="1300" b="0">
-                <a:solidFill>
-                  <a:srgbClr val="5B6B7A"/>
-                </a:solidFill>
-                <a:latin typeface="Calibri"/>
-              </a:rPr>
-              <a:t>cy.prompt, solo en la demo IA</a:t>
-            </a:r>
-          </a:p>
-        </p:txBody>
-      </p:sp>
-      <p:sp>
-        <p:nvSpPr>
-          <p:cNvPr id="16" name="Rounded Rectangle 15"/>
-          <p:cNvSpPr/>
-          <p:nvPr/>
-        </p:nvSpPr>
-        <p:spPr>
-          <a:xfrm>
-            <a:off x="548640" y="5166360"/>
-            <a:ext cx="11064240" cy="731520"/>
-          </a:xfrm>
-          <a:prstGeom prst="roundRect">
-            <a:avLst>
-              <a:gd name="adj" fmla="val 8000"/>
-            </a:avLst>
-          </a:prstGeom>
-          <a:solidFill>
-            <a:srgbClr val="FFFFFF"/>
-          </a:solidFill>
-          <a:ln w="19050">
-            <a:solidFill>
-              <a:srgbClr val="D5DEE8"/>
-            </a:solidFill>
-          </a:ln>
-        </p:spPr>
-        <p:style>
-          <a:lnRef idx="1">
-            <a:schemeClr val="accent1"/>
-          </a:lnRef>
-          <a:fillRef idx="3">
-            <a:schemeClr val="accent1"/>
-          </a:fillRef>
-          <a:effectRef idx="2">
-            <a:schemeClr val="accent1"/>
-          </a:effectRef>
-          <a:fontRef idx="minor">
-            <a:schemeClr val="lt1"/>
-          </a:fontRef>
-        </p:style>
-        <p:txBody>
-          <a:bodyPr rtlCol="0" anchor="ctr" wrap="square" lIns="109728" rIns="109728" tIns="54864" bIns="54864"/>
-          <a:lstStyle/>
-          <a:p>
-            <a:pPr algn="ctr"/>
-            <a:r>
-              <a:rPr sz="1500" b="0">
-                <a:solidFill>
-                  <a:srgbClr val="1B2733"/>
-                </a:solidFill>
-                <a:latin typeface="Calibri"/>
-              </a:rPr>
-              <a:t>Las consultas y aserciones reintentan hasta su límite de tiempo. Eso ayuda, pero no elimina todos los fallos intermitentes.</a:t>
-            </a:r>
-          </a:p>
-        </p:txBody>
-      </p:sp>
-    </p:spTree>
-  </p:cSld>
-  <p:clrMapOvr>
-    <a:masterClrMapping/>
-  </p:clrMapOvr>
-</p:sld>
-</file>
-
-<file path=ppt/slides/slide5.xml><?xml version="1.0" encoding="utf-8"?>
-<p:sld xmlns:a="http://schemas.openxmlformats.org/drawingml/2006/main" xmlns:p="http://schemas.openxmlformats.org/presentationml/2006/main" xmlns:r="http://schemas.openxmlformats.org/officeDocument/2006/relationships">
-  <p:cSld>
-    <p:bg>
-      <p:bgPr>
-        <a:solidFill>
-          <a:srgbClr val="F4F7FA"/>
-        </a:solidFill>
-        <a:effectLst/>
-      </p:bgPr>
-    </p:bg>
-    <p:spTree>
-      <p:nvGrpSpPr>
-        <p:cNvPr id="1" name=""/>
-        <p:cNvGrpSpPr/>
-        <p:nvPr/>
-      </p:nvGrpSpPr>
-      <p:grpSpPr/>
-      <p:sp>
-        <p:nvSpPr>
-          <p:cNvPr id="2" name="TextBox 1"/>
-          <p:cNvSpPr txBox="1"/>
-          <p:nvPr/>
-        </p:nvSpPr>
-        <p:spPr>
-          <a:xfrm>
-            <a:off x="548640" y="347472"/>
-            <a:ext cx="11064240" cy="731520"/>
-          </a:xfrm>
-          <a:prstGeom prst="rect">
-            <a:avLst/>
-          </a:prstGeom>
-          <a:noFill/>
-        </p:spPr>
-        <p:txBody>
-          <a:bodyPr wrap="square" lIns="0" rIns="0" tIns="0" bIns="0" anchor="t">
-            <a:spAutoFit/>
-          </a:bodyPr>
-          <a:lstStyle/>
-          <a:p>
-            <a:pPr algn="l">
-              <a:spcAft>
-                <a:spcPts val="0"/>
-              </a:spcAft>
-            </a:pPr>
-            <a:r>
-              <a:rPr sz="3200" b="1" i="0">
-                <a:solidFill>
-                  <a:srgbClr val="0F1B2D"/>
-                </a:solidFill>
-                <a:latin typeface="Calibri"/>
-              </a:rPr>
-              <a:t>Del criterio de aceptación a la prueba</a:t>
-            </a:r>
-          </a:p>
-        </p:txBody>
-      </p:sp>
-      <p:sp>
-        <p:nvSpPr>
-          <p:cNvPr id="3" name="TextBox 2"/>
-          <p:cNvSpPr txBox="1"/>
-          <p:nvPr/>
-        </p:nvSpPr>
-        <p:spPr>
-          <a:xfrm>
-            <a:off x="548640" y="1024128"/>
-            <a:ext cx="11064240" cy="365760"/>
-          </a:xfrm>
-          <a:prstGeom prst="rect">
-            <a:avLst/>
-          </a:prstGeom>
-          <a:noFill/>
-        </p:spPr>
-        <p:txBody>
-          <a:bodyPr wrap="square" lIns="0" rIns="0" tIns="0" bIns="0" anchor="t">
-            <a:spAutoFit/>
-          </a:bodyPr>
-          <a:lstStyle/>
-          <a:p>
-            <a:pPr algn="l">
-              <a:spcAft>
-                <a:spcPts val="0"/>
-              </a:spcAft>
-            </a:pPr>
-            <a:r>
-              <a:rPr sz="1600" b="0" i="0">
-                <a:solidFill>
-                  <a:srgbClr val="5B6B7A"/>
-                </a:solidFill>
-                <a:latin typeface="Calibri"/>
-              </a:rPr>
-              <a:t>HU-G4-01 · Agregar un contacto · CA1 · reglas R-G4-01/02/03</a:t>
-            </a:r>
-          </a:p>
-        </p:txBody>
-      </p:sp>
-      <p:sp>
-        <p:nvSpPr>
-          <p:cNvPr id="4" name="TextBox 3"/>
-          <p:cNvSpPr txBox="1"/>
-          <p:nvPr/>
-        </p:nvSpPr>
-        <p:spPr>
-          <a:xfrm>
-            <a:off x="11155680" y="6400800"/>
-            <a:ext cx="548640" cy="274320"/>
-          </a:xfrm>
-          <a:prstGeom prst="rect">
-            <a:avLst/>
-          </a:prstGeom>
-          <a:noFill/>
-        </p:spPr>
-        <p:txBody>
-          <a:bodyPr wrap="square" lIns="0" rIns="0" tIns="0" bIns="0" anchor="t">
-            <a:spAutoFit/>
-          </a:bodyPr>
-          <a:lstStyle/>
-          <a:p>
-            <a:pPr algn="r">
-              <a:spcAft>
-                <a:spcPts val="0"/>
-              </a:spcAft>
-            </a:pPr>
-            <a:r>
-              <a:rPr sz="1100" b="0" i="0">
-                <a:solidFill>
-                  <a:srgbClr val="5B6B7A"/>
-                </a:solidFill>
-                <a:latin typeface="Calibri"/>
-              </a:rPr>
-              <a:t>05</a:t>
             </a:r>
           </a:p>
         </p:txBody>
@@ -11330,6 +8226,1133 @@
 </p:sld>
 </file>
 
+<file path=ppt/slides/slide4.xml><?xml version="1.0" encoding="utf-8"?>
+<p:sld xmlns:a="http://schemas.openxmlformats.org/drawingml/2006/main" xmlns:p="http://schemas.openxmlformats.org/presentationml/2006/main" xmlns:r="http://schemas.openxmlformats.org/officeDocument/2006/relationships">
+  <p:cSld>
+    <p:bg>
+      <p:bgPr>
+        <a:solidFill>
+          <a:srgbClr val="F4F7FA"/>
+        </a:solidFill>
+        <a:effectLst/>
+      </p:bgPr>
+    </p:bg>
+    <p:spTree>
+      <p:nvGrpSpPr>
+        <p:cNvPr id="1" name=""/>
+        <p:cNvGrpSpPr/>
+        <p:nvPr/>
+      </p:nvGrpSpPr>
+      <p:grpSpPr/>
+      <p:sp>
+        <p:nvSpPr>
+          <p:cNvPr id="2" name="TextBox 1"/>
+          <p:cNvSpPr txBox="1"/>
+          <p:nvPr/>
+        </p:nvSpPr>
+        <p:spPr>
+          <a:xfrm>
+            <a:off x="548640" y="347472"/>
+            <a:ext cx="11064240" cy="731520"/>
+          </a:xfrm>
+          <a:prstGeom prst="rect">
+            <a:avLst/>
+          </a:prstGeom>
+          <a:noFill/>
+        </p:spPr>
+        <p:txBody>
+          <a:bodyPr wrap="square" lIns="0" rIns="0" tIns="0" bIns="0" anchor="t">
+            <a:spAutoFit/>
+          </a:bodyPr>
+          <a:lstStyle/>
+          <a:p>
+            <a:pPr algn="l">
+              <a:spcAft>
+                <a:spcPts val="0"/>
+              </a:spcAft>
+            </a:pPr>
+            <a:r>
+              <a:rPr sz="3200" b="1" i="0">
+                <a:solidFill>
+                  <a:srgbClr val="0F1B2D"/>
+                </a:solidFill>
+                <a:latin typeface="Calibri"/>
+              </a:rPr>
+              <a:t>Patrón Page Object y Custom Commands</a:t>
+            </a:r>
+          </a:p>
+        </p:txBody>
+      </p:sp>
+      <p:sp>
+        <p:nvSpPr>
+          <p:cNvPr id="3" name="TextBox 2"/>
+          <p:cNvSpPr txBox="1"/>
+          <p:nvPr/>
+        </p:nvSpPr>
+        <p:spPr>
+          <a:xfrm>
+            <a:off x="548640" y="1024128"/>
+            <a:ext cx="11064240" cy="365760"/>
+          </a:xfrm>
+          <a:prstGeom prst="rect">
+            <a:avLst/>
+          </a:prstGeom>
+          <a:noFill/>
+        </p:spPr>
+        <p:txBody>
+          <a:bodyPr wrap="square" lIns="0" rIns="0" tIns="0" bIns="0" anchor="t">
+            <a:spAutoFit/>
+          </a:bodyPr>
+          <a:lstStyle/>
+          <a:p>
+            <a:pPr algn="l">
+              <a:spcAft>
+                <a:spcPts val="0"/>
+              </a:spcAft>
+            </a:pPr>
+            <a:r>
+              <a:rPr sz="1600" b="0" i="0">
+                <a:solidFill>
+                  <a:srgbClr val="5B6B7A"/>
+                </a:solidFill>
+                <a:latin typeface="Calibri"/>
+              </a:rPr>
+              <a:t>Los selectores viven en un solo lugar; las aserciones, en el test</a:t>
+            </a:r>
+          </a:p>
+        </p:txBody>
+      </p:sp>
+      <p:sp>
+        <p:nvSpPr>
+          <p:cNvPr id="4" name="TextBox 3"/>
+          <p:cNvSpPr txBox="1"/>
+          <p:nvPr/>
+        </p:nvSpPr>
+        <p:spPr>
+          <a:xfrm>
+            <a:off x="11155680" y="6400800"/>
+            <a:ext cx="548640" cy="274320"/>
+          </a:xfrm>
+          <a:prstGeom prst="rect">
+            <a:avLst/>
+          </a:prstGeom>
+          <a:noFill/>
+        </p:spPr>
+        <p:txBody>
+          <a:bodyPr wrap="square" lIns="0" rIns="0" tIns="0" bIns="0" anchor="t">
+            <a:spAutoFit/>
+          </a:bodyPr>
+          <a:lstStyle/>
+          <a:p>
+            <a:pPr algn="r">
+              <a:spcAft>
+                <a:spcPts val="0"/>
+              </a:spcAft>
+            </a:pPr>
+            <a:r>
+              <a:rPr sz="1100" b="0" i="0">
+                <a:solidFill>
+                  <a:srgbClr val="5B6B7A"/>
+                </a:solidFill>
+                <a:latin typeface="Calibri"/>
+              </a:rPr>
+              <a:t>04</a:t>
+            </a:r>
+          </a:p>
+        </p:txBody>
+      </p:sp>
+      <p:pic>
+        <p:nvPicPr>
+          <p:cNvPr id="5" name="Picture 4" descr="tree.png"/>
+          <p:cNvPicPr>
+            <a:picLocks noChangeAspect="1"/>
+          </p:cNvPicPr>
+          <p:nvPr/>
+        </p:nvPicPr>
+        <p:blipFill>
+          <a:blip r:embed="rId3"/>
+          <a:stretch>
+            <a:fillRect/>
+          </a:stretch>
+        </p:blipFill>
+        <p:spPr>
+          <a:xfrm>
+            <a:off x="548640" y="1600200"/>
+            <a:ext cx="4480560" cy="2858825"/>
+          </a:xfrm>
+          <a:prstGeom prst="rect">
+            <a:avLst/>
+          </a:prstGeom>
+        </p:spPr>
+      </p:pic>
+      <p:pic>
+        <p:nvPicPr>
+          <p:cNvPr id="6" name="Picture 5" descr="pom.png"/>
+          <p:cNvPicPr>
+            <a:picLocks noChangeAspect="1"/>
+          </p:cNvPicPr>
+          <p:nvPr/>
+        </p:nvPicPr>
+        <p:blipFill>
+          <a:blip r:embed="rId4"/>
+          <a:stretch>
+            <a:fillRect/>
+          </a:stretch>
+        </p:blipFill>
+        <p:spPr>
+          <a:xfrm>
+            <a:off x="5303520" y="1600200"/>
+            <a:ext cx="6309360" cy="2407518"/>
+          </a:xfrm>
+          <a:prstGeom prst="rect">
+            <a:avLst/>
+          </a:prstGeom>
+        </p:spPr>
+      </p:pic>
+      <p:sp>
+        <p:nvSpPr>
+          <p:cNvPr id="7" name="Rounded Rectangle 6"/>
+          <p:cNvSpPr/>
+          <p:nvPr/>
+        </p:nvSpPr>
+        <p:spPr>
+          <a:xfrm>
+            <a:off x="548640" y="4937760"/>
+            <a:ext cx="3611880" cy="1188720"/>
+          </a:xfrm>
+          <a:prstGeom prst="roundRect">
+            <a:avLst>
+              <a:gd name="adj" fmla="val 8000"/>
+            </a:avLst>
+          </a:prstGeom>
+          <a:solidFill>
+            <a:srgbClr val="FFFFFF"/>
+          </a:solidFill>
+          <a:ln w="19050">
+            <a:solidFill>
+              <a:srgbClr val="D5DEE8"/>
+            </a:solidFill>
+          </a:ln>
+        </p:spPr>
+        <p:style>
+          <a:lnRef idx="1">
+            <a:schemeClr val="accent1"/>
+          </a:lnRef>
+          <a:fillRef idx="3">
+            <a:schemeClr val="accent1"/>
+          </a:fillRef>
+          <a:effectRef idx="2">
+            <a:schemeClr val="accent1"/>
+          </a:effectRef>
+          <a:fontRef idx="minor">
+            <a:schemeClr val="lt1"/>
+          </a:fontRef>
+        </p:style>
+        <p:txBody>
+          <a:bodyPr rtlCol="0" anchor="ctr" wrap="square" lIns="109728" rIns="109728" tIns="54864" bIns="54864"/>
+          <a:lstStyle/>
+          <a:p>
+            <a:pPr algn="l"/>
+            <a:r>
+              <a:rPr sz="1500" b="1">
+                <a:solidFill>
+                  <a:srgbClr val="1B2733"/>
+                </a:solidFill>
+                <a:latin typeface="Calibri"/>
+              </a:rPr>
+              <a:t>LoginPage y ContactosPage</a:t>
+            </a:r>
+          </a:p>
+          <a:p>
+            <a:pPr algn="l"/>
+            <a:r>
+              <a:rPr sz="1300" b="0">
+                <a:solidFill>
+                  <a:srgbClr val="5B6B7A"/>
+                </a:solidFill>
+                <a:latin typeface="Calibri"/>
+              </a:rPr>
+              <a:t>Selectores data-testid y acciones, sin estado compartido</a:t>
+            </a:r>
+          </a:p>
+        </p:txBody>
+      </p:sp>
+      <p:sp>
+        <p:nvSpPr>
+          <p:cNvPr id="8" name="Rounded Rectangle 7"/>
+          <p:cNvSpPr/>
+          <p:nvPr/>
+        </p:nvSpPr>
+        <p:spPr>
+          <a:xfrm>
+            <a:off x="4297679" y="4937760"/>
+            <a:ext cx="3611880" cy="1188720"/>
+          </a:xfrm>
+          <a:prstGeom prst="roundRect">
+            <a:avLst>
+              <a:gd name="adj" fmla="val 8000"/>
+            </a:avLst>
+          </a:prstGeom>
+          <a:solidFill>
+            <a:srgbClr val="FFFFFF"/>
+          </a:solidFill>
+          <a:ln w="19050">
+            <a:solidFill>
+              <a:srgbClr val="D5DEE8"/>
+            </a:solidFill>
+          </a:ln>
+        </p:spPr>
+        <p:style>
+          <a:lnRef idx="1">
+            <a:schemeClr val="accent1"/>
+          </a:lnRef>
+          <a:fillRef idx="3">
+            <a:schemeClr val="accent1"/>
+          </a:fillRef>
+          <a:effectRef idx="2">
+            <a:schemeClr val="accent1"/>
+          </a:effectRef>
+          <a:fontRef idx="minor">
+            <a:schemeClr val="lt1"/>
+          </a:fontRef>
+        </p:style>
+        <p:txBody>
+          <a:bodyPr rtlCol="0" anchor="ctr" wrap="square" lIns="109728" rIns="109728" tIns="54864" bIns="54864"/>
+          <a:lstStyle/>
+          <a:p>
+            <a:pPr algn="l"/>
+            <a:r>
+              <a:rPr sz="1500" b="1">
+                <a:solidFill>
+                  <a:srgbClr val="1B2733"/>
+                </a:solidFill>
+                <a:latin typeface="Calibri"/>
+              </a:rPr>
+              <a:t>Las aserciones en el test</a:t>
+            </a:r>
+          </a:p>
+          <a:p>
+            <a:pPr algn="l"/>
+            <a:r>
+              <a:rPr sz="1300" b="0">
+                <a:solidFill>
+                  <a:srgbClr val="5B6B7A"/>
+                </a:solidFill>
+                <a:latin typeface="Calibri"/>
+              </a:rPr>
+              <a:t>Códigos 201, 422 y 409 y la persistencia quedan visibles</a:t>
+            </a:r>
+          </a:p>
+        </p:txBody>
+      </p:sp>
+      <p:sp>
+        <p:nvSpPr>
+          <p:cNvPr id="9" name="Rounded Rectangle 8"/>
+          <p:cNvSpPr/>
+          <p:nvPr/>
+        </p:nvSpPr>
+        <p:spPr>
+          <a:xfrm>
+            <a:off x="8046719" y="4937760"/>
+            <a:ext cx="3611880" cy="1188720"/>
+          </a:xfrm>
+          <a:prstGeom prst="roundRect">
+            <a:avLst>
+              <a:gd name="adj" fmla="val 8000"/>
+            </a:avLst>
+          </a:prstGeom>
+          <a:solidFill>
+            <a:srgbClr val="FFFFFF"/>
+          </a:solidFill>
+          <a:ln w="19050">
+            <a:solidFill>
+              <a:srgbClr val="D5DEE8"/>
+            </a:solidFill>
+          </a:ln>
+        </p:spPr>
+        <p:style>
+          <a:lnRef idx="1">
+            <a:schemeClr val="accent1"/>
+          </a:lnRef>
+          <a:fillRef idx="3">
+            <a:schemeClr val="accent1"/>
+          </a:fillRef>
+          <a:effectRef idx="2">
+            <a:schemeClr val="accent1"/>
+          </a:effectRef>
+          <a:fontRef idx="minor">
+            <a:schemeClr val="lt1"/>
+          </a:fontRef>
+        </p:style>
+        <p:txBody>
+          <a:bodyPr rtlCol="0" anchor="ctr" wrap="square" lIns="109728" rIns="109728" tIns="54864" bIns="54864"/>
+          <a:lstStyle/>
+          <a:p>
+            <a:pPr algn="l"/>
+            <a:r>
+              <a:rPr sz="1500" b="1">
+                <a:solidFill>
+                  <a:srgbClr val="1B2733"/>
+                </a:solidFill>
+                <a:latin typeface="Calibri"/>
+              </a:rPr>
+              <a:t>cy.prepararContactos</a:t>
+            </a:r>
+          </a:p>
+          <a:p>
+            <a:pPr algn="l"/>
+            <a:r>
+              <a:rPr sz="1300" b="0">
+                <a:solidFill>
+                  <a:srgbClr val="5B6B7A"/>
+                </a:solidFill>
+                <a:latin typeface="Calibri"/>
+              </a:rPr>
+              <a:t>Crea dos usuarios ficticios por escenario con cy.request</a:t>
+            </a:r>
+          </a:p>
+        </p:txBody>
+      </p:sp>
+    </p:spTree>
+  </p:cSld>
+  <p:clrMapOvr>
+    <a:masterClrMapping/>
+  </p:clrMapOvr>
+</p:sld>
+</file>
+
+<file path=ppt/slides/slide5.xml><?xml version="1.0" encoding="utf-8"?>
+<p:sld xmlns:a="http://schemas.openxmlformats.org/drawingml/2006/main" xmlns:p="http://schemas.openxmlformats.org/presentationml/2006/main" xmlns:r="http://schemas.openxmlformats.org/officeDocument/2006/relationships">
+  <p:cSld>
+    <p:bg>
+      <p:bgPr>
+        <a:solidFill>
+          <a:srgbClr val="F4F7FA"/>
+        </a:solidFill>
+        <a:effectLst/>
+      </p:bgPr>
+    </p:bg>
+    <p:spTree>
+      <p:nvGrpSpPr>
+        <p:cNvPr id="1" name=""/>
+        <p:cNvGrpSpPr/>
+        <p:nvPr/>
+      </p:nvGrpSpPr>
+      <p:grpSpPr/>
+      <p:sp>
+        <p:nvSpPr>
+          <p:cNvPr id="2" name="TextBox 1"/>
+          <p:cNvSpPr txBox="1"/>
+          <p:nvPr/>
+        </p:nvSpPr>
+        <p:spPr>
+          <a:xfrm>
+            <a:off x="548640" y="347472"/>
+            <a:ext cx="11064240" cy="731520"/>
+          </a:xfrm>
+          <a:prstGeom prst="rect">
+            <a:avLst/>
+          </a:prstGeom>
+          <a:noFill/>
+        </p:spPr>
+        <p:txBody>
+          <a:bodyPr wrap="square" lIns="0" rIns="0" tIns="0" bIns="0" anchor="t">
+            <a:spAutoFit/>
+          </a:bodyPr>
+          <a:lstStyle/>
+          <a:p>
+            <a:pPr algn="l">
+              <a:spcAft>
+                <a:spcPts val="0"/>
+              </a:spcAft>
+            </a:pPr>
+            <a:r>
+              <a:rPr sz="3200" b="1" i="0">
+                <a:solidFill>
+                  <a:srgbClr val="0F1B2D"/>
+                </a:solidFill>
+                <a:latin typeface="Calibri"/>
+              </a:rPr>
+              <a:t>Demo del happy path</a:t>
+            </a:r>
+          </a:p>
+        </p:txBody>
+      </p:sp>
+      <p:sp>
+        <p:nvSpPr>
+          <p:cNvPr id="3" name="TextBox 2"/>
+          <p:cNvSpPr txBox="1"/>
+          <p:nvPr/>
+        </p:nvSpPr>
+        <p:spPr>
+          <a:xfrm>
+            <a:off x="548640" y="1024128"/>
+            <a:ext cx="11064240" cy="365760"/>
+          </a:xfrm>
+          <a:prstGeom prst="rect">
+            <a:avLst/>
+          </a:prstGeom>
+          <a:noFill/>
+        </p:spPr>
+        <p:txBody>
+          <a:bodyPr wrap="square" lIns="0" rIns="0" tIns="0" bIns="0" anchor="t">
+            <a:spAutoFit/>
+          </a:bodyPr>
+          <a:lstStyle/>
+          <a:p>
+            <a:pPr algn="l">
+              <a:spcAft>
+                <a:spcPts val="0"/>
+              </a:spcAft>
+            </a:pPr>
+            <a:r>
+              <a:rPr sz="1600" b="0" i="0">
+                <a:solidFill>
+                  <a:srgbClr val="5B6B7A"/>
+                </a:solidFill>
+                <a:latin typeface="Calibri"/>
+              </a:rPr>
+              <a:t>El contacto debe seguir allí después de recargar</a:t>
+            </a:r>
+          </a:p>
+        </p:txBody>
+      </p:sp>
+      <p:sp>
+        <p:nvSpPr>
+          <p:cNvPr id="4" name="TextBox 3"/>
+          <p:cNvSpPr txBox="1"/>
+          <p:nvPr/>
+        </p:nvSpPr>
+        <p:spPr>
+          <a:xfrm>
+            <a:off x="11155680" y="6400800"/>
+            <a:ext cx="548640" cy="274320"/>
+          </a:xfrm>
+          <a:prstGeom prst="rect">
+            <a:avLst/>
+          </a:prstGeom>
+          <a:noFill/>
+        </p:spPr>
+        <p:txBody>
+          <a:bodyPr wrap="square" lIns="0" rIns="0" tIns="0" bIns="0" anchor="t">
+            <a:spAutoFit/>
+          </a:bodyPr>
+          <a:lstStyle/>
+          <a:p>
+            <a:pPr algn="r">
+              <a:spcAft>
+                <a:spcPts val="0"/>
+              </a:spcAft>
+            </a:pPr>
+            <a:r>
+              <a:rPr sz="1100" b="0" i="0">
+                <a:solidFill>
+                  <a:srgbClr val="5B6B7A"/>
+                </a:solidFill>
+                <a:latin typeface="Calibri"/>
+              </a:rPr>
+              <a:t>05</a:t>
+            </a:r>
+          </a:p>
+        </p:txBody>
+      </p:sp>
+      <p:pic>
+        <p:nvPicPr>
+          <p:cNvPr id="5" name="Picture 4" descr="happy.png"/>
+          <p:cNvPicPr>
+            <a:picLocks noChangeAspect="1"/>
+          </p:cNvPicPr>
+          <p:nvPr/>
+        </p:nvPicPr>
+        <p:blipFill>
+          <a:blip r:embed="rId3"/>
+          <a:stretch>
+            <a:fillRect/>
+          </a:stretch>
+        </p:blipFill>
+        <p:spPr>
+          <a:xfrm>
+            <a:off x="548640" y="1600200"/>
+            <a:ext cx="6675120" cy="3360442"/>
+          </a:xfrm>
+          <a:prstGeom prst="rect">
+            <a:avLst/>
+          </a:prstGeom>
+        </p:spPr>
+      </p:pic>
+      <p:sp>
+        <p:nvSpPr>
+          <p:cNvPr id="6" name="Oval 5"/>
+          <p:cNvSpPr/>
+          <p:nvPr/>
+        </p:nvSpPr>
+        <p:spPr>
+          <a:xfrm>
+            <a:off x="7680960" y="1691640"/>
+            <a:ext cx="384048" cy="384048"/>
+          </a:xfrm>
+          <a:prstGeom prst="ellipse">
+            <a:avLst/>
+          </a:prstGeom>
+          <a:solidFill>
+            <a:srgbClr val="2BD18F"/>
+          </a:solidFill>
+          <a:ln>
+            <a:noFill/>
+          </a:ln>
+        </p:spPr>
+        <p:style>
+          <a:lnRef idx="1">
+            <a:schemeClr val="accent1"/>
+          </a:lnRef>
+          <a:fillRef idx="3">
+            <a:schemeClr val="accent1"/>
+          </a:fillRef>
+          <a:effectRef idx="2">
+            <a:schemeClr val="accent1"/>
+          </a:effectRef>
+          <a:fontRef idx="minor">
+            <a:schemeClr val="lt1"/>
+          </a:fontRef>
+        </p:style>
+        <p:txBody>
+          <a:bodyPr rtlCol="0" anchor="ctr" lIns="0" rIns="0" tIns="0" bIns="0"/>
+          <a:lstStyle/>
+          <a:p>
+            <a:pPr algn="ctr"/>
+            <a:r>
+              <a:rPr sz="1600" b="1">
+                <a:solidFill>
+                  <a:srgbClr val="0F1B2D"/>
+                </a:solidFill>
+                <a:latin typeface="Calibri"/>
+              </a:rPr>
+              <a:t>1</a:t>
+            </a:r>
+          </a:p>
+        </p:txBody>
+      </p:sp>
+      <p:sp>
+        <p:nvSpPr>
+          <p:cNvPr id="7" name="TextBox 6"/>
+          <p:cNvSpPr txBox="1"/>
+          <p:nvPr/>
+        </p:nvSpPr>
+        <p:spPr>
+          <a:xfrm>
+            <a:off x="8229600" y="1691640"/>
+            <a:ext cx="3474720" cy="731520"/>
+          </a:xfrm>
+          <a:prstGeom prst="rect">
+            <a:avLst/>
+          </a:prstGeom>
+          <a:noFill/>
+        </p:spPr>
+        <p:txBody>
+          <a:bodyPr wrap="square" lIns="0" rIns="0" tIns="0" bIns="0" anchor="ctr">
+            <a:spAutoFit/>
+          </a:bodyPr>
+          <a:lstStyle/>
+          <a:p>
+            <a:pPr algn="l">
+              <a:spcAft>
+                <a:spcPts val="0"/>
+              </a:spcAft>
+            </a:pPr>
+            <a:r>
+              <a:rPr sz="1500" b="0" i="0">
+                <a:solidFill>
+                  <a:srgbClr val="1B2733"/>
+                </a:solidFill>
+                <a:latin typeface="Calibri"/>
+              </a:rPr>
+              <a:t>Preparación por API e ingreso por la interfaz</a:t>
+            </a:r>
+          </a:p>
+        </p:txBody>
+      </p:sp>
+      <p:sp>
+        <p:nvSpPr>
+          <p:cNvPr id="8" name="Oval 7"/>
+          <p:cNvSpPr/>
+          <p:nvPr/>
+        </p:nvSpPr>
+        <p:spPr>
+          <a:xfrm>
+            <a:off x="7680960" y="2496312"/>
+            <a:ext cx="384048" cy="384048"/>
+          </a:xfrm>
+          <a:prstGeom prst="ellipse">
+            <a:avLst/>
+          </a:prstGeom>
+          <a:solidFill>
+            <a:srgbClr val="2BD18F"/>
+          </a:solidFill>
+          <a:ln>
+            <a:noFill/>
+          </a:ln>
+        </p:spPr>
+        <p:style>
+          <a:lnRef idx="1">
+            <a:schemeClr val="accent1"/>
+          </a:lnRef>
+          <a:fillRef idx="3">
+            <a:schemeClr val="accent1"/>
+          </a:fillRef>
+          <a:effectRef idx="2">
+            <a:schemeClr val="accent1"/>
+          </a:effectRef>
+          <a:fontRef idx="minor">
+            <a:schemeClr val="lt1"/>
+          </a:fontRef>
+        </p:style>
+        <p:txBody>
+          <a:bodyPr rtlCol="0" anchor="ctr" lIns="0" rIns="0" tIns="0" bIns="0"/>
+          <a:lstStyle/>
+          <a:p>
+            <a:pPr algn="ctr"/>
+            <a:r>
+              <a:rPr sz="1600" b="1">
+                <a:solidFill>
+                  <a:srgbClr val="0F1B2D"/>
+                </a:solidFill>
+                <a:latin typeface="Calibri"/>
+              </a:rPr>
+              <a:t>2</a:t>
+            </a:r>
+          </a:p>
+        </p:txBody>
+      </p:sp>
+      <p:sp>
+        <p:nvSpPr>
+          <p:cNvPr id="9" name="TextBox 8"/>
+          <p:cNvSpPr txBox="1"/>
+          <p:nvPr/>
+        </p:nvSpPr>
+        <p:spPr>
+          <a:xfrm>
+            <a:off x="8229600" y="2496312"/>
+            <a:ext cx="3474720" cy="731520"/>
+          </a:xfrm>
+          <a:prstGeom prst="rect">
+            <a:avLst/>
+          </a:prstGeom>
+          <a:noFill/>
+        </p:spPr>
+        <p:txBody>
+          <a:bodyPr wrap="square" lIns="0" rIns="0" tIns="0" bIns="0" anchor="ctr">
+            <a:spAutoFit/>
+          </a:bodyPr>
+          <a:lstStyle/>
+          <a:p>
+            <a:pPr algn="l">
+              <a:spcAft>
+                <a:spcPts val="0"/>
+              </a:spcAft>
+            </a:pPr>
+            <a:r>
+              <a:rPr sz="1500" b="0" i="0">
+                <a:solidFill>
+                  <a:srgbClr val="1B2733"/>
+                </a:solidFill>
+                <a:latin typeface="Calibri"/>
+              </a:rPr>
+              <a:t>Celular registrado y alias «Ana Cypress»</a:t>
+            </a:r>
+          </a:p>
+        </p:txBody>
+      </p:sp>
+      <p:sp>
+        <p:nvSpPr>
+          <p:cNvPr id="10" name="Oval 9"/>
+          <p:cNvSpPr/>
+          <p:nvPr/>
+        </p:nvSpPr>
+        <p:spPr>
+          <a:xfrm>
+            <a:off x="7680960" y="3300984"/>
+            <a:ext cx="384048" cy="384048"/>
+          </a:xfrm>
+          <a:prstGeom prst="ellipse">
+            <a:avLst/>
+          </a:prstGeom>
+          <a:solidFill>
+            <a:srgbClr val="2BD18F"/>
+          </a:solidFill>
+          <a:ln>
+            <a:noFill/>
+          </a:ln>
+        </p:spPr>
+        <p:style>
+          <a:lnRef idx="1">
+            <a:schemeClr val="accent1"/>
+          </a:lnRef>
+          <a:fillRef idx="3">
+            <a:schemeClr val="accent1"/>
+          </a:fillRef>
+          <a:effectRef idx="2">
+            <a:schemeClr val="accent1"/>
+          </a:effectRef>
+          <a:fontRef idx="minor">
+            <a:schemeClr val="lt1"/>
+          </a:fontRef>
+        </p:style>
+        <p:txBody>
+          <a:bodyPr rtlCol="0" anchor="ctr" lIns="0" rIns="0" tIns="0" bIns="0"/>
+          <a:lstStyle/>
+          <a:p>
+            <a:pPr algn="ctr"/>
+            <a:r>
+              <a:rPr sz="1600" b="1">
+                <a:solidFill>
+                  <a:srgbClr val="0F1B2D"/>
+                </a:solidFill>
+                <a:latin typeface="Calibri"/>
+              </a:rPr>
+              <a:t>3</a:t>
+            </a:r>
+          </a:p>
+        </p:txBody>
+      </p:sp>
+      <p:sp>
+        <p:nvSpPr>
+          <p:cNvPr id="11" name="TextBox 10"/>
+          <p:cNvSpPr txBox="1"/>
+          <p:nvPr/>
+        </p:nvSpPr>
+        <p:spPr>
+          <a:xfrm>
+            <a:off x="8229600" y="3300984"/>
+            <a:ext cx="3474720" cy="731520"/>
+          </a:xfrm>
+          <a:prstGeom prst="rect">
+            <a:avLst/>
+          </a:prstGeom>
+          <a:noFill/>
+        </p:spPr>
+        <p:txBody>
+          <a:bodyPr wrap="square" lIns="0" rIns="0" tIns="0" bIns="0" anchor="ctr">
+            <a:spAutoFit/>
+          </a:bodyPr>
+          <a:lstStyle/>
+          <a:p>
+            <a:pPr algn="l">
+              <a:spcAft>
+                <a:spcPts val="0"/>
+              </a:spcAft>
+            </a:pPr>
+            <a:r>
+              <a:rPr sz="1500" b="0" i="0">
+                <a:solidFill>
+                  <a:srgbClr val="1B2733"/>
+                </a:solidFill>
+                <a:latin typeface="Calibri"/>
+              </a:rPr>
+              <a:t>POST real: respuesta 201</a:t>
+            </a:r>
+          </a:p>
+        </p:txBody>
+      </p:sp>
+      <p:sp>
+        <p:nvSpPr>
+          <p:cNvPr id="12" name="Oval 11"/>
+          <p:cNvSpPr/>
+          <p:nvPr/>
+        </p:nvSpPr>
+        <p:spPr>
+          <a:xfrm>
+            <a:off x="7680960" y="4105656"/>
+            <a:ext cx="384048" cy="384048"/>
+          </a:xfrm>
+          <a:prstGeom prst="ellipse">
+            <a:avLst/>
+          </a:prstGeom>
+          <a:solidFill>
+            <a:srgbClr val="2BD18F"/>
+          </a:solidFill>
+          <a:ln>
+            <a:noFill/>
+          </a:ln>
+        </p:spPr>
+        <p:style>
+          <a:lnRef idx="1">
+            <a:schemeClr val="accent1"/>
+          </a:lnRef>
+          <a:fillRef idx="3">
+            <a:schemeClr val="accent1"/>
+          </a:fillRef>
+          <a:effectRef idx="2">
+            <a:schemeClr val="accent1"/>
+          </a:effectRef>
+          <a:fontRef idx="minor">
+            <a:schemeClr val="lt1"/>
+          </a:fontRef>
+        </p:style>
+        <p:txBody>
+          <a:bodyPr rtlCol="0" anchor="ctr" lIns="0" rIns="0" tIns="0" bIns="0"/>
+          <a:lstStyle/>
+          <a:p>
+            <a:pPr algn="ctr"/>
+            <a:r>
+              <a:rPr sz="1600" b="1">
+                <a:solidFill>
+                  <a:srgbClr val="0F1B2D"/>
+                </a:solidFill>
+                <a:latin typeface="Calibri"/>
+              </a:rPr>
+              <a:t>4</a:t>
+            </a:r>
+          </a:p>
+        </p:txBody>
+      </p:sp>
+      <p:sp>
+        <p:nvSpPr>
+          <p:cNvPr id="13" name="TextBox 12"/>
+          <p:cNvSpPr txBox="1"/>
+          <p:nvPr/>
+        </p:nvSpPr>
+        <p:spPr>
+          <a:xfrm>
+            <a:off x="8229600" y="4105656"/>
+            <a:ext cx="3474720" cy="731520"/>
+          </a:xfrm>
+          <a:prstGeom prst="rect">
+            <a:avLst/>
+          </a:prstGeom>
+          <a:noFill/>
+        </p:spPr>
+        <p:txBody>
+          <a:bodyPr wrap="square" lIns="0" rIns="0" tIns="0" bIns="0" anchor="ctr">
+            <a:spAutoFit/>
+          </a:bodyPr>
+          <a:lstStyle/>
+          <a:p>
+            <a:pPr algn="l">
+              <a:spcAft>
+                <a:spcPts val="0"/>
+              </a:spcAft>
+            </a:pPr>
+            <a:r>
+              <a:rPr sz="1500" b="0" i="0">
+                <a:solidFill>
+                  <a:srgbClr val="1B2733"/>
+                </a:solidFill>
+                <a:latin typeface="Calibri"/>
+              </a:rPr>
+              <a:t>Una fila con datos correctos y favorito desactivado</a:t>
+            </a:r>
+          </a:p>
+        </p:txBody>
+      </p:sp>
+      <p:sp>
+        <p:nvSpPr>
+          <p:cNvPr id="14" name="Oval 13"/>
+          <p:cNvSpPr/>
+          <p:nvPr/>
+        </p:nvSpPr>
+        <p:spPr>
+          <a:xfrm>
+            <a:off x="7680960" y="4910328"/>
+            <a:ext cx="384048" cy="384048"/>
+          </a:xfrm>
+          <a:prstGeom prst="ellipse">
+            <a:avLst/>
+          </a:prstGeom>
+          <a:solidFill>
+            <a:srgbClr val="2BD18F"/>
+          </a:solidFill>
+          <a:ln>
+            <a:noFill/>
+          </a:ln>
+        </p:spPr>
+        <p:style>
+          <a:lnRef idx="1">
+            <a:schemeClr val="accent1"/>
+          </a:lnRef>
+          <a:fillRef idx="3">
+            <a:schemeClr val="accent1"/>
+          </a:fillRef>
+          <a:effectRef idx="2">
+            <a:schemeClr val="accent1"/>
+          </a:effectRef>
+          <a:fontRef idx="minor">
+            <a:schemeClr val="lt1"/>
+          </a:fontRef>
+        </p:style>
+        <p:txBody>
+          <a:bodyPr rtlCol="0" anchor="ctr" lIns="0" rIns="0" tIns="0" bIns="0"/>
+          <a:lstStyle/>
+          <a:p>
+            <a:pPr algn="ctr"/>
+            <a:r>
+              <a:rPr sz="1600" b="1">
+                <a:solidFill>
+                  <a:srgbClr val="0F1B2D"/>
+                </a:solidFill>
+                <a:latin typeface="Calibri"/>
+              </a:rPr>
+              <a:t>5</a:t>
+            </a:r>
+          </a:p>
+        </p:txBody>
+      </p:sp>
+      <p:sp>
+        <p:nvSpPr>
+          <p:cNvPr id="15" name="TextBox 14"/>
+          <p:cNvSpPr txBox="1"/>
+          <p:nvPr/>
+        </p:nvSpPr>
+        <p:spPr>
+          <a:xfrm>
+            <a:off x="8229600" y="4910328"/>
+            <a:ext cx="3474720" cy="731520"/>
+          </a:xfrm>
+          <a:prstGeom prst="rect">
+            <a:avLst/>
+          </a:prstGeom>
+          <a:noFill/>
+        </p:spPr>
+        <p:txBody>
+          <a:bodyPr wrap="square" lIns="0" rIns="0" tIns="0" bIns="0" anchor="ctr">
+            <a:spAutoFit/>
+          </a:bodyPr>
+          <a:lstStyle/>
+          <a:p>
+            <a:pPr algn="l">
+              <a:spcAft>
+                <a:spcPts val="0"/>
+              </a:spcAft>
+            </a:pPr>
+            <a:r>
+              <a:rPr sz="1500" b="0" i="0">
+                <a:solidFill>
+                  <a:srgbClr val="1B2733"/>
+                </a:solidFill>
+                <a:latin typeface="Calibri"/>
+              </a:rPr>
+              <a:t>Recarga y comprobación de persistencia</a:t>
+            </a:r>
+          </a:p>
+        </p:txBody>
+      </p:sp>
+      <p:sp>
+        <p:nvSpPr>
+          <p:cNvPr id="16" name="Rounded Rectangle 15"/>
+          <p:cNvSpPr/>
+          <p:nvPr/>
+        </p:nvSpPr>
+        <p:spPr>
+          <a:xfrm>
+            <a:off x="548640" y="5074920"/>
+            <a:ext cx="6675120" cy="822960"/>
+          </a:xfrm>
+          <a:prstGeom prst="roundRect">
+            <a:avLst>
+              <a:gd name="adj" fmla="val 8000"/>
+            </a:avLst>
+          </a:prstGeom>
+          <a:solidFill>
+            <a:srgbClr val="FFFFFF"/>
+          </a:solidFill>
+          <a:ln w="19050">
+            <a:solidFill>
+              <a:srgbClr val="2BD18F"/>
+            </a:solidFill>
+          </a:ln>
+        </p:spPr>
+        <p:style>
+          <a:lnRef idx="1">
+            <a:schemeClr val="accent1"/>
+          </a:lnRef>
+          <a:fillRef idx="3">
+            <a:schemeClr val="accent1"/>
+          </a:fillRef>
+          <a:effectRef idx="2">
+            <a:schemeClr val="accent1"/>
+          </a:effectRef>
+          <a:fontRef idx="minor">
+            <a:schemeClr val="lt1"/>
+          </a:fontRef>
+        </p:style>
+        <p:txBody>
+          <a:bodyPr rtlCol="0" anchor="ctr" wrap="square" lIns="109728" rIns="109728" tIns="54864" bIns="54864"/>
+          <a:lstStyle/>
+          <a:p>
+            <a:pPr algn="ctr"/>
+            <a:r>
+              <a:rPr sz="1400" b="0">
+                <a:solidFill>
+                  <a:srgbClr val="1B2733"/>
+                </a:solidFill>
+                <a:latin typeface="Calibri"/>
+              </a:rPr>
+              <a:t>cy.intercept solo observa la petición: la prueba usa la API real, sin respuestas simuladas</a:t>
+            </a:r>
+          </a:p>
+        </p:txBody>
+      </p:sp>
+      <p:sp>
+        <p:nvSpPr>
+          <p:cNvPr id="17" name="Rounded Rectangle 16"/>
+          <p:cNvSpPr/>
+          <p:nvPr/>
+        </p:nvSpPr>
+        <p:spPr>
+          <a:xfrm>
+            <a:off x="7680960" y="5715000"/>
+            <a:ext cx="3931920" cy="457200"/>
+          </a:xfrm>
+          <a:prstGeom prst="roundRect">
+            <a:avLst>
+              <a:gd name="adj" fmla="val 8000"/>
+            </a:avLst>
+          </a:prstGeom>
+          <a:solidFill>
+            <a:srgbClr val="0F1B2D"/>
+          </a:solidFill>
+          <a:ln>
+            <a:noFill/>
+          </a:ln>
+        </p:spPr>
+        <p:style>
+          <a:lnRef idx="1">
+            <a:schemeClr val="accent1"/>
+          </a:lnRef>
+          <a:fillRef idx="3">
+            <a:schemeClr val="accent1"/>
+          </a:fillRef>
+          <a:effectRef idx="2">
+            <a:schemeClr val="accent1"/>
+          </a:effectRef>
+          <a:fontRef idx="minor">
+            <a:schemeClr val="lt1"/>
+          </a:fontRef>
+        </p:style>
+        <p:txBody>
+          <a:bodyPr rtlCol="0" anchor="ctr" wrap="square" lIns="109728" rIns="109728" tIns="54864" bIns="54864"/>
+          <a:lstStyle/>
+          <a:p>
+            <a:pPr algn="ctr"/>
+            <a:r>
+              <a:rPr sz="1400" b="1">
+                <a:solidFill>
+                  <a:srgbClr val="2BD18F"/>
+                </a:solidFill>
+                <a:latin typeface="Calibri"/>
+              </a:rPr>
+              <a:t>scripts/cypress.ps1 open</a:t>
+            </a:r>
+          </a:p>
+        </p:txBody>
+      </p:sp>
+    </p:spTree>
+  </p:cSld>
+  <p:clrMapOvr>
+    <a:masterClrMapping/>
+  </p:clrMapOvr>
+</p:sld>
+</file>
+
 <file path=ppt/slides/slide6.xml><?xml version="1.0" encoding="utf-8"?>
 <p:sld xmlns:a="http://schemas.openxmlformats.org/drawingml/2006/main" xmlns:p="http://schemas.openxmlformats.org/presentationml/2006/main" xmlns:r="http://schemas.openxmlformats.org/officeDocument/2006/relationships">
   <p:cSld>
@@ -11382,7 +9405,7 @@
                 </a:solidFill>
                 <a:latin typeface="Calibri"/>
               </a:rPr>
-              <a:t>Patrón Page Object y Custom Commands</a:t>
+              <a:t>IA aplicada con cy.prompt</a:t>
             </a:r>
           </a:p>
         </p:txBody>
@@ -11421,7 +9444,7 @@
                 </a:solidFill>
                 <a:latin typeface="Calibri"/>
               </a:rPr>
-              <a:t>Los selectores viven en un solo lugar; las aserciones, en el test</a:t>
+              <a:t>Instrucciones en lenguaje natural que generan comandos de Cypress</a:t>
             </a:r>
           </a:p>
         </p:txBody>
@@ -11467,7 +9490,7 @@
       </p:sp>
       <p:pic>
         <p:nvPicPr>
-          <p:cNvPr id="5" name="Picture 4" descr="tree.png"/>
+          <p:cNvPr id="5" name="Picture 4" descr="ia.png"/>
           <p:cNvPicPr>
             <a:picLocks noChangeAspect="1"/>
           </p:cNvPicPr>
@@ -11481,8 +9504,8 @@
         </p:blipFill>
         <p:spPr>
           <a:xfrm>
-            <a:off x="548640" y="1600200"/>
-            <a:ext cx="4480560" cy="2858825"/>
+            <a:off x="548640" y="1508760"/>
+            <a:ext cx="6858000" cy="3012928"/>
           </a:xfrm>
           <a:prstGeom prst="rect">
             <a:avLst/>
@@ -11491,7 +9514,7 @@
       </p:pic>
       <p:pic>
         <p:nvPicPr>
-          <p:cNvPr id="6" name="Picture 5" descr="pom.png"/>
+          <p:cNvPr id="6" name="Picture 5" descr="prompt.png"/>
           <p:cNvPicPr>
             <a:picLocks noChangeAspect="1"/>
           </p:cNvPicPr>
@@ -11505,8 +9528,8 @@
         </p:blipFill>
         <p:spPr>
           <a:xfrm>
-            <a:off x="5303520" y="1600200"/>
-            <a:ext cx="6309360" cy="2407518"/>
+            <a:off x="548640" y="4704568"/>
+            <a:ext cx="6858000" cy="1521584"/>
           </a:xfrm>
           <a:prstGeom prst="rect">
             <a:avLst/>
@@ -11515,27 +9538,23 @@
       </p:pic>
       <p:sp>
         <p:nvSpPr>
-          <p:cNvPr id="7" name="Rounded Rectangle 6"/>
+          <p:cNvPr id="7" name="Oval 6"/>
           <p:cNvSpPr/>
           <p:nvPr/>
         </p:nvSpPr>
         <p:spPr>
           <a:xfrm>
-            <a:off x="548640" y="4937760"/>
-            <a:ext cx="3611880" cy="1188720"/>
-          </a:xfrm>
-          <a:prstGeom prst="roundRect">
-            <a:avLst>
-              <a:gd name="adj" fmla="val 8000"/>
-            </a:avLst>
+            <a:off x="7772400" y="1636776"/>
+            <a:ext cx="128016" cy="128016"/>
+          </a:xfrm>
+          <a:prstGeom prst="ellipse">
+            <a:avLst/>
           </a:prstGeom>
           <a:solidFill>
-            <a:srgbClr val="FFFFFF"/>
+            <a:srgbClr val="2BD18F"/>
           </a:solidFill>
-          <a:ln w="19050">
-            <a:solidFill>
-              <a:srgbClr val="D5DEE8"/>
-            </a:solidFill>
+          <a:ln>
+            <a:noFill/>
           </a:ln>
         </p:spPr>
         <p:style>
@@ -11553,57 +9572,71 @@
           </a:fontRef>
         </p:style>
         <p:txBody>
-          <a:bodyPr rtlCol="0" anchor="ctr" wrap="square" lIns="109728" rIns="109728" tIns="54864" bIns="54864"/>
-          <a:lstStyle/>
-          <a:p>
-            <a:pPr algn="l"/>
-            <a:r>
-              <a:rPr sz="1500" b="1">
+          <a:bodyPr rtlCol="0" anchor="ctr"/>
+          <a:lstStyle/>
+          <a:p>
+            <a:pPr algn="ctr"/>
+          </a:p>
+        </p:txBody>
+      </p:sp>
+      <p:sp>
+        <p:nvSpPr>
+          <p:cNvPr id="8" name="TextBox 7"/>
+          <p:cNvSpPr txBox="1"/>
+          <p:nvPr/>
+        </p:nvSpPr>
+        <p:spPr>
+          <a:xfrm>
+            <a:off x="8046720" y="1554480"/>
+            <a:ext cx="3657600" cy="777240"/>
+          </a:xfrm>
+          <a:prstGeom prst="rect">
+            <a:avLst/>
+          </a:prstGeom>
+          <a:noFill/>
+        </p:spPr>
+        <p:txBody>
+          <a:bodyPr wrap="square" lIns="0" rIns="0" tIns="0" bIns="0" anchor="t">
+            <a:spAutoFit/>
+          </a:bodyPr>
+          <a:lstStyle/>
+          <a:p>
+            <a:pPr algn="l">
+              <a:spcAft>
+                <a:spcPts val="0"/>
+              </a:spcAft>
+            </a:pPr>
+            <a:r>
+              <a:rPr sz="1500" b="0" i="0">
                 <a:solidFill>
                   <a:srgbClr val="1B2733"/>
                 </a:solidFill>
                 <a:latin typeface="Calibri"/>
               </a:rPr>
-              <a:t>LoginPage y ContactosPage</a:t>
-            </a:r>
-          </a:p>
-          <a:p>
-            <a:pPr algn="l"/>
-            <a:r>
-              <a:rPr sz="1300" b="0">
-                <a:solidFill>
-                  <a:srgbClr val="5B6B7A"/>
-                </a:solidFill>
-                <a:latin typeface="Calibri"/>
-              </a:rPr>
-              <a:t>Selectores data-testid y acciones, sin estado compartido</a:t>
-            </a:r>
-          </a:p>
-        </p:txBody>
-      </p:sp>
-      <p:sp>
-        <p:nvSpPr>
-          <p:cNvPr id="8" name="Rounded Rectangle 7"/>
+              <a:t>La IA completa Celular y Alias y pulsa Agregar</a:t>
+            </a:r>
+          </a:p>
+        </p:txBody>
+      </p:sp>
+      <p:sp>
+        <p:nvSpPr>
+          <p:cNvPr id="9" name="Oval 8"/>
           <p:cNvSpPr/>
           <p:nvPr/>
         </p:nvSpPr>
         <p:spPr>
           <a:xfrm>
-            <a:off x="4297679" y="4937760"/>
-            <a:ext cx="3611880" cy="1188720"/>
-          </a:xfrm>
-          <a:prstGeom prst="roundRect">
-            <a:avLst>
-              <a:gd name="adj" fmla="val 8000"/>
-            </a:avLst>
+            <a:off x="7772400" y="2414015"/>
+            <a:ext cx="128016" cy="128016"/>
+          </a:xfrm>
+          <a:prstGeom prst="ellipse">
+            <a:avLst/>
           </a:prstGeom>
           <a:solidFill>
-            <a:srgbClr val="FFFFFF"/>
+            <a:srgbClr val="2BD18F"/>
           </a:solidFill>
-          <a:ln w="19050">
-            <a:solidFill>
-              <a:srgbClr val="D5DEE8"/>
-            </a:solidFill>
+          <a:ln>
+            <a:noFill/>
           </a:ln>
         </p:spPr>
         <p:style>
@@ -11621,57 +9654,71 @@
           </a:fontRef>
         </p:style>
         <p:txBody>
-          <a:bodyPr rtlCol="0" anchor="ctr" wrap="square" lIns="109728" rIns="109728" tIns="54864" bIns="54864"/>
-          <a:lstStyle/>
-          <a:p>
-            <a:pPr algn="l"/>
-            <a:r>
-              <a:rPr sz="1500" b="1">
+          <a:bodyPr rtlCol="0" anchor="ctr"/>
+          <a:lstStyle/>
+          <a:p>
+            <a:pPr algn="ctr"/>
+          </a:p>
+        </p:txBody>
+      </p:sp>
+      <p:sp>
+        <p:nvSpPr>
+          <p:cNvPr id="10" name="TextBox 9"/>
+          <p:cNvSpPr txBox="1"/>
+          <p:nvPr/>
+        </p:nvSpPr>
+        <p:spPr>
+          <a:xfrm>
+            <a:off x="8046720" y="2331720"/>
+            <a:ext cx="3657600" cy="777240"/>
+          </a:xfrm>
+          <a:prstGeom prst="rect">
+            <a:avLst/>
+          </a:prstGeom>
+          <a:noFill/>
+        </p:spPr>
+        <p:txBody>
+          <a:bodyPr wrap="square" lIns="0" rIns="0" tIns="0" bIns="0" anchor="t">
+            <a:spAutoFit/>
+          </a:bodyPr>
+          <a:lstStyle/>
+          <a:p>
+            <a:pPr algn="l">
+              <a:spcAft>
+                <a:spcPts val="0"/>
+              </a:spcAft>
+            </a:pPr>
+            <a:r>
+              <a:rPr sz="1500" b="0" i="0">
                 <a:solidFill>
                   <a:srgbClr val="1B2733"/>
                 </a:solidFill>
                 <a:latin typeface="Calibri"/>
               </a:rPr>
-              <a:t>Las aserciones en el test</a:t>
-            </a:r>
-          </a:p>
-          <a:p>
-            <a:pPr algn="l"/>
-            <a:r>
-              <a:rPr sz="1300" b="0">
-                <a:solidFill>
-                  <a:srgbClr val="5B6B7A"/>
-                </a:solidFill>
-                <a:latin typeface="Calibri"/>
-              </a:rPr>
-              <a:t>Códigos 201, 422 y 409 y la persistencia quedan visibles</a:t>
-            </a:r>
-          </a:p>
-        </p:txBody>
-      </p:sp>
-      <p:sp>
-        <p:nvSpPr>
-          <p:cNvPr id="9" name="Rounded Rectangle 8"/>
+              <a:t>La opción Code muestra los comandos generados</a:t>
+            </a:r>
+          </a:p>
+        </p:txBody>
+      </p:sp>
+      <p:sp>
+        <p:nvSpPr>
+          <p:cNvPr id="11" name="Oval 10"/>
           <p:cNvSpPr/>
           <p:nvPr/>
         </p:nvSpPr>
         <p:spPr>
           <a:xfrm>
-            <a:off x="8046719" y="4937760"/>
-            <a:ext cx="3611880" cy="1188720"/>
-          </a:xfrm>
-          <a:prstGeom prst="roundRect">
-            <a:avLst>
-              <a:gd name="adj" fmla="val 8000"/>
-            </a:avLst>
+            <a:off x="7772400" y="3191256"/>
+            <a:ext cx="128016" cy="128016"/>
+          </a:xfrm>
+          <a:prstGeom prst="ellipse">
+            <a:avLst/>
           </a:prstGeom>
           <a:solidFill>
-            <a:srgbClr val="FFFFFF"/>
+            <a:srgbClr val="2BD18F"/>
           </a:solidFill>
-          <a:ln w="19050">
-            <a:solidFill>
-              <a:srgbClr val="D5DEE8"/>
-            </a:solidFill>
+          <a:ln>
+            <a:noFill/>
           </a:ln>
         </p:spPr>
         <p:style>
@@ -11689,30 +9736,237 @@
           </a:fontRef>
         </p:style>
         <p:txBody>
+          <a:bodyPr rtlCol="0" anchor="ctr"/>
+          <a:lstStyle/>
+          <a:p>
+            <a:pPr algn="ctr"/>
+          </a:p>
+        </p:txBody>
+      </p:sp>
+      <p:sp>
+        <p:nvSpPr>
+          <p:cNvPr id="12" name="TextBox 11"/>
+          <p:cNvSpPr txBox="1"/>
+          <p:nvPr/>
+        </p:nvSpPr>
+        <p:spPr>
+          <a:xfrm>
+            <a:off x="8046720" y="3108960"/>
+            <a:ext cx="3657600" cy="777240"/>
+          </a:xfrm>
+          <a:prstGeom prst="rect">
+            <a:avLst/>
+          </a:prstGeom>
+          <a:noFill/>
+        </p:spPr>
+        <p:txBody>
+          <a:bodyPr wrap="square" lIns="0" rIns="0" tIns="0" bIns="0" anchor="t">
+            <a:spAutoFit/>
+          </a:bodyPr>
+          <a:lstStyle/>
+          <a:p>
+            <a:pPr algn="l">
+              <a:spcAft>
+                <a:spcPts val="0"/>
+              </a:spcAft>
+            </a:pPr>
+            <a:r>
+              <a:rPr sz="1500" b="0" i="0">
+                <a:solidFill>
+                  <a:srgbClr val="1B2733"/>
+                </a:solidFill>
+                <a:latin typeface="Calibri"/>
+              </a:rPr>
+              <a:t>Aserciones explícitas: 201 y persistencia</a:t>
+            </a:r>
+          </a:p>
+        </p:txBody>
+      </p:sp>
+      <p:sp>
+        <p:nvSpPr>
+          <p:cNvPr id="13" name="Oval 12"/>
+          <p:cNvSpPr/>
+          <p:nvPr/>
+        </p:nvSpPr>
+        <p:spPr>
+          <a:xfrm>
+            <a:off x="7772400" y="3968496"/>
+            <a:ext cx="128016" cy="128016"/>
+          </a:xfrm>
+          <a:prstGeom prst="ellipse">
+            <a:avLst/>
+          </a:prstGeom>
+          <a:solidFill>
+            <a:srgbClr val="2BD18F"/>
+          </a:solidFill>
+          <a:ln>
+            <a:noFill/>
+          </a:ln>
+        </p:spPr>
+        <p:style>
+          <a:lnRef idx="1">
+            <a:schemeClr val="accent1"/>
+          </a:lnRef>
+          <a:fillRef idx="3">
+            <a:schemeClr val="accent1"/>
+          </a:fillRef>
+          <a:effectRef idx="2">
+            <a:schemeClr val="accent1"/>
+          </a:effectRef>
+          <a:fontRef idx="minor">
+            <a:schemeClr val="lt1"/>
+          </a:fontRef>
+        </p:style>
+        <p:txBody>
+          <a:bodyPr rtlCol="0" anchor="ctr"/>
+          <a:lstStyle/>
+          <a:p>
+            <a:pPr algn="ctr"/>
+          </a:p>
+        </p:txBody>
+      </p:sp>
+      <p:sp>
+        <p:nvSpPr>
+          <p:cNvPr id="14" name="TextBox 13"/>
+          <p:cNvSpPr txBox="1"/>
+          <p:nvPr/>
+        </p:nvSpPr>
+        <p:spPr>
+          <a:xfrm>
+            <a:off x="8046720" y="3886200"/>
+            <a:ext cx="3657600" cy="777240"/>
+          </a:xfrm>
+          <a:prstGeom prst="rect">
+            <a:avLst/>
+          </a:prstGeom>
+          <a:noFill/>
+        </p:spPr>
+        <p:txBody>
+          <a:bodyPr wrap="square" lIns="0" rIns="0" tIns="0" bIns="0" anchor="t">
+            <a:spAutoFit/>
+          </a:bodyPr>
+          <a:lstStyle/>
+          <a:p>
+            <a:pPr algn="l">
+              <a:spcAft>
+                <a:spcPts val="0"/>
+              </a:spcAft>
+            </a:pPr>
+            <a:r>
+              <a:rPr sz="1500" b="0" i="0">
+                <a:solidFill>
+                  <a:srgbClr val="1B2733"/>
+                </a:solidFill>
+                <a:latin typeface="Calibri"/>
+              </a:rPr>
+              <a:t>Requiere cuenta Cloud, conexión y cuota</a:t>
+            </a:r>
+          </a:p>
+        </p:txBody>
+      </p:sp>
+      <p:sp>
+        <p:nvSpPr>
+          <p:cNvPr id="15" name="Rounded Rectangle 14"/>
+          <p:cNvSpPr/>
+          <p:nvPr/>
+        </p:nvSpPr>
+        <p:spPr>
+          <a:xfrm>
+            <a:off x="7772400" y="4846320"/>
+            <a:ext cx="3840480" cy="1097280"/>
+          </a:xfrm>
+          <a:prstGeom prst="roundRect">
+            <a:avLst>
+              <a:gd name="adj" fmla="val 8000"/>
+            </a:avLst>
+          </a:prstGeom>
+          <a:solidFill>
+            <a:srgbClr val="E7F8F0"/>
+          </a:solidFill>
+          <a:ln w="19050">
+            <a:solidFill>
+              <a:srgbClr val="2BD18F"/>
+            </a:solidFill>
+          </a:ln>
+        </p:spPr>
+        <p:style>
+          <a:lnRef idx="1">
+            <a:schemeClr val="accent1"/>
+          </a:lnRef>
+          <a:fillRef idx="3">
+            <a:schemeClr val="accent1"/>
+          </a:fillRef>
+          <a:effectRef idx="2">
+            <a:schemeClr val="accent1"/>
+          </a:effectRef>
+          <a:fontRef idx="minor">
+            <a:schemeClr val="lt1"/>
+          </a:fontRef>
+        </p:style>
+        <p:txBody>
           <a:bodyPr rtlCol="0" anchor="ctr" wrap="square" lIns="109728" rIns="109728" tIns="54864" bIns="54864"/>
           <a:lstStyle/>
           <a:p>
             <a:pPr algn="l"/>
             <a:r>
-              <a:rPr sz="1500" b="1">
+              <a:rPr sz="1400" b="1">
+                <a:solidFill>
+                  <a:srgbClr val="0B7A55"/>
+                </a:solidFill>
+                <a:latin typeface="Calibri"/>
+              </a:rPr>
+              <a:t>Aprobada en ejecución interactiva</a:t>
+            </a:r>
+          </a:p>
+          <a:p>
+            <a:pPr algn="l"/>
+            <a:r>
+              <a:rPr sz="1300" b="0">
                 <a:solidFill>
                   <a:srgbClr val="1B2733"/>
                 </a:solidFill>
                 <a:latin typeface="Calibri"/>
               </a:rPr>
-              <a:t>cy.prepararContactos</a:t>
-            </a:r>
-          </a:p>
-          <a:p>
-            <a:pPr algn="l"/>
-            <a:r>
-              <a:rPr sz="1300" b="0">
+              <a:t>24/10. Demostramos generación y ejecución; el self-healing no lo probamos</a:t>
+            </a:r>
+          </a:p>
+        </p:txBody>
+      </p:sp>
+      <p:sp>
+        <p:nvSpPr>
+          <p:cNvPr id="16" name="TextBox 15"/>
+          <p:cNvSpPr txBox="1"/>
+          <p:nvPr/>
+        </p:nvSpPr>
+        <p:spPr>
+          <a:xfrm>
+            <a:off x="548640" y="6355080"/>
+            <a:ext cx="6858000" cy="274320"/>
+          </a:xfrm>
+          <a:prstGeom prst="rect">
+            <a:avLst/>
+          </a:prstGeom>
+          <a:noFill/>
+        </p:spPr>
+        <p:txBody>
+          <a:bodyPr wrap="square" lIns="0" rIns="0" tIns="0" bIns="0" anchor="t">
+            <a:spAutoFit/>
+          </a:bodyPr>
+          <a:lstStyle/>
+          <a:p>
+            <a:pPr algn="l">
+              <a:spcAft>
+                <a:spcPts val="0"/>
+              </a:spcAft>
+            </a:pPr>
+            <a:r>
+              <a:rPr sz="1100" b="0" i="0">
                 <a:solidFill>
                   <a:srgbClr val="5B6B7A"/>
                 </a:solidFill>
                 <a:latin typeface="Calibri"/>
               </a:rPr>
-              <a:t>Crea dos usuarios ficticios por escenario con cy.request</a:t>
+              <a:t>Captura real de la ejecución local (evidencias/cypress-ia-aprobada.png)</a:t>
             </a:r>
           </a:p>
         </p:txBody>
@@ -11777,7 +10031,7 @@
                 </a:solidFill>
                 <a:latin typeface="Calibri"/>
               </a:rPr>
-              <a:t>Demo del happy path</a:t>
+              <a:t>Reportes y evidencia</a:t>
             </a:r>
           </a:p>
         </p:txBody>
@@ -11816,7 +10070,7 @@
                 </a:solidFill>
                 <a:latin typeface="Calibri"/>
               </a:rPr>
-              <a:t>El contacto debe seguir allí después de recargar</a:t>
+              <a:t>Guardamos lo que ayuda a explicar un fallo y descartamos el resto</a:t>
             </a:r>
           </a:p>
         </p:txBody>
@@ -11860,9 +10114,360 @@
           </a:p>
         </p:txBody>
       </p:sp>
+      <p:sp>
+        <p:nvSpPr>
+          <p:cNvPr id="5" name="Rounded Rectangle 4"/>
+          <p:cNvSpPr/>
+          <p:nvPr/>
+        </p:nvSpPr>
+        <p:spPr>
+          <a:xfrm>
+            <a:off x="548640" y="1645920"/>
+            <a:ext cx="2011680" cy="914400"/>
+          </a:xfrm>
+          <a:prstGeom prst="roundRect">
+            <a:avLst>
+              <a:gd name="adj" fmla="val 8000"/>
+            </a:avLst>
+          </a:prstGeom>
+          <a:solidFill>
+            <a:srgbClr val="0F1B2D"/>
+          </a:solidFill>
+          <a:ln>
+            <a:noFill/>
+          </a:ln>
+        </p:spPr>
+        <p:style>
+          <a:lnRef idx="1">
+            <a:schemeClr val="accent1"/>
+          </a:lnRef>
+          <a:fillRef idx="3">
+            <a:schemeClr val="accent1"/>
+          </a:fillRef>
+          <a:effectRef idx="2">
+            <a:schemeClr val="accent1"/>
+          </a:effectRef>
+          <a:fontRef idx="minor">
+            <a:schemeClr val="lt1"/>
+          </a:fontRef>
+        </p:style>
+        <p:txBody>
+          <a:bodyPr rtlCol="0" anchor="ctr" wrap="square" lIns="109728" rIns="109728" tIns="54864" bIns="54864"/>
+          <a:lstStyle/>
+          <a:p>
+            <a:pPr algn="ctr"/>
+            <a:r>
+              <a:rPr sz="1800" b="1">
+                <a:solidFill>
+                  <a:srgbClr val="FFFFFF"/>
+                </a:solidFill>
+                <a:latin typeface="Calibri"/>
+              </a:rPr>
+              <a:t>cypress run</a:t>
+            </a:r>
+          </a:p>
+        </p:txBody>
+      </p:sp>
+      <p:sp>
+        <p:nvSpPr>
+          <p:cNvPr id="6" name="Right Arrow 5"/>
+          <p:cNvSpPr/>
+          <p:nvPr/>
+        </p:nvSpPr>
+        <p:spPr>
+          <a:xfrm>
+            <a:off x="2651760" y="1965960"/>
+            <a:ext cx="274320" cy="274320"/>
+          </a:xfrm>
+          <a:prstGeom prst="rightArrow">
+            <a:avLst/>
+          </a:prstGeom>
+          <a:solidFill>
+            <a:srgbClr val="0F1B2D"/>
+          </a:solidFill>
+          <a:ln>
+            <a:noFill/>
+          </a:ln>
+        </p:spPr>
+        <p:style>
+          <a:lnRef idx="1">
+            <a:schemeClr val="accent1"/>
+          </a:lnRef>
+          <a:fillRef idx="3">
+            <a:schemeClr val="accent1"/>
+          </a:fillRef>
+          <a:effectRef idx="2">
+            <a:schemeClr val="accent1"/>
+          </a:effectRef>
+          <a:fontRef idx="minor">
+            <a:schemeClr val="lt1"/>
+          </a:fontRef>
+        </p:style>
+        <p:txBody>
+          <a:bodyPr rtlCol="0" anchor="ctr"/>
+          <a:lstStyle/>
+          <a:p>
+            <a:pPr algn="ctr"/>
+          </a:p>
+        </p:txBody>
+      </p:sp>
+      <p:sp>
+        <p:nvSpPr>
+          <p:cNvPr id="7" name="Rounded Rectangle 6"/>
+          <p:cNvSpPr/>
+          <p:nvPr/>
+        </p:nvSpPr>
+        <p:spPr>
+          <a:xfrm>
+            <a:off x="3017520" y="1645920"/>
+            <a:ext cx="2194560" cy="914400"/>
+          </a:xfrm>
+          <a:prstGeom prst="roundRect">
+            <a:avLst>
+              <a:gd name="adj" fmla="val 8000"/>
+            </a:avLst>
+          </a:prstGeom>
+          <a:solidFill>
+            <a:srgbClr val="FFFFFF"/>
+          </a:solidFill>
+          <a:ln w="19050">
+            <a:solidFill>
+              <a:srgbClr val="D5DEE8"/>
+            </a:solidFill>
+          </a:ln>
+        </p:spPr>
+        <p:style>
+          <a:lnRef idx="1">
+            <a:schemeClr val="accent1"/>
+          </a:lnRef>
+          <a:fillRef idx="3">
+            <a:schemeClr val="accent1"/>
+          </a:fillRef>
+          <a:effectRef idx="2">
+            <a:schemeClr val="accent1"/>
+          </a:effectRef>
+          <a:fontRef idx="minor">
+            <a:schemeClr val="lt1"/>
+          </a:fontRef>
+        </p:style>
+        <p:txBody>
+          <a:bodyPr rtlCol="0" anchor="ctr" wrap="square" lIns="109728" rIns="109728" tIns="54864" bIns="54864"/>
+          <a:lstStyle/>
+          <a:p>
+            <a:pPr algn="ctr"/>
+            <a:r>
+              <a:rPr sz="1500" b="1">
+                <a:solidFill>
+                  <a:srgbClr val="1B2733"/>
+                </a:solidFill>
+                <a:latin typeface="Calibri"/>
+              </a:rPr>
+              <a:t>¿Falló algún intento del spec?</a:t>
+            </a:r>
+          </a:p>
+        </p:txBody>
+      </p:sp>
+      <p:sp>
+        <p:nvSpPr>
+          <p:cNvPr id="8" name="Rounded Rectangle 7"/>
+          <p:cNvSpPr/>
+          <p:nvPr/>
+        </p:nvSpPr>
+        <p:spPr>
+          <a:xfrm>
+            <a:off x="5577840" y="1371600"/>
+            <a:ext cx="3017520" cy="731520"/>
+          </a:xfrm>
+          <a:prstGeom prst="roundRect">
+            <a:avLst>
+              <a:gd name="adj" fmla="val 8000"/>
+            </a:avLst>
+          </a:prstGeom>
+          <a:solidFill>
+            <a:srgbClr val="FDECEC"/>
+          </a:solidFill>
+          <a:ln w="19050">
+            <a:solidFill>
+              <a:srgbClr val="DC4A4F"/>
+            </a:solidFill>
+          </a:ln>
+        </p:spPr>
+        <p:style>
+          <a:lnRef idx="1">
+            <a:schemeClr val="accent1"/>
+          </a:lnRef>
+          <a:fillRef idx="3">
+            <a:schemeClr val="accent1"/>
+          </a:fillRef>
+          <a:effectRef idx="2">
+            <a:schemeClr val="accent1"/>
+          </a:effectRef>
+          <a:fontRef idx="minor">
+            <a:schemeClr val="lt1"/>
+          </a:fontRef>
+        </p:style>
+        <p:txBody>
+          <a:bodyPr rtlCol="0" anchor="ctr" wrap="square" lIns="109728" rIns="109728" tIns="54864" bIns="54864"/>
+          <a:lstStyle/>
+          <a:p>
+            <a:pPr algn="ctr"/>
+            <a:r>
+              <a:rPr sz="1400" b="0">
+                <a:solidFill>
+                  <a:srgbClr val="8A1F24"/>
+                </a:solidFill>
+                <a:latin typeface="Calibri"/>
+              </a:rPr>
+              <a:t>Sí: conserva captura, video y reporte</a:t>
+            </a:r>
+          </a:p>
+        </p:txBody>
+      </p:sp>
+      <p:sp>
+        <p:nvSpPr>
+          <p:cNvPr id="9" name="Rounded Rectangle 8"/>
+          <p:cNvSpPr/>
+          <p:nvPr/>
+        </p:nvSpPr>
+        <p:spPr>
+          <a:xfrm>
+            <a:off x="5577840" y="2286000"/>
+            <a:ext cx="3017520" cy="731520"/>
+          </a:xfrm>
+          <a:prstGeom prst="roundRect">
+            <a:avLst>
+              <a:gd name="adj" fmla="val 8000"/>
+            </a:avLst>
+          </a:prstGeom>
+          <a:solidFill>
+            <a:srgbClr val="E7F8F0"/>
+          </a:solidFill>
+          <a:ln w="19050">
+            <a:solidFill>
+              <a:srgbClr val="2BD18F"/>
+            </a:solidFill>
+          </a:ln>
+        </p:spPr>
+        <p:style>
+          <a:lnRef idx="1">
+            <a:schemeClr val="accent1"/>
+          </a:lnRef>
+          <a:fillRef idx="3">
+            <a:schemeClr val="accent1"/>
+          </a:fillRef>
+          <a:effectRef idx="2">
+            <a:schemeClr val="accent1"/>
+          </a:effectRef>
+          <a:fontRef idx="minor">
+            <a:schemeClr val="lt1"/>
+          </a:fontRef>
+        </p:style>
+        <p:txBody>
+          <a:bodyPr rtlCol="0" anchor="ctr" wrap="square" lIns="109728" rIns="109728" tIns="54864" bIns="54864"/>
+          <a:lstStyle/>
+          <a:p>
+            <a:pPr algn="ctr"/>
+            <a:r>
+              <a:rPr sz="1400" b="0">
+                <a:solidFill>
+                  <a:srgbClr val="0B5E41"/>
+                </a:solidFill>
+                <a:latin typeface="Calibri"/>
+              </a:rPr>
+              <a:t>No: elimina el video (hook after:spec)</a:t>
+            </a:r>
+          </a:p>
+        </p:txBody>
+      </p:sp>
+      <p:sp>
+        <p:nvSpPr>
+          <p:cNvPr id="10" name="Right Arrow 9"/>
+          <p:cNvSpPr/>
+          <p:nvPr/>
+        </p:nvSpPr>
+        <p:spPr>
+          <a:xfrm>
+            <a:off x="5257800" y="1600200"/>
+            <a:ext cx="274320" cy="228600"/>
+          </a:xfrm>
+          <a:prstGeom prst="rightArrow">
+            <a:avLst/>
+          </a:prstGeom>
+          <a:solidFill>
+            <a:srgbClr val="DC4A4F"/>
+          </a:solidFill>
+          <a:ln>
+            <a:noFill/>
+          </a:ln>
+        </p:spPr>
+        <p:style>
+          <a:lnRef idx="1">
+            <a:schemeClr val="accent1"/>
+          </a:lnRef>
+          <a:fillRef idx="3">
+            <a:schemeClr val="accent1"/>
+          </a:fillRef>
+          <a:effectRef idx="2">
+            <a:schemeClr val="accent1"/>
+          </a:effectRef>
+          <a:fontRef idx="minor">
+            <a:schemeClr val="lt1"/>
+          </a:fontRef>
+        </p:style>
+        <p:txBody>
+          <a:bodyPr rtlCol="0" anchor="ctr"/>
+          <a:lstStyle/>
+          <a:p>
+            <a:pPr algn="ctr"/>
+          </a:p>
+        </p:txBody>
+      </p:sp>
+      <p:sp>
+        <p:nvSpPr>
+          <p:cNvPr id="11" name="Right Arrow 10"/>
+          <p:cNvSpPr/>
+          <p:nvPr/>
+        </p:nvSpPr>
+        <p:spPr>
+          <a:xfrm>
+            <a:off x="5257800" y="2468880"/>
+            <a:ext cx="274320" cy="228600"/>
+          </a:xfrm>
+          <a:prstGeom prst="rightArrow">
+            <a:avLst/>
+          </a:prstGeom>
+          <a:solidFill>
+            <a:srgbClr val="2BD18F"/>
+          </a:solidFill>
+          <a:ln>
+            <a:noFill/>
+          </a:ln>
+        </p:spPr>
+        <p:style>
+          <a:lnRef idx="1">
+            <a:schemeClr val="accent1"/>
+          </a:lnRef>
+          <a:fillRef idx="3">
+            <a:schemeClr val="accent1"/>
+          </a:fillRef>
+          <a:effectRef idx="2">
+            <a:schemeClr val="accent1"/>
+          </a:effectRef>
+          <a:fontRef idx="minor">
+            <a:schemeClr val="lt1"/>
+          </a:fontRef>
+        </p:style>
+        <p:txBody>
+          <a:bodyPr rtlCol="0" anchor="ctr"/>
+          <a:lstStyle/>
+          <a:p>
+            <a:pPr algn="ctr"/>
+          </a:p>
+        </p:txBody>
+      </p:sp>
       <p:pic>
         <p:nvPicPr>
-          <p:cNvPr id="5" name="Picture 4" descr="happy.png"/>
+          <p:cNvPr id="12" name="Picture 11" descr="config.png"/>
           <p:cNvPicPr>
             <a:picLocks noChangeAspect="1"/>
           </p:cNvPicPr>
@@ -11876,8 +10481,8 @@
         </p:blipFill>
         <p:spPr>
           <a:xfrm>
-            <a:off x="548640" y="1600200"/>
-            <a:ext cx="6675120" cy="3360442"/>
+            <a:off x="548640" y="3291840"/>
+            <a:ext cx="6309360" cy="1055262"/>
           </a:xfrm>
           <a:prstGeom prst="rect">
             <a:avLst/>
@@ -11886,14 +10491,14 @@
       </p:pic>
       <p:sp>
         <p:nvSpPr>
-          <p:cNvPr id="6" name="Oval 5"/>
+          <p:cNvPr id="13" name="Oval 12"/>
           <p:cNvSpPr/>
           <p:nvPr/>
         </p:nvSpPr>
         <p:spPr>
           <a:xfrm>
-            <a:off x="7680960" y="1691640"/>
-            <a:ext cx="384048" cy="384048"/>
+            <a:off x="7315200" y="3374136"/>
+            <a:ext cx="128016" cy="128016"/>
           </a:xfrm>
           <a:prstGeom prst="ellipse">
             <a:avLst/>
@@ -11920,32 +10525,23 @@
           </a:fontRef>
         </p:style>
         <p:txBody>
-          <a:bodyPr rtlCol="0" anchor="ctr" lIns="0" rIns="0" tIns="0" bIns="0"/>
+          <a:bodyPr rtlCol="0" anchor="ctr"/>
           <a:lstStyle/>
           <a:p>
             <a:pPr algn="ctr"/>
-            <a:r>
-              <a:rPr sz="1600" b="1">
-                <a:solidFill>
-                  <a:srgbClr val="0F1B2D"/>
-                </a:solidFill>
-                <a:latin typeface="Calibri"/>
-              </a:rPr>
-              <a:t>1</a:t>
-            </a:r>
-          </a:p>
-        </p:txBody>
-      </p:sp>
-      <p:sp>
-        <p:nvSpPr>
-          <p:cNvPr id="7" name="TextBox 6"/>
+          </a:p>
+        </p:txBody>
+      </p:sp>
+      <p:sp>
+        <p:nvSpPr>
+          <p:cNvPr id="14" name="TextBox 13"/>
           <p:cNvSpPr txBox="1"/>
           <p:nvPr/>
         </p:nvSpPr>
         <p:spPr>
           <a:xfrm>
-            <a:off x="8229600" y="1691640"/>
-            <a:ext cx="3474720" cy="731520"/>
+            <a:off x="7589520" y="3291840"/>
+            <a:ext cx="4114800" cy="566928"/>
           </a:xfrm>
           <a:prstGeom prst="rect">
             <a:avLst/>
@@ -11953,7 +10549,7 @@
           <a:noFill/>
         </p:spPr>
         <p:txBody>
-          <a:bodyPr wrap="square" lIns="0" rIns="0" tIns="0" bIns="0" anchor="ctr">
+          <a:bodyPr wrap="square" lIns="0" rIns="0" tIns="0" bIns="0" anchor="t">
             <a:spAutoFit/>
           </a:bodyPr>
           <a:lstStyle/>
@@ -11970,21 +10566,21 @@
                 </a:solidFill>
                 <a:latin typeface="Calibri"/>
               </a:rPr>
-              <a:t>Preparación por API e ingreso por la interfaz</a:t>
-            </a:r>
-          </a:p>
-        </p:txBody>
-      </p:sp>
-      <p:sp>
-        <p:nvSpPr>
-          <p:cNvPr id="8" name="Oval 7"/>
+              <a:t>Reporte HTML por ejecución (mochawesome)</a:t>
+            </a:r>
+          </a:p>
+        </p:txBody>
+      </p:sp>
+      <p:sp>
+        <p:nvSpPr>
+          <p:cNvPr id="15" name="Oval 14"/>
           <p:cNvSpPr/>
           <p:nvPr/>
         </p:nvSpPr>
         <p:spPr>
           <a:xfrm>
-            <a:off x="7680960" y="2496312"/>
-            <a:ext cx="384048" cy="384048"/>
+            <a:off x="7315200" y="3941063"/>
+            <a:ext cx="128016" cy="128016"/>
           </a:xfrm>
           <a:prstGeom prst="ellipse">
             <a:avLst/>
@@ -12011,32 +10607,23 @@
           </a:fontRef>
         </p:style>
         <p:txBody>
-          <a:bodyPr rtlCol="0" anchor="ctr" lIns="0" rIns="0" tIns="0" bIns="0"/>
+          <a:bodyPr rtlCol="0" anchor="ctr"/>
           <a:lstStyle/>
           <a:p>
             <a:pPr algn="ctr"/>
-            <a:r>
-              <a:rPr sz="1600" b="1">
-                <a:solidFill>
-                  <a:srgbClr val="0F1B2D"/>
-                </a:solidFill>
-                <a:latin typeface="Calibri"/>
-              </a:rPr>
-              <a:t>2</a:t>
-            </a:r>
-          </a:p>
-        </p:txBody>
-      </p:sp>
-      <p:sp>
-        <p:nvSpPr>
-          <p:cNvPr id="9" name="TextBox 8"/>
+          </a:p>
+        </p:txBody>
+      </p:sp>
+      <p:sp>
+        <p:nvSpPr>
+          <p:cNvPr id="16" name="TextBox 15"/>
           <p:cNvSpPr txBox="1"/>
           <p:nvPr/>
         </p:nvSpPr>
         <p:spPr>
           <a:xfrm>
-            <a:off x="8229600" y="2496312"/>
-            <a:ext cx="3474720" cy="731520"/>
+            <a:off x="7589520" y="3858768"/>
+            <a:ext cx="4114800" cy="566928"/>
           </a:xfrm>
           <a:prstGeom prst="rect">
             <a:avLst/>
@@ -12044,7 +10631,7 @@
           <a:noFill/>
         </p:spPr>
         <p:txBody>
-          <a:bodyPr wrap="square" lIns="0" rIns="0" tIns="0" bIns="0" anchor="ctr">
+          <a:bodyPr wrap="square" lIns="0" rIns="0" tIns="0" bIns="0" anchor="t">
             <a:spAutoFit/>
           </a:bodyPr>
           <a:lstStyle/>
@@ -12061,21 +10648,21 @@
                 </a:solidFill>
                 <a:latin typeface="Calibri"/>
               </a:rPr>
-              <a:t>Celular registrado y alias «Ana Cypress»</a:t>
-            </a:r>
-          </a:p>
-        </p:txBody>
-      </p:sp>
-      <p:sp>
-        <p:nvSpPr>
-          <p:cNvPr id="10" name="Oval 9"/>
+              <a:t>Capturas automáticas al fallar, solo en run</a:t>
+            </a:r>
+          </a:p>
+        </p:txBody>
+      </p:sp>
+      <p:sp>
+        <p:nvSpPr>
+          <p:cNvPr id="17" name="Oval 16"/>
           <p:cNvSpPr/>
           <p:nvPr/>
         </p:nvSpPr>
         <p:spPr>
           <a:xfrm>
-            <a:off x="7680960" y="3300984"/>
-            <a:ext cx="384048" cy="384048"/>
+            <a:off x="7315200" y="4507992"/>
+            <a:ext cx="128016" cy="128016"/>
           </a:xfrm>
           <a:prstGeom prst="ellipse">
             <a:avLst/>
@@ -12102,32 +10689,23 @@
           </a:fontRef>
         </p:style>
         <p:txBody>
-          <a:bodyPr rtlCol="0" anchor="ctr" lIns="0" rIns="0" tIns="0" bIns="0"/>
+          <a:bodyPr rtlCol="0" anchor="ctr"/>
           <a:lstStyle/>
           <a:p>
             <a:pPr algn="ctr"/>
-            <a:r>
-              <a:rPr sz="1600" b="1">
-                <a:solidFill>
-                  <a:srgbClr val="0F1B2D"/>
-                </a:solidFill>
-                <a:latin typeface="Calibri"/>
-              </a:rPr>
-              <a:t>3</a:t>
-            </a:r>
-          </a:p>
-        </p:txBody>
-      </p:sp>
-      <p:sp>
-        <p:nvSpPr>
-          <p:cNvPr id="11" name="TextBox 10"/>
+          </a:p>
+        </p:txBody>
+      </p:sp>
+      <p:sp>
+        <p:nvSpPr>
+          <p:cNvPr id="18" name="TextBox 17"/>
           <p:cNvSpPr txBox="1"/>
           <p:nvPr/>
         </p:nvSpPr>
         <p:spPr>
           <a:xfrm>
-            <a:off x="8229600" y="3300984"/>
-            <a:ext cx="3474720" cy="731520"/>
+            <a:off x="7589520" y="4425696"/>
+            <a:ext cx="4114800" cy="566928"/>
           </a:xfrm>
           <a:prstGeom prst="rect">
             <a:avLst/>
@@ -12135,7 +10713,7 @@
           <a:noFill/>
         </p:spPr>
         <p:txBody>
-          <a:bodyPr wrap="square" lIns="0" rIns="0" tIns="0" bIns="0" anchor="ctr">
+          <a:bodyPr wrap="square" lIns="0" rIns="0" tIns="0" bIns="0" anchor="t">
             <a:spAutoFit/>
           </a:bodyPr>
           <a:lstStyle/>
@@ -12152,21 +10730,21 @@
                 </a:solidFill>
                 <a:latin typeface="Calibri"/>
               </a:rPr>
-              <a:t>POST real: respuesta 201</a:t>
-            </a:r>
-          </a:p>
-        </p:txBody>
-      </p:sp>
-      <p:sp>
-        <p:nvSpPr>
-          <p:cNvPr id="12" name="Oval 11"/>
+              <a:t>Sin reintentos de tests que oculten resultados</a:t>
+            </a:r>
+          </a:p>
+        </p:txBody>
+      </p:sp>
+      <p:sp>
+        <p:nvSpPr>
+          <p:cNvPr id="19" name="Oval 18"/>
           <p:cNvSpPr/>
           <p:nvPr/>
         </p:nvSpPr>
         <p:spPr>
           <a:xfrm>
-            <a:off x="7680960" y="4105656"/>
-            <a:ext cx="384048" cy="384048"/>
+            <a:off x="7315200" y="5074920"/>
+            <a:ext cx="128016" cy="128016"/>
           </a:xfrm>
           <a:prstGeom prst="ellipse">
             <a:avLst/>
@@ -12193,32 +10771,23 @@
           </a:fontRef>
         </p:style>
         <p:txBody>
-          <a:bodyPr rtlCol="0" anchor="ctr" lIns="0" rIns="0" tIns="0" bIns="0"/>
+          <a:bodyPr rtlCol="0" anchor="ctr"/>
           <a:lstStyle/>
           <a:p>
             <a:pPr algn="ctr"/>
-            <a:r>
-              <a:rPr sz="1600" b="1">
-                <a:solidFill>
-                  <a:srgbClr val="0F1B2D"/>
-                </a:solidFill>
-                <a:latin typeface="Calibri"/>
-              </a:rPr>
-              <a:t>4</a:t>
-            </a:r>
-          </a:p>
-        </p:txBody>
-      </p:sp>
-      <p:sp>
-        <p:nvSpPr>
-          <p:cNvPr id="13" name="TextBox 12"/>
+          </a:p>
+        </p:txBody>
+      </p:sp>
+      <p:sp>
+        <p:nvSpPr>
+          <p:cNvPr id="20" name="TextBox 19"/>
           <p:cNvSpPr txBox="1"/>
           <p:nvPr/>
         </p:nvSpPr>
         <p:spPr>
           <a:xfrm>
-            <a:off x="8229600" y="4105656"/>
-            <a:ext cx="3474720" cy="731520"/>
+            <a:off x="7589520" y="4992624"/>
+            <a:ext cx="4114800" cy="566928"/>
           </a:xfrm>
           <a:prstGeom prst="rect">
             <a:avLst/>
@@ -12226,7 +10795,7 @@
           <a:noFill/>
         </p:spPr>
         <p:txBody>
-          <a:bodyPr wrap="square" lIns="0" rIns="0" tIns="0" bIns="0" anchor="ctr">
+          <a:bodyPr wrap="square" lIns="0" rIns="0" tIns="0" bIns="0" anchor="t">
             <a:spAutoFit/>
           </a:bodyPr>
           <a:lstStyle/>
@@ -12243,30 +10812,34 @@
                 </a:solidFill>
                 <a:latin typeface="Calibri"/>
               </a:rPr>
-              <a:t>Una fila con datos correctos y favorito desactivado</a:t>
-            </a:r>
-          </a:p>
-        </p:txBody>
-      </p:sp>
-      <p:sp>
-        <p:nvSpPr>
-          <p:cNvPr id="14" name="Oval 13"/>
+              <a:t>CI guarda los artefactos 7 días</a:t>
+            </a:r>
+          </a:p>
+        </p:txBody>
+      </p:sp>
+      <p:sp>
+        <p:nvSpPr>
+          <p:cNvPr id="21" name="Rounded Rectangle 20"/>
           <p:cNvSpPr/>
           <p:nvPr/>
         </p:nvSpPr>
         <p:spPr>
           <a:xfrm>
-            <a:off x="7680960" y="4910328"/>
-            <a:ext cx="384048" cy="384048"/>
-          </a:xfrm>
-          <a:prstGeom prst="ellipse">
-            <a:avLst/>
+            <a:off x="548640" y="5120640"/>
+            <a:ext cx="11064240" cy="868680"/>
+          </a:xfrm>
+          <a:prstGeom prst="roundRect">
+            <a:avLst>
+              <a:gd name="adj" fmla="val 8000"/>
+            </a:avLst>
           </a:prstGeom>
           <a:solidFill>
-            <a:srgbClr val="2BD18F"/>
+            <a:srgbClr val="FFFFFF"/>
           </a:solidFill>
-          <a:ln>
-            <a:noFill/>
+          <a:ln w="19050">
+            <a:solidFill>
+              <a:srgbClr val="E8923A"/>
+            </a:solidFill>
           </a:ln>
         </p:spPr>
         <p:style>
@@ -12284,167 +10857,18 @@
           </a:fontRef>
         </p:style>
         <p:txBody>
-          <a:bodyPr rtlCol="0" anchor="ctr" lIns="0" rIns="0" tIns="0" bIns="0"/>
+          <a:bodyPr rtlCol="0" anchor="ctr" wrap="square" lIns="109728" rIns="109728" tIns="54864" bIns="54864"/>
           <a:lstStyle/>
           <a:p>
             <a:pPr algn="ctr"/>
             <a:r>
-              <a:rPr sz="1600" b="1">
-                <a:solidFill>
-                  <a:srgbClr val="0F1B2D"/>
-                </a:solidFill>
-                <a:latin typeface="Calibri"/>
-              </a:rPr>
-              <a:t>5</a:t>
-            </a:r>
-          </a:p>
-        </p:txBody>
-      </p:sp>
-      <p:sp>
-        <p:nvSpPr>
-          <p:cNvPr id="15" name="TextBox 14"/>
-          <p:cNvSpPr txBox="1"/>
-          <p:nvPr/>
-        </p:nvSpPr>
-        <p:spPr>
-          <a:xfrm>
-            <a:off x="8229600" y="4910328"/>
-            <a:ext cx="3474720" cy="731520"/>
-          </a:xfrm>
-          <a:prstGeom prst="rect">
-            <a:avLst/>
-          </a:prstGeom>
-          <a:noFill/>
-        </p:spPr>
-        <p:txBody>
-          <a:bodyPr wrap="square" lIns="0" rIns="0" tIns="0" bIns="0" anchor="ctr">
-            <a:spAutoFit/>
-          </a:bodyPr>
-          <a:lstStyle/>
-          <a:p>
-            <a:pPr algn="l">
-              <a:spcAft>
-                <a:spcPts val="0"/>
-              </a:spcAft>
-            </a:pPr>
-            <a:r>
-              <a:rPr sz="1500" b="0" i="0">
+              <a:rPr sz="1400" b="0">
                 <a:solidFill>
                   <a:srgbClr val="1B2733"/>
                 </a:solidFill>
                 <a:latin typeface="Calibri"/>
               </a:rPr>
-              <a:t>Recarga y comprobación de persistencia</a:t>
-            </a:r>
-          </a:p>
-        </p:txBody>
-      </p:sp>
-      <p:sp>
-        <p:nvSpPr>
-          <p:cNvPr id="16" name="Rounded Rectangle 15"/>
-          <p:cNvSpPr/>
-          <p:nvPr/>
-        </p:nvSpPr>
-        <p:spPr>
-          <a:xfrm>
-            <a:off x="548640" y="5074920"/>
-            <a:ext cx="6675120" cy="822960"/>
-          </a:xfrm>
-          <a:prstGeom prst="roundRect">
-            <a:avLst>
-              <a:gd name="adj" fmla="val 8000"/>
-            </a:avLst>
-          </a:prstGeom>
-          <a:solidFill>
-            <a:srgbClr val="FFFFFF"/>
-          </a:solidFill>
-          <a:ln w="19050">
-            <a:solidFill>
-              <a:srgbClr val="2BD18F"/>
-            </a:solidFill>
-          </a:ln>
-        </p:spPr>
-        <p:style>
-          <a:lnRef idx="1">
-            <a:schemeClr val="accent1"/>
-          </a:lnRef>
-          <a:fillRef idx="3">
-            <a:schemeClr val="accent1"/>
-          </a:fillRef>
-          <a:effectRef idx="2">
-            <a:schemeClr val="accent1"/>
-          </a:effectRef>
-          <a:fontRef idx="minor">
-            <a:schemeClr val="lt1"/>
-          </a:fontRef>
-        </p:style>
-        <p:txBody>
-          <a:bodyPr rtlCol="0" anchor="ctr" wrap="square" lIns="109728" rIns="109728" tIns="54864" bIns="54864"/>
-          <a:lstStyle/>
-          <a:p>
-            <a:pPr algn="ctr"/>
-            <a:r>
-              <a:rPr sz="1400" b="0">
-                <a:solidFill>
-                  <a:srgbClr val="1B2733"/>
-                </a:solidFill>
-                <a:latin typeface="Calibri"/>
-              </a:rPr>
-              <a:t>cy.intercept solo observa la petición: la prueba usa la API real, sin respuestas simuladas</a:t>
-            </a:r>
-          </a:p>
-        </p:txBody>
-      </p:sp>
-      <p:sp>
-        <p:nvSpPr>
-          <p:cNvPr id="17" name="Rounded Rectangle 16"/>
-          <p:cNvSpPr/>
-          <p:nvPr/>
-        </p:nvSpPr>
-        <p:spPr>
-          <a:xfrm>
-            <a:off x="7680960" y="5715000"/>
-            <a:ext cx="3931920" cy="457200"/>
-          </a:xfrm>
-          <a:prstGeom prst="roundRect">
-            <a:avLst>
-              <a:gd name="adj" fmla="val 8000"/>
-            </a:avLst>
-          </a:prstGeom>
-          <a:solidFill>
-            <a:srgbClr val="0F1B2D"/>
-          </a:solidFill>
-          <a:ln>
-            <a:noFill/>
-          </a:ln>
-        </p:spPr>
-        <p:style>
-          <a:lnRef idx="1">
-            <a:schemeClr val="accent1"/>
-          </a:lnRef>
-          <a:fillRef idx="3">
-            <a:schemeClr val="accent1"/>
-          </a:fillRef>
-          <a:effectRef idx="2">
-            <a:schemeClr val="accent1"/>
-          </a:effectRef>
-          <a:fontRef idx="minor">
-            <a:schemeClr val="lt1"/>
-          </a:fontRef>
-        </p:style>
-        <p:txBody>
-          <a:bodyPr rtlCol="0" anchor="ctr" wrap="square" lIns="109728" rIns="109728" tIns="54864" bIns="54864"/>
-          <a:lstStyle/>
-          <a:p>
-            <a:pPr algn="ctr"/>
-            <a:r>
-              <a:rPr sz="1400" b="1">
-                <a:solidFill>
-                  <a:srgbClr val="2BD18F"/>
-                </a:solidFill>
-                <a:latin typeface="Calibri"/>
-              </a:rPr>
-              <a:t>scripts/cypress.ps1 open</a:t>
+              <a:t>Aviso real: una ejecución verde dijo «Insufficient frames captured to create video». Un test verde no garantiza que la evidencia se generó: hay que revisar los artefactos.</a:t>
             </a:r>
           </a:p>
         </p:txBody>
@@ -12509,7 +10933,7 @@
                 </a:solidFill>
                 <a:latin typeface="Calibri"/>
               </a:rPr>
-              <a:t>IA aplicada con cy.prompt</a:t>
+              <a:t>Fallo didáctico</a:t>
             </a:r>
           </a:p>
         </p:txBody>
@@ -12548,7 +10972,7 @@
                 </a:solidFill>
                 <a:latin typeface="Calibri"/>
               </a:rPr>
-              <a:t>Instrucciones en lenguaje natural que generan comandos de Cypress</a:t>
+              <a:t>Una expectativa incorrecta produce una prueba roja, y Cypress conserva la evidencia</a:t>
             </a:r>
           </a:p>
         </p:txBody>
@@ -12594,7 +11018,7 @@
       </p:sp>
       <p:pic>
         <p:nvPicPr>
-          <p:cNvPr id="5" name="Picture 4" descr="ia.png"/>
+          <p:cNvPr id="5" name="Picture 4" descr="fail.png"/>
           <p:cNvPicPr>
             <a:picLocks noChangeAspect="1"/>
           </p:cNvPicPr>
@@ -12608,57 +11032,37 @@
         </p:blipFill>
         <p:spPr>
           <a:xfrm>
-            <a:off x="548640" y="1508760"/>
-            <a:ext cx="6858000" cy="3012928"/>
+            <a:off x="548640" y="1645920"/>
+            <a:ext cx="6766560" cy="1477529"/>
           </a:xfrm>
           <a:prstGeom prst="rect">
             <a:avLst/>
           </a:prstGeom>
         </p:spPr>
       </p:pic>
-      <p:pic>
-        <p:nvPicPr>
-          <p:cNvPr id="6" name="Picture 5" descr="prompt.png"/>
-          <p:cNvPicPr>
-            <a:picLocks noChangeAspect="1"/>
-          </p:cNvPicPr>
-          <p:nvPr/>
-        </p:nvPicPr>
-        <p:blipFill>
-          <a:blip r:embed="rId4"/>
-          <a:stretch>
-            <a:fillRect/>
-          </a:stretch>
-        </p:blipFill>
-        <p:spPr>
-          <a:xfrm>
-            <a:off x="548640" y="4704568"/>
-            <a:ext cx="6858000" cy="1521584"/>
-          </a:xfrm>
-          <a:prstGeom prst="rect">
-            <a:avLst/>
-          </a:prstGeom>
-        </p:spPr>
-      </p:pic>
-      <p:sp>
-        <p:nvSpPr>
-          <p:cNvPr id="7" name="Oval 6"/>
+      <p:sp>
+        <p:nvSpPr>
+          <p:cNvPr id="6" name="Rounded Rectangle 5"/>
           <p:cNvSpPr/>
           <p:nvPr/>
         </p:nvSpPr>
         <p:spPr>
           <a:xfrm>
-            <a:off x="7772400" y="1636776"/>
-            <a:ext cx="128016" cy="128016"/>
-          </a:xfrm>
-          <a:prstGeom prst="ellipse">
-            <a:avLst/>
+            <a:off x="7680960" y="1645920"/>
+            <a:ext cx="3931920" cy="896112"/>
+          </a:xfrm>
+          <a:prstGeom prst="roundRect">
+            <a:avLst>
+              <a:gd name="adj" fmla="val 8000"/>
+            </a:avLst>
           </a:prstGeom>
           <a:solidFill>
-            <a:srgbClr val="2BD18F"/>
+            <a:srgbClr val="FFFFFF"/>
           </a:solidFill>
-          <a:ln>
-            <a:noFill/>
+          <a:ln w="19050">
+            <a:solidFill>
+              <a:srgbClr val="D5DEE8"/>
+            </a:solidFill>
           </a:ln>
         </p:spPr>
         <p:style>
@@ -12676,71 +11080,57 @@
           </a:fontRef>
         </p:style>
         <p:txBody>
-          <a:bodyPr rtlCol="0" anchor="ctr"/>
-          <a:lstStyle/>
-          <a:p>
-            <a:pPr algn="ctr"/>
-          </a:p>
-        </p:txBody>
-      </p:sp>
-      <p:sp>
-        <p:nvSpPr>
-          <p:cNvPr id="8" name="TextBox 7"/>
-          <p:cNvSpPr txBox="1"/>
-          <p:nvPr/>
-        </p:nvSpPr>
-        <p:spPr>
-          <a:xfrm>
-            <a:off x="8046720" y="1554480"/>
-            <a:ext cx="3657600" cy="777240"/>
-          </a:xfrm>
-          <a:prstGeom prst="rect">
-            <a:avLst/>
-          </a:prstGeom>
-          <a:noFill/>
-        </p:spPr>
-        <p:txBody>
-          <a:bodyPr wrap="square" lIns="0" rIns="0" tIns="0" bIns="0" anchor="t">
-            <a:spAutoFit/>
-          </a:bodyPr>
-          <a:lstStyle/>
-          <a:p>
-            <a:pPr algn="l">
-              <a:spcAft>
-                <a:spcPts val="0"/>
-              </a:spcAft>
-            </a:pPr>
-            <a:r>
-              <a:rPr sz="1500" b="0" i="0">
+          <a:bodyPr rtlCol="0" anchor="ctr" wrap="square" lIns="109728" rIns="109728" tIns="54864" bIns="54864"/>
+          <a:lstStyle/>
+          <a:p>
+            <a:pPr algn="l"/>
+            <a:r>
+              <a:rPr sz="1600" b="1">
                 <a:solidFill>
                   <a:srgbClr val="1B2733"/>
                 </a:solidFill>
                 <a:latin typeface="Calibri"/>
               </a:rPr>
-              <a:t>La IA completa Celular y Alias y pulsa Agregar</a:t>
-            </a:r>
-          </a:p>
-        </p:txBody>
-      </p:sp>
-      <p:sp>
-        <p:nvSpPr>
-          <p:cNvPr id="9" name="Oval 8"/>
+              <a:t>Captura PNG</a:t>
+            </a:r>
+          </a:p>
+          <a:p>
+            <a:pPr algn="l"/>
+            <a:r>
+              <a:rPr sz="1300" b="0">
+                <a:solidFill>
+                  <a:srgbClr val="5B6B7A"/>
+                </a:solidFill>
+                <a:latin typeface="Calibri"/>
+              </a:rPr>
+              <a:t>del momento del fallo</a:t>
+            </a:r>
+          </a:p>
+        </p:txBody>
+      </p:sp>
+      <p:sp>
+        <p:nvSpPr>
+          <p:cNvPr id="7" name="Rounded Rectangle 6"/>
           <p:cNvSpPr/>
           <p:nvPr/>
         </p:nvSpPr>
         <p:spPr>
           <a:xfrm>
-            <a:off x="7772400" y="2414015"/>
-            <a:ext cx="128016" cy="128016"/>
-          </a:xfrm>
-          <a:prstGeom prst="ellipse">
-            <a:avLst/>
+            <a:off x="7680960" y="2697480"/>
+            <a:ext cx="3931920" cy="896112"/>
+          </a:xfrm>
+          <a:prstGeom prst="roundRect">
+            <a:avLst>
+              <a:gd name="adj" fmla="val 8000"/>
+            </a:avLst>
           </a:prstGeom>
           <a:solidFill>
-            <a:srgbClr val="2BD18F"/>
+            <a:srgbClr val="FFFFFF"/>
           </a:solidFill>
-          <a:ln>
-            <a:noFill/>
+          <a:ln w="19050">
+            <a:solidFill>
+              <a:srgbClr val="D5DEE8"/>
+            </a:solidFill>
           </a:ln>
         </p:spPr>
         <p:style>
@@ -12758,71 +11148,57 @@
           </a:fontRef>
         </p:style>
         <p:txBody>
-          <a:bodyPr rtlCol="0" anchor="ctr"/>
-          <a:lstStyle/>
-          <a:p>
-            <a:pPr algn="ctr"/>
-          </a:p>
-        </p:txBody>
-      </p:sp>
-      <p:sp>
-        <p:nvSpPr>
-          <p:cNvPr id="10" name="TextBox 9"/>
-          <p:cNvSpPr txBox="1"/>
-          <p:nvPr/>
-        </p:nvSpPr>
-        <p:spPr>
-          <a:xfrm>
-            <a:off x="8046720" y="2331720"/>
-            <a:ext cx="3657600" cy="777240"/>
-          </a:xfrm>
-          <a:prstGeom prst="rect">
-            <a:avLst/>
-          </a:prstGeom>
-          <a:noFill/>
-        </p:spPr>
-        <p:txBody>
-          <a:bodyPr wrap="square" lIns="0" rIns="0" tIns="0" bIns="0" anchor="t">
-            <a:spAutoFit/>
-          </a:bodyPr>
-          <a:lstStyle/>
-          <a:p>
-            <a:pPr algn="l">
-              <a:spcAft>
-                <a:spcPts val="0"/>
-              </a:spcAft>
-            </a:pPr>
-            <a:r>
-              <a:rPr sz="1500" b="0" i="0">
+          <a:bodyPr rtlCol="0" anchor="ctr" wrap="square" lIns="109728" rIns="109728" tIns="54864" bIns="54864"/>
+          <a:lstStyle/>
+          <a:p>
+            <a:pPr algn="l"/>
+            <a:r>
+              <a:rPr sz="1600" b="1">
                 <a:solidFill>
                   <a:srgbClr val="1B2733"/>
                 </a:solidFill>
                 <a:latin typeface="Calibri"/>
               </a:rPr>
-              <a:t>La opción Code muestra los comandos generados</a:t>
-            </a:r>
-          </a:p>
-        </p:txBody>
-      </p:sp>
-      <p:sp>
-        <p:nvSpPr>
-          <p:cNvPr id="11" name="Oval 10"/>
+              <a:t>Video MP4</a:t>
+            </a:r>
+          </a:p>
+          <a:p>
+            <a:pPr algn="l"/>
+            <a:r>
+              <a:rPr sz="1300" b="0">
+                <a:solidFill>
+                  <a:srgbClr val="5B6B7A"/>
+                </a:solidFill>
+                <a:latin typeface="Calibri"/>
+              </a:rPr>
+              <a:t>del spec fallido</a:t>
+            </a:r>
+          </a:p>
+        </p:txBody>
+      </p:sp>
+      <p:sp>
+        <p:nvSpPr>
+          <p:cNvPr id="8" name="Rounded Rectangle 7"/>
           <p:cNvSpPr/>
           <p:nvPr/>
         </p:nvSpPr>
         <p:spPr>
           <a:xfrm>
-            <a:off x="7772400" y="3191256"/>
-            <a:ext cx="128016" cy="128016"/>
-          </a:xfrm>
-          <a:prstGeom prst="ellipse">
-            <a:avLst/>
+            <a:off x="7680960" y="3749039"/>
+            <a:ext cx="3931920" cy="896112"/>
+          </a:xfrm>
+          <a:prstGeom prst="roundRect">
+            <a:avLst>
+              <a:gd name="adj" fmla="val 8000"/>
+            </a:avLst>
           </a:prstGeom>
           <a:solidFill>
-            <a:srgbClr val="2BD18F"/>
+            <a:srgbClr val="FFFFFF"/>
           </a:solidFill>
-          <a:ln>
-            <a:noFill/>
+          <a:ln w="19050">
+            <a:solidFill>
+              <a:srgbClr val="D5DEE8"/>
+            </a:solidFill>
           </a:ln>
         </p:spPr>
         <p:style>
@@ -12840,68 +11216,52 @@
           </a:fontRef>
         </p:style>
         <p:txBody>
-          <a:bodyPr rtlCol="0" anchor="ctr"/>
-          <a:lstStyle/>
-          <a:p>
-            <a:pPr algn="ctr"/>
-          </a:p>
-        </p:txBody>
-      </p:sp>
-      <p:sp>
-        <p:nvSpPr>
-          <p:cNvPr id="12" name="TextBox 11"/>
-          <p:cNvSpPr txBox="1"/>
-          <p:nvPr/>
-        </p:nvSpPr>
-        <p:spPr>
-          <a:xfrm>
-            <a:off x="8046720" y="3108960"/>
-            <a:ext cx="3657600" cy="777240"/>
-          </a:xfrm>
-          <a:prstGeom prst="rect">
-            <a:avLst/>
-          </a:prstGeom>
-          <a:noFill/>
-        </p:spPr>
-        <p:txBody>
-          <a:bodyPr wrap="square" lIns="0" rIns="0" tIns="0" bIns="0" anchor="t">
-            <a:spAutoFit/>
-          </a:bodyPr>
-          <a:lstStyle/>
-          <a:p>
-            <a:pPr algn="l">
-              <a:spcAft>
-                <a:spcPts val="0"/>
-              </a:spcAft>
-            </a:pPr>
-            <a:r>
-              <a:rPr sz="1500" b="0" i="0">
+          <a:bodyPr rtlCol="0" anchor="ctr" wrap="square" lIns="109728" rIns="109728" tIns="54864" bIns="54864"/>
+          <a:lstStyle/>
+          <a:p>
+            <a:pPr algn="l"/>
+            <a:r>
+              <a:rPr sz="1600" b="1">
                 <a:solidFill>
                   <a:srgbClr val="1B2733"/>
                 </a:solidFill>
                 <a:latin typeface="Calibri"/>
               </a:rPr>
-              <a:t>Aserciones explícitas: 201 y persistencia</a:t>
-            </a:r>
-          </a:p>
-        </p:txBody>
-      </p:sp>
-      <p:sp>
-        <p:nvSpPr>
-          <p:cNvPr id="13" name="Oval 12"/>
+              <a:t>Reporte HTML</a:t>
+            </a:r>
+          </a:p>
+          <a:p>
+            <a:pPr algn="l"/>
+            <a:r>
+              <a:rPr sz="1300" b="0">
+                <a:solidFill>
+                  <a:srgbClr val="5B6B7A"/>
+                </a:solidFill>
+                <a:latin typeface="Calibri"/>
+              </a:rPr>
+              <a:t>con el error y la diferencia</a:t>
+            </a:r>
+          </a:p>
+        </p:txBody>
+      </p:sp>
+      <p:sp>
+        <p:nvSpPr>
+          <p:cNvPr id="9" name="Rounded Rectangle 8"/>
           <p:cNvSpPr/>
           <p:nvPr/>
         </p:nvSpPr>
         <p:spPr>
           <a:xfrm>
-            <a:off x="7772400" y="3968496"/>
-            <a:ext cx="128016" cy="128016"/>
-          </a:xfrm>
-          <a:prstGeom prst="ellipse">
-            <a:avLst/>
+            <a:off x="548640" y="4206240"/>
+            <a:ext cx="6766560" cy="1737360"/>
+          </a:xfrm>
+          <a:prstGeom prst="roundRect">
+            <a:avLst>
+              <a:gd name="adj" fmla="val 8000"/>
+            </a:avLst>
           </a:prstGeom>
           <a:solidFill>
-            <a:srgbClr val="2BD18F"/>
+            <a:srgbClr val="0F1B2D"/>
           </a:solidFill>
           <a:ln>
             <a:noFill/>
@@ -12922,62 +11282,56 @@
           </a:fontRef>
         </p:style>
         <p:txBody>
-          <a:bodyPr rtlCol="0" anchor="ctr"/>
-          <a:lstStyle/>
-          <a:p>
-            <a:pPr algn="ctr"/>
-          </a:p>
-        </p:txBody>
-      </p:sp>
-      <p:sp>
-        <p:nvSpPr>
-          <p:cNvPr id="14" name="TextBox 13"/>
-          <p:cNvSpPr txBox="1"/>
-          <p:nvPr/>
-        </p:nvSpPr>
-        <p:spPr>
-          <a:xfrm>
-            <a:off x="8046720" y="3886200"/>
-            <a:ext cx="3657600" cy="777240"/>
-          </a:xfrm>
-          <a:prstGeom prst="rect">
-            <a:avLst/>
-          </a:prstGeom>
-          <a:noFill/>
-        </p:spPr>
-        <p:txBody>
-          <a:bodyPr wrap="square" lIns="0" rIns="0" tIns="0" bIns="0" anchor="t">
-            <a:spAutoFit/>
-          </a:bodyPr>
-          <a:lstStyle/>
-          <a:p>
-            <a:pPr algn="l">
-              <a:spcAft>
-                <a:spcPts val="0"/>
-              </a:spcAft>
-            </a:pPr>
-            <a:r>
-              <a:rPr sz="1500" b="0" i="0">
-                <a:solidFill>
-                  <a:srgbClr val="1B2733"/>
-                </a:solidFill>
-                <a:latin typeface="Calibri"/>
-              </a:rPr>
-              <a:t>Requiere cuenta Cloud, conexión y cuota</a:t>
-            </a:r>
-          </a:p>
-        </p:txBody>
-      </p:sp>
-      <p:sp>
-        <p:nvSpPr>
-          <p:cNvPr id="15" name="Rounded Rectangle 14"/>
+          <a:bodyPr rtlCol="0" anchor="ctr" wrap="square" lIns="109728" rIns="109728" tIns="54864" bIns="54864"/>
+          <a:lstStyle/>
+          <a:p>
+            <a:pPr algn="l"/>
+            <a:r>
+              <a:rPr sz="1600" b="1">
+                <a:solidFill>
+                  <a:srgbClr val="2BD18F"/>
+                </a:solidFill>
+                <a:latin typeface="Calibri"/>
+              </a:rPr>
+              <a:t>Qué esperar</a:t>
+            </a:r>
+          </a:p>
+          <a:p>
+            <a:pPr algn="l"/>
+            <a:r>
+              <a:rPr sz="1500" b="0">
+                <a:solidFill>
+                  <a:srgbClr val="FFFFFF"/>
+                </a:solidFill>
+                <a:latin typeface="Calibri"/>
+              </a:rPr>
+              <a:t>Creamos un contacto y la demo exige deliberadamente dos. Cypress informa que encontró 1 y esperaba 2.</a:t>
+            </a:r>
+          </a:p>
+          <a:p>
+            <a:pPr algn="l"/>
+            <a:r>
+              <a:rPr sz="1500" b="0">
+                <a:solidFill>
+                  <a:srgbClr val="FFFFFF"/>
+                </a:solidFill>
+                <a:latin typeface="Calibri"/>
+              </a:rPr>
+              <a:t>Salida 1 esperada. Fuera de regresión y de CI.</a:t>
+            </a:r>
+          </a:p>
+        </p:txBody>
+      </p:sp>
+      <p:sp>
+        <p:nvSpPr>
+          <p:cNvPr id="10" name="Rounded Rectangle 9"/>
           <p:cNvSpPr/>
           <p:nvPr/>
         </p:nvSpPr>
         <p:spPr>
           <a:xfrm>
-            <a:off x="7772400" y="4846320"/>
-            <a:ext cx="3840480" cy="1097280"/>
+            <a:off x="7680960" y="4892040"/>
+            <a:ext cx="3931920" cy="1051560"/>
           </a:xfrm>
           <a:prstGeom prst="roundRect">
             <a:avLst>
@@ -12985,11 +11339,11 @@
             </a:avLst>
           </a:prstGeom>
           <a:solidFill>
-            <a:srgbClr val="E7F8F0"/>
+            <a:srgbClr val="FFF4E5"/>
           </a:solidFill>
           <a:ln w="19050">
             <a:solidFill>
-              <a:srgbClr val="2BD18F"/>
+              <a:srgbClr val="E8923A"/>
             </a:solidFill>
           </a:ln>
         </p:spPr>
@@ -13011,66 +11365,15 @@
           <a:bodyPr rtlCol="0" anchor="ctr" wrap="square" lIns="109728" rIns="109728" tIns="54864" bIns="54864"/>
           <a:lstStyle/>
           <a:p>
-            <a:pPr algn="l"/>
-            <a:r>
-              <a:rPr sz="1400" b="1">
-                <a:solidFill>
-                  <a:srgbClr val="0B7A55"/>
-                </a:solidFill>
-                <a:latin typeface="Calibri"/>
-              </a:rPr>
-              <a:t>Aprobada en ejecución interactiva</a:t>
-            </a:r>
-          </a:p>
-          <a:p>
-            <a:pPr algn="l"/>
-            <a:r>
-              <a:rPr sz="1300" b="0">
+            <a:pPr algn="ctr"/>
+            <a:r>
+              <a:rPr sz="1400" b="0">
                 <a:solidFill>
                   <a:srgbClr val="1B2733"/>
                 </a:solidFill>
                 <a:latin typeface="Calibri"/>
               </a:rPr>
-              <a:t>24/10. Demostramos generación y ejecución, no self-healing</a:t>
-            </a:r>
-          </a:p>
-        </p:txBody>
-      </p:sp>
-      <p:sp>
-        <p:nvSpPr>
-          <p:cNvPr id="16" name="TextBox 15"/>
-          <p:cNvSpPr txBox="1"/>
-          <p:nvPr/>
-        </p:nvSpPr>
-        <p:spPr>
-          <a:xfrm>
-            <a:off x="548640" y="6355080"/>
-            <a:ext cx="6858000" cy="274320"/>
-          </a:xfrm>
-          <a:prstGeom prst="rect">
-            <a:avLst/>
-          </a:prstGeom>
-          <a:noFill/>
-        </p:spPr>
-        <p:txBody>
-          <a:bodyPr wrap="square" lIns="0" rIns="0" tIns="0" bIns="0" anchor="t">
-            <a:spAutoFit/>
-          </a:bodyPr>
-          <a:lstStyle/>
-          <a:p>
-            <a:pPr algn="l">
-              <a:spcAft>
-                <a:spcPts val="0"/>
-              </a:spcAft>
-            </a:pPr>
-            <a:r>
-              <a:rPr sz="1100" b="0" i="0">
-                <a:solidFill>
-                  <a:srgbClr val="5B6B7A"/>
-                </a:solidFill>
-                <a:latin typeface="Calibri"/>
-              </a:rPr>
-              <a:t>Captura real de la ejecución local (evidencias/cypress-ia-aprobada.png)</a:t>
+              <a:t>No es un defecto de Qolqe: es una expectativa falsa a propósito</a:t>
             </a:r>
           </a:p>
         </p:txBody>
@@ -13135,7 +11438,7 @@
                 </a:solidFill>
                 <a:latin typeface="Calibri"/>
               </a:rPr>
-              <a:t>Reportes y evidencia</a:t>
+              <a:t>Resultados verificados</a:t>
             </a:r>
           </a:p>
         </p:txBody>
@@ -13174,7 +11477,7 @@
                 </a:solidFill>
                 <a:latin typeface="Calibri"/>
               </a:rPr>
-              <a:t>Guardamos lo que ayuda a explicar un fallo y descartamos el resto</a:t>
+              <a:t>Comprobación del 24 de octubre: Cypress 16.2.0, Chrome 156, Node 24, Qolqe fijado en 8c7d2f0</a:t>
             </a:r>
           </a:p>
         </p:txBody>
@@ -13227,104 +11530,7 @@
         <p:spPr>
           <a:xfrm>
             <a:off x="548640" y="1645920"/>
-            <a:ext cx="2011680" cy="914400"/>
-          </a:xfrm>
-          <a:prstGeom prst="roundRect">
-            <a:avLst>
-              <a:gd name="adj" fmla="val 8000"/>
-            </a:avLst>
-          </a:prstGeom>
-          <a:solidFill>
-            <a:srgbClr val="0F1B2D"/>
-          </a:solidFill>
-          <a:ln>
-            <a:noFill/>
-          </a:ln>
-        </p:spPr>
-        <p:style>
-          <a:lnRef idx="1">
-            <a:schemeClr val="accent1"/>
-          </a:lnRef>
-          <a:fillRef idx="3">
-            <a:schemeClr val="accent1"/>
-          </a:fillRef>
-          <a:effectRef idx="2">
-            <a:schemeClr val="accent1"/>
-          </a:effectRef>
-          <a:fontRef idx="minor">
-            <a:schemeClr val="lt1"/>
-          </a:fontRef>
-        </p:style>
-        <p:txBody>
-          <a:bodyPr rtlCol="0" anchor="ctr" wrap="square" lIns="109728" rIns="109728" tIns="54864" bIns="54864"/>
-          <a:lstStyle/>
-          <a:p>
-            <a:pPr algn="ctr"/>
-            <a:r>
-              <a:rPr sz="1800" b="1">
-                <a:solidFill>
-                  <a:srgbClr val="FFFFFF"/>
-                </a:solidFill>
-                <a:latin typeface="Calibri"/>
-              </a:rPr>
-              <a:t>cypress run</a:t>
-            </a:r>
-          </a:p>
-        </p:txBody>
-      </p:sp>
-      <p:sp>
-        <p:nvSpPr>
-          <p:cNvPr id="6" name="Right Arrow 5"/>
-          <p:cNvSpPr/>
-          <p:nvPr/>
-        </p:nvSpPr>
-        <p:spPr>
-          <a:xfrm>
-            <a:off x="2651760" y="1965960"/>
-            <a:ext cx="274320" cy="274320"/>
-          </a:xfrm>
-          <a:prstGeom prst="rightArrow">
-            <a:avLst/>
-          </a:prstGeom>
-          <a:solidFill>
-            <a:srgbClr val="0F1B2D"/>
-          </a:solidFill>
-          <a:ln>
-            <a:noFill/>
-          </a:ln>
-        </p:spPr>
-        <p:style>
-          <a:lnRef idx="1">
-            <a:schemeClr val="accent1"/>
-          </a:lnRef>
-          <a:fillRef idx="3">
-            <a:schemeClr val="accent1"/>
-          </a:fillRef>
-          <a:effectRef idx="2">
-            <a:schemeClr val="accent1"/>
-          </a:effectRef>
-          <a:fontRef idx="minor">
-            <a:schemeClr val="lt1"/>
-          </a:fontRef>
-        </p:style>
-        <p:txBody>
-          <a:bodyPr rtlCol="0" anchor="ctr"/>
-          <a:lstStyle/>
-          <a:p>
-            <a:pPr algn="ctr"/>
-          </a:p>
-        </p:txBody>
-      </p:sp>
-      <p:sp>
-        <p:nvSpPr>
-          <p:cNvPr id="7" name="Rounded Rectangle 6"/>
-          <p:cNvSpPr/>
-          <p:nvPr/>
-        </p:nvSpPr>
-        <p:spPr>
-          <a:xfrm>
-            <a:off x="3017520" y="1645920"/>
-            <a:ext cx="2194560" cy="914400"/>
+            <a:ext cx="2651760" cy="1554480"/>
           </a:xfrm>
           <a:prstGeom prst="roundRect">
             <a:avLst>
@@ -13355,18 +11561,87 @@
           </a:fontRef>
         </p:style>
         <p:txBody>
-          <a:bodyPr rtlCol="0" anchor="ctr" wrap="square" lIns="109728" rIns="109728" tIns="54864" bIns="54864"/>
+          <a:bodyPr rtlCol="0" anchor="ctr"/>
           <a:lstStyle/>
           <a:p>
             <a:pPr algn="ctr"/>
-            <a:r>
-              <a:rPr sz="1500" b="1">
+          </a:p>
+        </p:txBody>
+      </p:sp>
+      <p:sp>
+        <p:nvSpPr>
+          <p:cNvPr id="6" name="TextBox 5"/>
+          <p:cNvSpPr txBox="1"/>
+          <p:nvPr/>
+        </p:nvSpPr>
+        <p:spPr>
+          <a:xfrm>
+            <a:off x="548640" y="1783080"/>
+            <a:ext cx="2651760" cy="822960"/>
+          </a:xfrm>
+          <a:prstGeom prst="rect">
+            <a:avLst/>
+          </a:prstGeom>
+          <a:noFill/>
+        </p:spPr>
+        <p:txBody>
+          <a:bodyPr wrap="square" lIns="0" rIns="0" tIns="0" bIns="0" anchor="t">
+            <a:spAutoFit/>
+          </a:bodyPr>
+          <a:lstStyle/>
+          <a:p>
+            <a:pPr algn="ctr">
+              <a:spcAft>
+                <a:spcPts val="0"/>
+              </a:spcAft>
+            </a:pPr>
+            <a:r>
+              <a:rPr sz="4800" b="1" i="0">
+                <a:solidFill>
+                  <a:srgbClr val="2BD18F"/>
+                </a:solidFill>
+                <a:latin typeface="Cambria"/>
+              </a:rPr>
+              <a:t>1</a:t>
+            </a:r>
+          </a:p>
+        </p:txBody>
+      </p:sp>
+      <p:sp>
+        <p:nvSpPr>
+          <p:cNvPr id="7" name="TextBox 6"/>
+          <p:cNvSpPr txBox="1"/>
+          <p:nvPr/>
+        </p:nvSpPr>
+        <p:spPr>
+          <a:xfrm>
+            <a:off x="685800" y="2697480"/>
+            <a:ext cx="2377440" cy="457200"/>
+          </a:xfrm>
+          <a:prstGeom prst="rect">
+            <a:avLst/>
+          </a:prstGeom>
+          <a:noFill/>
+        </p:spPr>
+        <p:txBody>
+          <a:bodyPr wrap="square" lIns="0" rIns="0" tIns="0" bIns="0" anchor="t">
+            <a:spAutoFit/>
+          </a:bodyPr>
+          <a:lstStyle/>
+          <a:p>
+            <a:pPr algn="ctr">
+              <a:spcAft>
+                <a:spcPts val="0"/>
+              </a:spcAft>
+            </a:pPr>
+            <a:r>
+              <a:rPr sz="1400" b="0" i="0">
                 <a:solidFill>
                   <a:srgbClr val="1B2733"/>
                 </a:solidFill>
                 <a:latin typeface="Calibri"/>
               </a:rPr>
-              <a:t>¿Falló algún intento del spec?</a:t>
+              <a:t>smoke aprobado</a:t>
             </a:r>
           </a:p>
         </p:txBody>
@@ -13379,8 +11654,8 @@
         </p:nvSpPr>
         <p:spPr>
           <a:xfrm>
-            <a:off x="5577840" y="1371600"/>
-            <a:ext cx="3017520" cy="731520"/>
+            <a:off x="3383280" y="1645920"/>
+            <a:ext cx="2651760" cy="1554480"/>
           </a:xfrm>
           <a:prstGeom prst="roundRect">
             <a:avLst>
@@ -13388,11 +11663,11 @@
             </a:avLst>
           </a:prstGeom>
           <a:solidFill>
-            <a:srgbClr val="FDECEC"/>
+            <a:srgbClr val="FFFFFF"/>
           </a:solidFill>
           <a:ln w="19050">
             <a:solidFill>
-              <a:srgbClr val="DC4A4F"/>
+              <a:srgbClr val="D5DEE8"/>
             </a:solidFill>
           </a:ln>
         </p:spPr>
@@ -13411,32 +11686,101 @@
           </a:fontRef>
         </p:style>
         <p:txBody>
-          <a:bodyPr rtlCol="0" anchor="ctr" wrap="square" lIns="109728" rIns="109728" tIns="54864" bIns="54864"/>
+          <a:bodyPr rtlCol="0" anchor="ctr"/>
           <a:lstStyle/>
           <a:p>
             <a:pPr algn="ctr"/>
-            <a:r>
-              <a:rPr sz="1400" b="0">
-                <a:solidFill>
-                  <a:srgbClr val="8A1F24"/>
-                </a:solidFill>
-                <a:latin typeface="Calibri"/>
-              </a:rPr>
-              <a:t>Sí: conserva captura, video y reporte</a:t>
-            </a:r>
-          </a:p>
-        </p:txBody>
-      </p:sp>
-      <p:sp>
-        <p:nvSpPr>
-          <p:cNvPr id="9" name="Rounded Rectangle 8"/>
+          </a:p>
+        </p:txBody>
+      </p:sp>
+      <p:sp>
+        <p:nvSpPr>
+          <p:cNvPr id="9" name="TextBox 8"/>
+          <p:cNvSpPr txBox="1"/>
+          <p:nvPr/>
+        </p:nvSpPr>
+        <p:spPr>
+          <a:xfrm>
+            <a:off x="3383280" y="1783080"/>
+            <a:ext cx="2651760" cy="822960"/>
+          </a:xfrm>
+          <a:prstGeom prst="rect">
+            <a:avLst/>
+          </a:prstGeom>
+          <a:noFill/>
+        </p:spPr>
+        <p:txBody>
+          <a:bodyPr wrap="square" lIns="0" rIns="0" tIns="0" bIns="0" anchor="t">
+            <a:spAutoFit/>
+          </a:bodyPr>
+          <a:lstStyle/>
+          <a:p>
+            <a:pPr algn="ctr">
+              <a:spcAft>
+                <a:spcPts val="0"/>
+              </a:spcAft>
+            </a:pPr>
+            <a:r>
+              <a:rPr sz="4800" b="1" i="0">
+                <a:solidFill>
+                  <a:srgbClr val="2BD18F"/>
+                </a:solidFill>
+                <a:latin typeface="Cambria"/>
+              </a:rPr>
+              <a:t>3</a:t>
+            </a:r>
+          </a:p>
+        </p:txBody>
+      </p:sp>
+      <p:sp>
+        <p:nvSpPr>
+          <p:cNvPr id="10" name="TextBox 9"/>
+          <p:cNvSpPr txBox="1"/>
+          <p:nvPr/>
+        </p:nvSpPr>
+        <p:spPr>
+          <a:xfrm>
+            <a:off x="3520440" y="2697480"/>
+            <a:ext cx="2377440" cy="457200"/>
+          </a:xfrm>
+          <a:prstGeom prst="rect">
+            <a:avLst/>
+          </a:prstGeom>
+          <a:noFill/>
+        </p:spPr>
+        <p:txBody>
+          <a:bodyPr wrap="square" lIns="0" rIns="0" tIns="0" bIns="0" anchor="t">
+            <a:spAutoFit/>
+          </a:bodyPr>
+          <a:lstStyle/>
+          <a:p>
+            <a:pPr algn="ctr">
+              <a:spcAft>
+                <a:spcPts val="0"/>
+              </a:spcAft>
+            </a:pPr>
+            <a:r>
+              <a:rPr sz="1400" b="0" i="0">
+                <a:solidFill>
+                  <a:srgbClr val="1B2733"/>
+                </a:solidFill>
+                <a:latin typeface="Calibri"/>
+              </a:rPr>
+              <a:t>regresión aprobados</a:t>
+            </a:r>
+          </a:p>
+        </p:txBody>
+      </p:sp>
+      <p:sp>
+        <p:nvSpPr>
+          <p:cNvPr id="11" name="Rounded Rectangle 10"/>
           <p:cNvSpPr/>
           <p:nvPr/>
         </p:nvSpPr>
         <p:spPr>
           <a:xfrm>
-            <a:off x="5577840" y="2286000"/>
-            <a:ext cx="3017520" cy="731520"/>
+            <a:off x="6217920" y="1645920"/>
+            <a:ext cx="2651760" cy="1554480"/>
           </a:xfrm>
           <a:prstGeom prst="roundRect">
             <a:avLst>
@@ -13444,11 +11788,11 @@
             </a:avLst>
           </a:prstGeom>
           <a:solidFill>
-            <a:srgbClr val="E7F8F0"/>
+            <a:srgbClr val="FFFFFF"/>
           </a:solidFill>
           <a:ln w="19050">
             <a:solidFill>
-              <a:srgbClr val="2BD18F"/>
+              <a:srgbClr val="D5DEE8"/>
             </a:solidFill>
           </a:ln>
         </p:spPr>
@@ -13467,41 +11811,114 @@
           </a:fontRef>
         </p:style>
         <p:txBody>
-          <a:bodyPr rtlCol="0" anchor="ctr" wrap="square" lIns="109728" rIns="109728" tIns="54864" bIns="54864"/>
+          <a:bodyPr rtlCol="0" anchor="ctr"/>
           <a:lstStyle/>
           <a:p>
             <a:pPr algn="ctr"/>
-            <a:r>
-              <a:rPr sz="1400" b="0">
-                <a:solidFill>
-                  <a:srgbClr val="0B5E41"/>
-                </a:solidFill>
-                <a:latin typeface="Calibri"/>
-              </a:rPr>
-              <a:t>No: elimina el video (hook after:spec)</a:t>
-            </a:r>
-          </a:p>
-        </p:txBody>
-      </p:sp>
-      <p:sp>
-        <p:nvSpPr>
-          <p:cNvPr id="10" name="Right Arrow 9"/>
+          </a:p>
+        </p:txBody>
+      </p:sp>
+      <p:sp>
+        <p:nvSpPr>
+          <p:cNvPr id="12" name="TextBox 11"/>
+          <p:cNvSpPr txBox="1"/>
+          <p:nvPr/>
+        </p:nvSpPr>
+        <p:spPr>
+          <a:xfrm>
+            <a:off x="6217920" y="1783080"/>
+            <a:ext cx="2651760" cy="822960"/>
+          </a:xfrm>
+          <a:prstGeom prst="rect">
+            <a:avLst/>
+          </a:prstGeom>
+          <a:noFill/>
+        </p:spPr>
+        <p:txBody>
+          <a:bodyPr wrap="square" lIns="0" rIns="0" tIns="0" bIns="0" anchor="t">
+            <a:spAutoFit/>
+          </a:bodyPr>
+          <a:lstStyle/>
+          <a:p>
+            <a:pPr algn="ctr">
+              <a:spcAft>
+                <a:spcPts val="0"/>
+              </a:spcAft>
+            </a:pPr>
+            <a:r>
+              <a:rPr sz="4800" b="1" i="0">
+                <a:solidFill>
+                  <a:srgbClr val="E8923A"/>
+                </a:solidFill>
+                <a:latin typeface="Cambria"/>
+              </a:rPr>
+              <a:t>1</a:t>
+            </a:r>
+          </a:p>
+        </p:txBody>
+      </p:sp>
+      <p:sp>
+        <p:nvSpPr>
+          <p:cNvPr id="13" name="TextBox 12"/>
+          <p:cNvSpPr txBox="1"/>
+          <p:nvPr/>
+        </p:nvSpPr>
+        <p:spPr>
+          <a:xfrm>
+            <a:off x="6355080" y="2697480"/>
+            <a:ext cx="2377440" cy="457200"/>
+          </a:xfrm>
+          <a:prstGeom prst="rect">
+            <a:avLst/>
+          </a:prstGeom>
+          <a:noFill/>
+        </p:spPr>
+        <p:txBody>
+          <a:bodyPr wrap="square" lIns="0" rIns="0" tIns="0" bIns="0" anchor="t">
+            <a:spAutoFit/>
+          </a:bodyPr>
+          <a:lstStyle/>
+          <a:p>
+            <a:pPr algn="ctr">
+              <a:spcAft>
+                <a:spcPts val="0"/>
+              </a:spcAft>
+            </a:pPr>
+            <a:r>
+              <a:rPr sz="1400" b="0" i="0">
+                <a:solidFill>
+                  <a:srgbClr val="1B2733"/>
+                </a:solidFill>
+                <a:latin typeface="Calibri"/>
+              </a:rPr>
+              <a:t>fallo esperado de la demo</a:t>
+            </a:r>
+          </a:p>
+        </p:txBody>
+      </p:sp>
+      <p:sp>
+        <p:nvSpPr>
+          <p:cNvPr id="14" name="Rounded Rectangle 13"/>
           <p:cNvSpPr/>
           <p:nvPr/>
         </p:nvSpPr>
         <p:spPr>
           <a:xfrm>
-            <a:off x="5257800" y="1600200"/>
-            <a:ext cx="274320" cy="228600"/>
-          </a:xfrm>
-          <a:prstGeom prst="rightArrow">
-            <a:avLst/>
+            <a:off x="9052560" y="1645920"/>
+            <a:ext cx="2651760" cy="1554480"/>
+          </a:xfrm>
+          <a:prstGeom prst="roundRect">
+            <a:avLst>
+              <a:gd name="adj" fmla="val 8000"/>
+            </a:avLst>
           </a:prstGeom>
           <a:solidFill>
-            <a:srgbClr val="DC4A4F"/>
+            <a:srgbClr val="FFFFFF"/>
           </a:solidFill>
-          <a:ln>
-            <a:noFill/>
+          <a:ln w="19050">
+            <a:solidFill>
+              <a:srgbClr val="D5DEE8"/>
+            </a:solidFill>
           </a:ln>
         </p:spPr>
         <p:style>
@@ -13528,16 +11945,112 @@
       </p:sp>
       <p:sp>
         <p:nvSpPr>
-          <p:cNvPr id="11" name="Right Arrow 10"/>
+          <p:cNvPr id="15" name="TextBox 14"/>
+          <p:cNvSpPr txBox="1"/>
+          <p:nvPr/>
+        </p:nvSpPr>
+        <p:spPr>
+          <a:xfrm>
+            <a:off x="9052560" y="1783080"/>
+            <a:ext cx="2651760" cy="822960"/>
+          </a:xfrm>
+          <a:prstGeom prst="rect">
+            <a:avLst/>
+          </a:prstGeom>
+          <a:noFill/>
+        </p:spPr>
+        <p:txBody>
+          <a:bodyPr wrap="square" lIns="0" rIns="0" tIns="0" bIns="0" anchor="t">
+            <a:spAutoFit/>
+          </a:bodyPr>
+          <a:lstStyle/>
+          <a:p>
+            <a:pPr algn="ctr">
+              <a:spcAft>
+                <a:spcPts val="0"/>
+              </a:spcAft>
+            </a:pPr>
+            <a:r>
+              <a:rPr sz="4800" b="1" i="0">
+                <a:solidFill>
+                  <a:srgbClr val="2BD18F"/>
+                </a:solidFill>
+                <a:latin typeface="Cambria"/>
+              </a:rPr>
+              <a:t>OK</a:t>
+            </a:r>
+          </a:p>
+        </p:txBody>
+      </p:sp>
+      <p:sp>
+        <p:nvSpPr>
+          <p:cNvPr id="16" name="TextBox 15"/>
+          <p:cNvSpPr txBox="1"/>
+          <p:nvPr/>
+        </p:nvSpPr>
+        <p:spPr>
+          <a:xfrm>
+            <a:off x="9189720" y="2697480"/>
+            <a:ext cx="2377440" cy="457200"/>
+          </a:xfrm>
+          <a:prstGeom prst="rect">
+            <a:avLst/>
+          </a:prstGeom>
+          <a:noFill/>
+        </p:spPr>
+        <p:txBody>
+          <a:bodyPr wrap="square" lIns="0" rIns="0" tIns="0" bIns="0" anchor="t">
+            <a:spAutoFit/>
+          </a:bodyPr>
+          <a:lstStyle/>
+          <a:p>
+            <a:pPr algn="ctr">
+              <a:spcAft>
+                <a:spcPts val="0"/>
+              </a:spcAft>
+            </a:pPr>
+            <a:r>
+              <a:rPr sz="1400" b="0" i="0">
+                <a:solidFill>
+                  <a:srgbClr val="1B2733"/>
+                </a:solidFill>
+                <a:latin typeface="Calibri"/>
+              </a:rPr>
+              <a:t>CI en GitHub Actions</a:t>
+            </a:r>
+          </a:p>
+        </p:txBody>
+      </p:sp>
+      <p:graphicFrame>
+        <p:nvGraphicFramePr>
+          <p:cNvPr id="17" name="Chart 16"/>
+          <p:cNvGraphicFramePr>
+            <a:graphicFrameLocks noGrp="1"/>
+          </p:cNvGraphicFramePr>
+          <p:nvPr/>
+        </p:nvGraphicFramePr>
+        <p:xfrm>
+          <a:off x="548640" y="3520440"/>
+          <a:ext cx="6675120" cy="2468880"/>
+        </p:xfrm>
+        <a:graphic>
+          <a:graphicData uri="http://schemas.openxmlformats.org/drawingml/2006/chart">
+            <c:chart xmlns:c="http://schemas.openxmlformats.org/drawingml/2006/chart" r:id="rId3"/>
+          </a:graphicData>
+        </a:graphic>
+      </p:graphicFrame>
+      <p:sp>
+        <p:nvSpPr>
+          <p:cNvPr id="18" name="Oval 17"/>
           <p:cNvSpPr/>
           <p:nvPr/>
         </p:nvSpPr>
         <p:spPr>
           <a:xfrm>
-            <a:off x="5257800" y="2468880"/>
-            <a:ext cx="274320" cy="228600"/>
-          </a:xfrm>
-          <a:prstGeom prst="rightArrow">
+            <a:off x="7680960" y="3694176"/>
+            <a:ext cx="128016" cy="128016"/>
+          </a:xfrm>
+          <a:prstGeom prst="ellipse">
             <a:avLst/>
           </a:prstGeom>
           <a:solidFill>
@@ -13569,39 +12082,54 @@
           </a:p>
         </p:txBody>
       </p:sp>
-      <p:pic>
-        <p:nvPicPr>
-          <p:cNvPr id="12" name="Picture 11" descr="config.png"/>
-          <p:cNvPicPr>
-            <a:picLocks noChangeAspect="1"/>
-          </p:cNvPicPr>
-          <p:nvPr/>
-        </p:nvPicPr>
-        <p:blipFill>
-          <a:blip r:embed="rId3"/>
-          <a:stretch>
-            <a:fillRect/>
-          </a:stretch>
-        </p:blipFill>
-        <p:spPr>
-          <a:xfrm>
-            <a:off x="548640" y="3291840"/>
-            <a:ext cx="6309360" cy="1055262"/>
+      <p:sp>
+        <p:nvSpPr>
+          <p:cNvPr id="19" name="TextBox 18"/>
+          <p:cNvSpPr txBox="1"/>
+          <p:nvPr/>
+        </p:nvSpPr>
+        <p:spPr>
+          <a:xfrm>
+            <a:off x="7955280" y="3611880"/>
+            <a:ext cx="3749040" cy="685800"/>
           </a:xfrm>
           <a:prstGeom prst="rect">
             <a:avLst/>
           </a:prstGeom>
-        </p:spPr>
-      </p:pic>
-      <p:sp>
-        <p:nvSpPr>
-          <p:cNvPr id="13" name="Oval 12"/>
+          <a:noFill/>
+        </p:spPr>
+        <p:txBody>
+          <a:bodyPr wrap="square" lIns="0" rIns="0" tIns="0" bIns="0" anchor="t">
+            <a:spAutoFit/>
+          </a:bodyPr>
+          <a:lstStyle/>
+          <a:p>
+            <a:pPr algn="l">
+              <a:spcAft>
+                <a:spcPts val="0"/>
+              </a:spcAft>
+            </a:pPr>
+            <a:r>
+              <a:rPr sz="1400" b="0" i="0">
+                <a:solidFill>
+                  <a:srgbClr val="1B2733"/>
+                </a:solidFill>
+                <a:latin typeface="Calibri"/>
+              </a:rPr>
+              <a:t>El happy path corrió dos veces, con datos independientes</a:t>
+            </a:r>
+          </a:p>
+        </p:txBody>
+      </p:sp>
+      <p:sp>
+        <p:nvSpPr>
+          <p:cNvPr id="20" name="Oval 19"/>
           <p:cNvSpPr/>
           <p:nvPr/>
         </p:nvSpPr>
         <p:spPr>
           <a:xfrm>
-            <a:off x="7315200" y="3374136"/>
+            <a:off x="7680960" y="4379976"/>
             <a:ext cx="128016" cy="128016"/>
           </a:xfrm>
           <a:prstGeom prst="ellipse">
@@ -13638,14 +12166,14 @@
       </p:sp>
       <p:sp>
         <p:nvSpPr>
-          <p:cNvPr id="14" name="TextBox 13"/>
+          <p:cNvPr id="21" name="TextBox 20"/>
           <p:cNvSpPr txBox="1"/>
           <p:nvPr/>
         </p:nvSpPr>
         <p:spPr>
           <a:xfrm>
-            <a:off x="7589520" y="3291840"/>
-            <a:ext cx="4114800" cy="566928"/>
+            <a:off x="7955280" y="4297680"/>
+            <a:ext cx="3749040" cy="685800"/>
           </a:xfrm>
           <a:prstGeom prst="rect">
             <a:avLst/>
@@ -13664,26 +12192,26 @@
               </a:spcAft>
             </a:pPr>
             <a:r>
-              <a:rPr sz="1500" b="0" i="0">
+              <a:rPr sz="1400" b="0" i="0">
                 <a:solidFill>
                   <a:srgbClr val="1B2733"/>
                 </a:solidFill>
                 <a:latin typeface="Calibri"/>
               </a:rPr>
-              <a:t>Reporte HTML por ejecución (mochawesome)</a:t>
-            </a:r>
-          </a:p>
-        </p:txBody>
-      </p:sp>
-      <p:sp>
-        <p:nvSpPr>
-          <p:cNvPr id="15" name="Oval 14"/>
+              <a:t>TypeScript sin errores</a:t>
+            </a:r>
+          </a:p>
+        </p:txBody>
+      </p:sp>
+      <p:sp>
+        <p:nvSpPr>
+          <p:cNvPr id="22" name="Oval 21"/>
           <p:cNvSpPr/>
           <p:nvPr/>
         </p:nvSpPr>
         <p:spPr>
           <a:xfrm>
-            <a:off x="7315200" y="3941063"/>
+            <a:off x="7680960" y="5065776"/>
             <a:ext cx="128016" cy="128016"/>
           </a:xfrm>
           <a:prstGeom prst="ellipse">
@@ -13720,14 +12248,14 @@
       </p:sp>
       <p:sp>
         <p:nvSpPr>
-          <p:cNvPr id="16" name="TextBox 15"/>
+          <p:cNvPr id="23" name="TextBox 22"/>
           <p:cNvSpPr txBox="1"/>
           <p:nvPr/>
         </p:nvSpPr>
         <p:spPr>
           <a:xfrm>
-            <a:off x="7589520" y="3858768"/>
-            <a:ext cx="4114800" cy="566928"/>
+            <a:off x="7955280" y="4983480"/>
+            <a:ext cx="3749040" cy="685800"/>
           </a:xfrm>
           <a:prstGeom prst="rect">
             <a:avLst/>
@@ -13746,233 +12274,13 @@
               </a:spcAft>
             </a:pPr>
             <a:r>
-              <a:rPr sz="1500" b="0" i="0">
+              <a:rPr sz="1400" b="0" i="0">
                 <a:solidFill>
                   <a:srgbClr val="1B2733"/>
                 </a:solidFill>
                 <a:latin typeface="Calibri"/>
               </a:rPr>
-              <a:t>Capturas automáticas al fallar, solo en run</a:t>
-            </a:r>
-          </a:p>
-        </p:txBody>
-      </p:sp>
-      <p:sp>
-        <p:nvSpPr>
-          <p:cNvPr id="17" name="Oval 16"/>
-          <p:cNvSpPr/>
-          <p:nvPr/>
-        </p:nvSpPr>
-        <p:spPr>
-          <a:xfrm>
-            <a:off x="7315200" y="4507992"/>
-            <a:ext cx="128016" cy="128016"/>
-          </a:xfrm>
-          <a:prstGeom prst="ellipse">
-            <a:avLst/>
-          </a:prstGeom>
-          <a:solidFill>
-            <a:srgbClr val="2BD18F"/>
-          </a:solidFill>
-          <a:ln>
-            <a:noFill/>
-          </a:ln>
-        </p:spPr>
-        <p:style>
-          <a:lnRef idx="1">
-            <a:schemeClr val="accent1"/>
-          </a:lnRef>
-          <a:fillRef idx="3">
-            <a:schemeClr val="accent1"/>
-          </a:fillRef>
-          <a:effectRef idx="2">
-            <a:schemeClr val="accent1"/>
-          </a:effectRef>
-          <a:fontRef idx="minor">
-            <a:schemeClr val="lt1"/>
-          </a:fontRef>
-        </p:style>
-        <p:txBody>
-          <a:bodyPr rtlCol="0" anchor="ctr"/>
-          <a:lstStyle/>
-          <a:p>
-            <a:pPr algn="ctr"/>
-          </a:p>
-        </p:txBody>
-      </p:sp>
-      <p:sp>
-        <p:nvSpPr>
-          <p:cNvPr id="18" name="TextBox 17"/>
-          <p:cNvSpPr txBox="1"/>
-          <p:nvPr/>
-        </p:nvSpPr>
-        <p:spPr>
-          <a:xfrm>
-            <a:off x="7589520" y="4425696"/>
-            <a:ext cx="4114800" cy="566928"/>
-          </a:xfrm>
-          <a:prstGeom prst="rect">
-            <a:avLst/>
-          </a:prstGeom>
-          <a:noFill/>
-        </p:spPr>
-        <p:txBody>
-          <a:bodyPr wrap="square" lIns="0" rIns="0" tIns="0" bIns="0" anchor="t">
-            <a:spAutoFit/>
-          </a:bodyPr>
-          <a:lstStyle/>
-          <a:p>
-            <a:pPr algn="l">
-              <a:spcAft>
-                <a:spcPts val="0"/>
-              </a:spcAft>
-            </a:pPr>
-            <a:r>
-              <a:rPr sz="1500" b="0" i="0">
-                <a:solidFill>
-                  <a:srgbClr val="1B2733"/>
-                </a:solidFill>
-                <a:latin typeface="Calibri"/>
-              </a:rPr>
-              <a:t>Sin reintentos de tests que oculten resultados</a:t>
-            </a:r>
-          </a:p>
-        </p:txBody>
-      </p:sp>
-      <p:sp>
-        <p:nvSpPr>
-          <p:cNvPr id="19" name="Oval 18"/>
-          <p:cNvSpPr/>
-          <p:nvPr/>
-        </p:nvSpPr>
-        <p:spPr>
-          <a:xfrm>
-            <a:off x="7315200" y="5074920"/>
-            <a:ext cx="128016" cy="128016"/>
-          </a:xfrm>
-          <a:prstGeom prst="ellipse">
-            <a:avLst/>
-          </a:prstGeom>
-          <a:solidFill>
-            <a:srgbClr val="2BD18F"/>
-          </a:solidFill>
-          <a:ln>
-            <a:noFill/>
-          </a:ln>
-        </p:spPr>
-        <p:style>
-          <a:lnRef idx="1">
-            <a:schemeClr val="accent1"/>
-          </a:lnRef>
-          <a:fillRef idx="3">
-            <a:schemeClr val="accent1"/>
-          </a:fillRef>
-          <a:effectRef idx="2">
-            <a:schemeClr val="accent1"/>
-          </a:effectRef>
-          <a:fontRef idx="minor">
-            <a:schemeClr val="lt1"/>
-          </a:fontRef>
-        </p:style>
-        <p:txBody>
-          <a:bodyPr rtlCol="0" anchor="ctr"/>
-          <a:lstStyle/>
-          <a:p>
-            <a:pPr algn="ctr"/>
-          </a:p>
-        </p:txBody>
-      </p:sp>
-      <p:sp>
-        <p:nvSpPr>
-          <p:cNvPr id="20" name="TextBox 19"/>
-          <p:cNvSpPr txBox="1"/>
-          <p:nvPr/>
-        </p:nvSpPr>
-        <p:spPr>
-          <a:xfrm>
-            <a:off x="7589520" y="4992624"/>
-            <a:ext cx="4114800" cy="566928"/>
-          </a:xfrm>
-          <a:prstGeom prst="rect">
-            <a:avLst/>
-          </a:prstGeom>
-          <a:noFill/>
-        </p:spPr>
-        <p:txBody>
-          <a:bodyPr wrap="square" lIns="0" rIns="0" tIns="0" bIns="0" anchor="t">
-            <a:spAutoFit/>
-          </a:bodyPr>
-          <a:lstStyle/>
-          <a:p>
-            <a:pPr algn="l">
-              <a:spcAft>
-                <a:spcPts val="0"/>
-              </a:spcAft>
-            </a:pPr>
-            <a:r>
-              <a:rPr sz="1500" b="0" i="0">
-                <a:solidFill>
-                  <a:srgbClr val="1B2733"/>
-                </a:solidFill>
-                <a:latin typeface="Calibri"/>
-              </a:rPr>
-              <a:t>CI guarda los artefactos 7 días</a:t>
-            </a:r>
-          </a:p>
-        </p:txBody>
-      </p:sp>
-      <p:sp>
-        <p:nvSpPr>
-          <p:cNvPr id="21" name="Rounded Rectangle 20"/>
-          <p:cNvSpPr/>
-          <p:nvPr/>
-        </p:nvSpPr>
-        <p:spPr>
-          <a:xfrm>
-            <a:off x="548640" y="5120640"/>
-            <a:ext cx="11064240" cy="868680"/>
-          </a:xfrm>
-          <a:prstGeom prst="roundRect">
-            <a:avLst>
-              <a:gd name="adj" fmla="val 8000"/>
-            </a:avLst>
-          </a:prstGeom>
-          <a:solidFill>
-            <a:srgbClr val="FFFFFF"/>
-          </a:solidFill>
-          <a:ln w="19050">
-            <a:solidFill>
-              <a:srgbClr val="E8923A"/>
-            </a:solidFill>
-          </a:ln>
-        </p:spPr>
-        <p:style>
-          <a:lnRef idx="1">
-            <a:schemeClr val="accent1"/>
-          </a:lnRef>
-          <a:fillRef idx="3">
-            <a:schemeClr val="accent1"/>
-          </a:fillRef>
-          <a:effectRef idx="2">
-            <a:schemeClr val="accent1"/>
-          </a:effectRef>
-          <a:fontRef idx="minor">
-            <a:schemeClr val="lt1"/>
-          </a:fontRef>
-        </p:style>
-        <p:txBody>
-          <a:bodyPr rtlCol="0" anchor="ctr" wrap="square" lIns="109728" rIns="109728" tIns="54864" bIns="54864"/>
-          <a:lstStyle/>
-          <a:p>
-            <a:pPr algn="ctr"/>
-            <a:r>
-              <a:rPr sz="1400" b="0">
-                <a:solidFill>
-                  <a:srgbClr val="1B2733"/>
-                </a:solidFill>
-                <a:latin typeface="Calibri"/>
-              </a:rPr>
-              <a:t>Aviso real: una ejecución verde dijo «Insufficient frames captured to create video». Un test verde no garantiza que la evidencia se generó: hay que revisar los artefactos.</a:t>
+              <a:t>Videos solo en el spec fallido</a:t>
             </a:r>
           </a:p>
         </p:txBody>
